--- a/demo_session/deck_tg_fang.pptx
+++ b/demo_session/deck_tg_fang.pptx
@@ -19,6 +19,9 @@
     <p:sldId id="267" r:id="rId18"/>
     <p:sldId id="268" r:id="rId19"/>
     <p:sldId id="269" r:id="rId20"/>
+    <p:sldId id="270" r:id="rId21"/>
+    <p:sldId id="271" r:id="rId22"/>
+    <p:sldId id="272" r:id="rId23"/>
   </p:sldIdLst>
   <p:sldSz cx="12191695" cy="6858000" type="screen4x3"/>
   <p:notesSz cx="6858000" cy="9144000"/>
@@ -3151,7 +3154,7 @@
                 </a:solidFill>
                 <a:latin typeface="Arial"/>
               </a:rPr>
-              <a:t>A polarization phase-shifting Twyman–Green in MACOS: three splitter options priced, the idealized gauge closed at 0.18 nm, and calibration taken to the actuator scale</a:t>
+              <a:t>A polarization phase-shifting Twyman–Green in MACOS: three splitter options priced, the idealized gauge closed at 0.18 nm, calibration taken to the actuator scale — and the shallow-plate option laid out and measured at full 96×96 scale</a:t>
             </a:r>
           </a:p>
           <a:p>
@@ -3226,45 +3229,6 @@
           </a:bodyPr>
           <a:lstStyle/>
           <a:p/>
-        </p:txBody>
-      </p:sp>
-      <p:sp>
-        <p:nvSpPr>
-          <p:cNvPr id="4" name="TextBox 3"/>
-          <p:cNvSpPr txBox="1"/>
-          <p:nvPr/>
-        </p:nvSpPr>
-        <p:spPr>
-          <a:xfrm>
-            <a:off x="813816" y="6309360"/>
-            <a:ext cx="10543032" cy="292608"/>
-          </a:xfrm>
-          <a:prstGeom prst="rect">
-            <a:avLst/>
-          </a:prstGeom>
-          <a:noFill/>
-        </p:spPr>
-        <p:txBody>
-          <a:bodyPr wrap="square">
-            <a:spAutoFit/>
-          </a:bodyPr>
-          <a:lstStyle/>
-          <a:p>
-            <a:pPr algn="ctr">
-              <a:spcAft>
-                <a:spcPts val="0"/>
-              </a:spcAft>
-            </a:pPr>
-            <a:r>
-              <a:rPr sz="950" b="0">
-                <a:solidFill>
-                  <a:srgbClr val="6E6E6E"/>
-                </a:solidFill>
-                <a:latin typeface="Arial"/>
-              </a:rPr>
-              <a:t>This document has been reviewed and determined not to contain export-controlled information</a:t>
-            </a:r>
-          </a:p>
         </p:txBody>
       </p:sp>
     </p:spTree>
@@ -4268,7 +4232,7 @@
                 </a:solidFill>
                 <a:latin typeface="Arial"/>
               </a:rPr>
-              <a:t>What this offers a bench program</a:t>
+              <a:t>The shallow plate at full scale: a 96×96, 1 mm-pitch Xinetics DM</a:t>
             </a:r>
           </a:p>
           <a:p>
@@ -4284,7 +4248,7 @@
                 </a:solidFill>
                 <a:latin typeface="Arial"/>
               </a:rPr>
-              <a:t>An instrument-error sandbox where truth is exact and every systematic prints</a:t>
+              <a:t>The layout is solved against clearances — and, after one silent failure, the sampling is solved with it</a:t>
             </a:r>
           </a:p>
         </p:txBody>
@@ -4342,7 +4306,7 @@
         <p:spPr>
           <a:xfrm>
             <a:off x="411480" y="1298448"/>
-            <a:ext cx="11368735" cy="274320"/>
+            <a:ext cx="5806440" cy="274320"/>
           </a:xfrm>
           <a:prstGeom prst="rect">
             <a:avLst/>
@@ -4361,13 +4325,13 @@
               </a:spcAft>
             </a:pPr>
             <a:r>
-              <a:rPr sz="1500" b="0">
+              <a:rPr sz="1200" b="0">
                 <a:solidFill>
                   <a:srgbClr val="282828"/>
                 </a:solidFill>
                 <a:latin typeface="Arial"/>
               </a:rPr>
-              <a:t>•  Catch the invisible class before hardware does: the plate rig's 11.7% scale error moved contrast 0.17% — found on first closure in the model, because the model has the truth panel a bench lacks.</a:t>
+              <a:t>•  The article: a Xinetics 96×96-actuator DM at 1.0 mm pitch — a 96 mm beam, the aperture class where the cube goes custom and the shallow plate is the natural choice.  The rig is scaled up 1.71× and re-solved, not just magnified.</a:t>
             </a:r>
           </a:p>
           <a:p>
@@ -4377,13 +4341,13 @@
               </a:spcAft>
             </a:pPr>
             <a:r>
-              <a:rPr sz="1500" b="0">
+              <a:rPr sz="1200" b="0">
                 <a:solidFill>
                   <a:srgbClr val="282828"/>
                 </a:solidFill>
                 <a:latin typeface="Arial"/>
               </a:rPr>
-              <a:t>•  Price hardware choices in instrument terms: the three-option table is the pattern — splitter angle, cube against plate, waveplate tolerances, coating terminations, analyzer options (rotating or pixelated) all price the same way.</a:t>
+              <a:t>•  Clearances set the geometry: the arms separate at twice the plate's incidence angle, so beam-edge clearances (25 mm margin around real component bodies) fix the plate at 7° with a 700 mm DM leg.  Achieved margins: +28, +58, +68 mm; the binding pair is the DM arm against the reference beam.</a:t>
             </a:r>
           </a:p>
           <a:p>
@@ -4393,43 +4357,51 @@
               </a:spcAft>
             </a:pPr>
             <a:r>
-              <a:rPr sz="1500" b="0">
+              <a:rPr sz="1200" b="0">
                 <a:solidFill>
                   <a:srgbClr val="282828"/>
                 </a:solidFill>
                 <a:latin typeface="Arial"/>
               </a:rPr>
-              <a:t>•  Rehearse calibration protocols: the low-order and actuator-scale calibrations are scripts; a planned bench protocol can run against the model first, with injected errors of chosen size.</a:t>
-            </a:r>
-          </a:p>
-          <a:p>
-            <a:pPr>
-              <a:spcAft>
-                <a:spcPts val="600"/>
-              </a:spcAft>
-            </a:pPr>
-            <a:r>
-              <a:rPr sz="1500" b="0">
-                <a:solidFill>
-                  <a:srgbClr val="282828"/>
-                </a:solidFill>
-                <a:latin typeface="Arial"/>
-              </a:rPr>
-              <a:t>•  What the model does not yet carry: source noise, detector noise, vibration and drift — the idealized gauge is the systematic-error floor, not a bench prediction.  Adding measured-class realism is the natural next step, sized to a use case.</a:t>
-            </a:r>
-          </a:p>
-        </p:txBody>
-      </p:sp>
-      <p:sp>
-        <p:nvSpPr>
-          <p:cNvPr id="5" name="TextBox 4"/>
+              <a:t>•  Sampling is part of the design: every sampling interface is now budgeted, in the layout solve itself, against the finest feature to be measured (the actuator spacing, 48 cycles across the pupil): detector 385 px across the pupil (4.0× above the minimum 2×), surface grid 3.6 px per actuator, diffraction grid 1024².  The lesson that bought the rule: the geometrically-scaled 63 px detector read a 1 mm actuator at half its true height — with nothing else visibly wrong.</a:t>
+            </a:r>
+          </a:p>
+        </p:txBody>
+      </p:sp>
+      <p:pic>
+        <p:nvPicPr>
+          <p:cNvPr id="5" name="Picture 4" descr="tg96_layout.png"/>
+          <p:cNvPicPr>
+            <a:picLocks noChangeAspect="1"/>
+          </p:cNvPicPr>
+          <p:nvPr/>
+        </p:nvPicPr>
+        <p:blipFill>
+          <a:blip r:embed="rId2"/>
+          <a:stretch>
+            <a:fillRect/>
+          </a:stretch>
+        </p:blipFill>
+        <p:spPr>
+          <a:xfrm>
+            <a:off x="7252582" y="1298448"/>
+            <a:ext cx="3691394" cy="2514092"/>
+          </a:xfrm>
+          <a:prstGeom prst="rect">
+            <a:avLst/>
+          </a:prstGeom>
+        </p:spPr>
+      </p:pic>
+      <p:sp>
+        <p:nvSpPr>
+          <p:cNvPr id="6" name="TextBox 5"/>
           <p:cNvSpPr txBox="1"/>
           <p:nvPr/>
         </p:nvSpPr>
         <p:spPr>
           <a:xfrm>
-            <a:off x="411480" y="4124706"/>
-            <a:ext cx="11368735" cy="274320"/>
+            <a:off x="6400800" y="3830827"/>
+            <a:ext cx="5394960" cy="229107"/>
           </a:xfrm>
           <a:prstGeom prst="rect">
             <a:avLst/>
@@ -4442,33 +4414,33 @@
           </a:bodyPr>
           <a:lstStyle/>
           <a:p>
-            <a:pPr>
-              <a:spcAft>
-                <a:spcPts val="600"/>
-              </a:spcAft>
-            </a:pPr>
-            <a:r>
-              <a:rPr sz="1050" b="0">
+            <a:pPr algn="ctr">
+              <a:spcAft>
+                <a:spcPts val="0"/>
+              </a:spcAft>
+            </a:pPr>
+            <a:r>
+              <a:rPr sz="1000" b="0">
                 <a:solidFill>
                   <a:srgbClr val="6E6E6E"/>
                 </a:solidFill>
                 <a:latin typeface="Arial"/>
               </a:rPr>
-              <a:t>All records, checks and figures are committed and re-runnable; the full demonstration runs in under a minute of compute.</a:t>
-            </a:r>
-          </a:p>
-        </p:txBody>
-      </p:sp>
-      <p:sp>
-        <p:nvSpPr>
-          <p:cNvPr id="6" name="TextBox 5"/>
+              <a:t>The solved bench: plate at 7°, DM leg 700 mm, every beam-edge margin ≥ 25 mm.</a:t>
+            </a:r>
+          </a:p>
+        </p:txBody>
+      </p:sp>
+      <p:sp>
+        <p:nvSpPr>
+          <p:cNvPr id="7" name="TextBox 6"/>
           <p:cNvSpPr txBox="1"/>
           <p:nvPr/>
         </p:nvSpPr>
         <p:spPr>
           <a:xfrm>
-            <a:off x="411480" y="4474845"/>
-            <a:ext cx="11368735" cy="274320"/>
+            <a:off x="6400800" y="4096511"/>
+            <a:ext cx="5394960" cy="274320"/>
           </a:xfrm>
           <a:prstGeom prst="rect">
             <a:avLst/>
@@ -4487,13 +4459,13 @@
               </a:spcAft>
             </a:pPr>
             <a:r>
-              <a:rPr sz="1500" b="0">
-                <a:solidFill>
-                  <a:srgbClr val="282828"/>
-                </a:solidFill>
-                <a:latin typeface="Arial"/>
-              </a:rPr>
-              <a:t># Backup</a:t>
+              <a:rPr sz="1050" b="0">
+                <a:solidFill>
+                  <a:srgbClr val="6E6E6E"/>
+                </a:solidFill>
+                <a:latin typeface="Arial"/>
+              </a:rPr>
+              <a:t>Record: templates/90_polarization/tg_psi_dm96 (tg96.m; report, layout and figures committed).</a:t>
             </a:r>
           </a:p>
         </p:txBody>
@@ -4550,7 +4522,7 @@
                 </a:solidFill>
                 <a:latin typeface="Arial"/>
               </a:rPr>
-              <a:t>Provenance and records</a:t>
+              <a:t>The 96 mm gauge, measured</a:t>
             </a:r>
           </a:p>
           <a:p>
@@ -4566,7 +4538,7 @@
                 </a:solidFill>
                 <a:latin typeface="Arial"/>
               </a:rPr>
-              <a:t>Every number re-derives from a committed script</a:t>
+              <a:t>The ladder's promise holds at full scale: arms 0.14° from orthogonal, null 0.134 nm with nothing aligned, and a smooth measurable response out to the finest actuator pattern</a:t>
             </a:r>
           </a:p>
         </p:txBody>
@@ -4624,7 +4596,7 @@
         <p:spPr>
           <a:xfrm>
             <a:off x="411480" y="1298448"/>
-            <a:ext cx="11368735" cy="274320"/>
+            <a:ext cx="5806440" cy="274320"/>
           </a:xfrm>
           <a:prstGeom prst="rect">
             <a:avLst/>
@@ -4643,12 +4615,1455 @@
               </a:spcAft>
             </a:pPr>
             <a:r>
+              <a:rPr sz="1200" b="0">
+                <a:solidFill>
+                  <a:srgbClr val="282828"/>
+                </a:solidFill>
+                <a:latin typeface="Arial"/>
+              </a:rPr>
+              <a:t>•  Polarization at 7°: arm azimuths −44.86° / +45.00° — 0.143° from orthogonal, scale error +0.145%, no alignment step.  The 45° plate's 7.5° / 11.7% systematic is removed by geometry alone, as the angle ladder predicted.</a:t>
+            </a:r>
+          </a:p>
+          <a:p>
+            <a:pPr>
+              <a:spcAft>
+                <a:spcPts val="600"/>
+              </a:spcAft>
+            </a:pPr>
+            <a:r>
+              <a:rPr sz="1200" b="0">
+                <a:solidFill>
+                  <a:srgbClr val="282828"/>
+                </a:solidFill>
+                <a:latin typeface="Arial"/>
+              </a:rPr>
+              <a:t>•  The null: 0.134 nm rms with nothing aligned — after re-optimizing the detector-leg optics at this scale.  The geometrically-scaled detector leg read 9.1 nm: lengths scale, diffraction does not.  Re-opening its four parameters recovered 68×.</a:t>
+            </a:r>
+          </a:p>
+          <a:p>
+            <a:pPr>
+              <a:spcAft>
+                <a:spcPts val="600"/>
+              </a:spcAft>
+            </a:pPr>
+            <a:r>
+              <a:rPr sz="1200" b="0">
+                <a:solidFill>
+                  <a:srgbClr val="282828"/>
+                </a:solidFill>
+                <a:latin typeface="Arial"/>
+              </a:rPr>
+              <a:t>•  Camera-to-DM registration needs four separate calibrations, each from its own observable: scale and rotation from traced rays; translation from one center poke; the array's flip/transpose orientation from one off-center poke by direct overlap (0.93 against 0.002 for the runner-up); and the sign of the measurement from that same overlap.  Symmetric test patterns fail — a checkerboard cannot see a one-actuator shift or a flip.  Measured, not supposed: the failure series is preserved in the record.</a:t>
+            </a:r>
+          </a:p>
+          <a:p>
+            <a:pPr>
+              <a:spcAft>
+                <a:spcPts val="600"/>
+              </a:spcAft>
+            </a:pPr>
+            <a:r>
+              <a:rPr sz="1200" b="0">
+                <a:solidFill>
+                  <a:srgbClr val="282828"/>
+                </a:solidFill>
+                <a:latin typeface="Arial"/>
+              </a:rPr>
+              <a:t>•  A single 1 mm actuator poked 150 nm reads 146.1 nm.</a:t>
+            </a:r>
+          </a:p>
+        </p:txBody>
+      </p:sp>
+      <p:pic>
+        <p:nvPicPr>
+          <p:cNvPr id="5" name="Picture 4" descr="tg96_transfer.png"/>
+          <p:cNvPicPr>
+            <a:picLocks noChangeAspect="1"/>
+          </p:cNvPicPr>
+          <p:nvPr/>
+        </p:nvPicPr>
+        <p:blipFill>
+          <a:blip r:embed="rId2"/>
+          <a:stretch>
+            <a:fillRect/>
+          </a:stretch>
+        </p:blipFill>
+        <p:spPr>
+          <a:xfrm>
+            <a:off x="7542268" y="1298448"/>
+            <a:ext cx="3112022" cy="2092451"/>
+          </a:xfrm>
+          <a:prstGeom prst="rect">
+            <a:avLst/>
+          </a:prstGeom>
+        </p:spPr>
+      </p:pic>
+      <p:sp>
+        <p:nvSpPr>
+          <p:cNvPr id="6" name="TextBox 5"/>
+          <p:cNvSpPr txBox="1"/>
+          <p:nvPr/>
+        </p:nvSpPr>
+        <p:spPr>
+          <a:xfrm>
+            <a:off x="6400800" y="3409187"/>
+            <a:ext cx="5394960" cy="559307"/>
+          </a:xfrm>
+          <a:prstGeom prst="rect">
+            <a:avLst/>
+          </a:prstGeom>
+          <a:noFill/>
+        </p:spPr>
+        <p:txBody>
+          <a:bodyPr wrap="square">
+            <a:spAutoFit/>
+          </a:bodyPr>
+          <a:lstStyle/>
+          <a:p>
+            <a:pPr algn="ctr">
+              <a:spcAft>
+                <a:spcPts val="0"/>
+              </a:spcAft>
+            </a:pPr>
+            <a:r>
+              <a:rPr sz="1000" b="0">
+                <a:solidFill>
+                  <a:srgbClr val="6E6E6E"/>
+                </a:solidFill>
+                <a:latin typeface="Arial"/>
+              </a:rPr>
+              <a:t>The measured response against spatial frequency: gain 1.02 at low frequency, 0.85 at 34 cycles/pupil, 0.50 at the finest 96×96 pattern.  Positive and monotonic — an instrument response that calibrates.</a:t>
+            </a:r>
+          </a:p>
+        </p:txBody>
+      </p:sp>
+      <p:sp>
+        <p:nvSpPr>
+          <p:cNvPr id="7" name="TextBox 6"/>
+          <p:cNvSpPr txBox="1"/>
+          <p:nvPr/>
+        </p:nvSpPr>
+        <p:spPr>
+          <a:xfrm>
+            <a:off x="6400800" y="4005072"/>
+            <a:ext cx="5394960" cy="274320"/>
+          </a:xfrm>
+          <a:prstGeom prst="rect">
+            <a:avLst/>
+          </a:prstGeom>
+          <a:noFill/>
+        </p:spPr>
+        <p:txBody>
+          <a:bodyPr wrap="square">
+            <a:spAutoFit/>
+          </a:bodyPr>
+          <a:lstStyle/>
+          <a:p>
+            <a:pPr>
+              <a:spcAft>
+                <a:spcPts val="600"/>
+              </a:spcAft>
+            </a:pPr>
+            <a:r>
+              <a:rPr sz="1050" b="0">
+                <a:solidFill>
+                  <a:srgbClr val="6E6E6E"/>
+                </a:solidFill>
+                <a:latin typeface="Arial"/>
+              </a:rPr>
+              <a:t>Tuning the detector leg for the null alone traded away pupil-image sharpness (finest-pattern gain 0.84 → 0.50) and 0.14 mm of mapping warp; the next pass optimizes null, sharpness and distortion jointly.  Record: tg96_report.txt.</a:t>
+            </a:r>
+          </a:p>
+        </p:txBody>
+      </p:sp>
+    </p:spTree>
+  </p:cSld>
+  <p:clrMapOvr>
+    <a:masterClrMapping/>
+  </p:clrMapOvr>
+</p:sld>
+</file>
+
+<file path=ppt/slides/slide15.xml><?xml version="1.0" encoding="utf-8"?>
+<p:sld xmlns:a="http://schemas.openxmlformats.org/drawingml/2006/main" xmlns:p="http://schemas.openxmlformats.org/presentationml/2006/main" xmlns:r="http://schemas.openxmlformats.org/officeDocument/2006/relationships">
+  <p:cSld>
+    <p:spTree>
+      <p:nvGrpSpPr>
+        <p:cNvPr id="1" name=""/>
+        <p:cNvGrpSpPr/>
+        <p:nvPr/>
+      </p:nvGrpSpPr>
+      <p:grpSpPr/>
+      <p:sp>
+        <p:nvSpPr>
+          <p:cNvPr id="2" name="TextBox 1"/>
+          <p:cNvSpPr txBox="1"/>
+          <p:nvPr/>
+        </p:nvSpPr>
+        <p:spPr>
+          <a:xfrm>
+            <a:off x="411480" y="201168"/>
+            <a:ext cx="11368735" cy="914400"/>
+          </a:xfrm>
+          <a:prstGeom prst="rect">
+            <a:avLst/>
+          </a:prstGeom>
+          <a:noFill/>
+        </p:spPr>
+        <p:txBody>
+          <a:bodyPr wrap="square">
+            <a:spAutoFit/>
+          </a:bodyPr>
+          <a:lstStyle/>
+          <a:p>
+            <a:pPr>
+              <a:spcAft>
+                <a:spcPts val="400"/>
+              </a:spcAft>
+            </a:pPr>
+            <a:r>
+              <a:rPr sz="2400" b="1">
+                <a:solidFill>
+                  <a:srgbClr val="1F4E79"/>
+                </a:solidFill>
+                <a:latin typeface="Arial"/>
+              </a:rPr>
+              <a:t>The differential measurement: how well is a change measured?</a:t>
+            </a:r>
+          </a:p>
+          <a:p>
+            <a:pPr>
+              <a:spcAft>
+                <a:spcPts val="0"/>
+              </a:spcAft>
+            </a:pPr>
+            <a:r>
+              <a:rPr sz="1250" b="0">
+                <a:solidFill>
+                  <a:srgbClr val="6E6E6E"/>
+                </a:solidFill>
+                <a:latin typeface="Arial"/>
+              </a:rPr>
+              <a:t>A 10 nm actuator deviation reads to 0.021 nm — the same about a 30 nm working surface as about a flat</a:t>
+            </a:r>
+          </a:p>
+        </p:txBody>
+      </p:sp>
+      <p:sp>
+        <p:nvSpPr>
+          <p:cNvPr id="3" name="Rectangle 2"/>
+          <p:cNvSpPr/>
+          <p:nvPr/>
+        </p:nvSpPr>
+        <p:spPr>
+          <a:xfrm>
+            <a:off x="411480" y="1133856"/>
+            <a:ext cx="11368735" cy="20320"/>
+          </a:xfrm>
+          <a:prstGeom prst="rect">
+            <a:avLst/>
+          </a:prstGeom>
+          <a:solidFill>
+            <a:srgbClr val="B8C6D4"/>
+          </a:solidFill>
+          <a:ln>
+            <a:noFill/>
+          </a:ln>
+          <a:effectLst/>
+        </p:spPr>
+        <p:style>
+          <a:lnRef idx="1">
+            <a:schemeClr val="accent1"/>
+          </a:lnRef>
+          <a:fillRef idx="3">
+            <a:schemeClr val="accent1"/>
+          </a:fillRef>
+          <a:effectRef idx="2">
+            <a:schemeClr val="accent1"/>
+          </a:effectRef>
+          <a:fontRef idx="minor">
+            <a:schemeClr val="lt1"/>
+          </a:fontRef>
+        </p:style>
+        <p:txBody>
+          <a:bodyPr rtlCol="0" anchor="ctr"/>
+          <a:lstStyle/>
+          <a:p>
+            <a:pPr algn="ctr"/>
+          </a:p>
+        </p:txBody>
+      </p:sp>
+      <p:sp>
+        <p:nvSpPr>
+          <p:cNvPr id="4" name="TextBox 3"/>
+          <p:cNvSpPr txBox="1"/>
+          <p:nvPr/>
+        </p:nvSpPr>
+        <p:spPr>
+          <a:xfrm>
+            <a:off x="411480" y="1298448"/>
+            <a:ext cx="11368735" cy="274320"/>
+          </a:xfrm>
+          <a:prstGeom prst="rect">
+            <a:avLst/>
+          </a:prstGeom>
+          <a:noFill/>
+        </p:spPr>
+        <p:txBody>
+          <a:bodyPr wrap="square">
+            <a:spAutoFit/>
+          </a:bodyPr>
+          <a:lstStyle/>
+          <a:p>
+            <a:pPr>
+              <a:spcAft>
+                <a:spcPts val="600"/>
+              </a:spcAft>
+            </a:pPr>
+            <a:r>
               <a:rPr sz="1500" b="0">
                 <a:solidFill>
                   <a:srgbClr val="282828"/>
                 </a:solidFill>
                 <a:latin typeface="Arial"/>
               </a:rPr>
+              <a:t>•  The real job of this instrument is measuring deviations — how the surface differs from where it was — not any one surface in isolation.  So the closing test measures a base state, applies a known deviation, measures again, and scores the difference of the two measurements against the truth.</a:t>
+            </a:r>
+          </a:p>
+        </p:txBody>
+      </p:sp>
+      <p:graphicFrame>
+        <p:nvGraphicFramePr>
+          <p:cNvPr id="5" name="Table 4"/>
+          <p:cNvGraphicFramePr>
+            <a:graphicFrameLocks noGrp="1"/>
+          </p:cNvGraphicFramePr>
+          <p:nvPr/>
+        </p:nvGraphicFramePr>
+        <p:xfrm>
+          <a:off x="411480" y="2218182"/>
+          <a:ext cx="11368733" cy="1400175"/>
+        </p:xfrm>
+        <a:graphic>
+          <a:graphicData uri="http://schemas.openxmlformats.org/drawingml/2006/table">
+            <a:tbl>
+              <a:tblPr firstRow="1" bandRow="1">
+                <a:tableStyleId>{5C22544A-7EE6-4342-B048-85BDC9FD1C3A}</a:tableStyleId>
+              </a:tblPr>
+              <a:tblGrid>
+                <a:gridCol w="3477495"/>
+                <a:gridCol w="3343745"/>
+                <a:gridCol w="1471248"/>
+                <a:gridCol w="1604997"/>
+                <a:gridCol w="1471248"/>
+              </a:tblGrid>
+              <a:tr h="280035">
+                <a:tc>
+                  <a:txBody>
+                    <a:bodyPr wrap="square"/>
+                    <a:lstStyle/>
+                    <a:p>
+                      <a:r>
+                        <a:rPr sz="1100" b="1">
+                          <a:solidFill>
+                            <a:srgbClr val="FFFFFF"/>
+                          </a:solidFill>
+                          <a:latin typeface="Arial"/>
+                        </a:rPr>
+                        <a:t>base state</a:t>
+                      </a:r>
+                    </a:p>
+                  </a:txBody>
+                  <a:tcPr marL="54864" marR="54864" marT="18288" marB="18288">
+                    <a:solidFill>
+                      <a:srgbClr val="1F4E79"/>
+                    </a:solidFill>
+                  </a:tcPr>
+                </a:tc>
+                <a:tc>
+                  <a:txBody>
+                    <a:bodyPr wrap="square"/>
+                    <a:lstStyle/>
+                    <a:p>
+                      <a:r>
+                        <a:rPr sz="1100" b="1">
+                          <a:solidFill>
+                            <a:srgbClr val="FFFFFF"/>
+                          </a:solidFill>
+                          <a:latin typeface="Arial"/>
+                        </a:rPr>
+                        <a:t>deviation applied</a:t>
+                      </a:r>
+                    </a:p>
+                  </a:txBody>
+                  <a:tcPr marL="54864" marR="54864" marT="18288" marB="18288">
+                    <a:solidFill>
+                      <a:srgbClr val="1F4E79"/>
+                    </a:solidFill>
+                  </a:tcPr>
+                </a:tc>
+                <a:tc>
+                  <a:txBody>
+                    <a:bodyPr wrap="square"/>
+                    <a:lstStyle/>
+                    <a:p>
+                      <a:r>
+                        <a:rPr sz="1100" b="1">
+                          <a:solidFill>
+                            <a:srgbClr val="FFFFFF"/>
+                          </a:solidFill>
+                          <a:latin typeface="Arial"/>
+                        </a:rPr>
+                        <a:t>fitted gain</a:t>
+                      </a:r>
+                    </a:p>
+                  </a:txBody>
+                  <a:tcPr marL="54864" marR="54864" marT="18288" marB="18288">
+                    <a:solidFill>
+                      <a:srgbClr val="1F4E79"/>
+                    </a:solidFill>
+                  </a:tcPr>
+                </a:tc>
+                <a:tc>
+                  <a:txBody>
+                    <a:bodyPr wrap="square"/>
+                    <a:lstStyle/>
+                    <a:p>
+                      <a:r>
+                        <a:rPr sz="1100" b="1">
+                          <a:solidFill>
+                            <a:srgbClr val="FFFFFF"/>
+                          </a:solidFill>
+                          <a:latin typeface="Arial"/>
+                        </a:rPr>
+                        <a:t>residual</a:t>
+                      </a:r>
+                    </a:p>
+                  </a:txBody>
+                  <a:tcPr marL="54864" marR="54864" marT="18288" marB="18288">
+                    <a:solidFill>
+                      <a:srgbClr val="1F4E79"/>
+                    </a:solidFill>
+                  </a:tcPr>
+                </a:tc>
+                <a:tc>
+                  <a:txBody>
+                    <a:bodyPr wrap="square"/>
+                    <a:lstStyle/>
+                    <a:p>
+                      <a:r>
+                        <a:rPr sz="1100" b="1">
+                          <a:solidFill>
+                            <a:srgbClr val="FFFFFF"/>
+                          </a:solidFill>
+                          <a:latin typeface="Arial"/>
+                        </a:rPr>
+                        <a:t>correlation</a:t>
+                      </a:r>
+                    </a:p>
+                  </a:txBody>
+                  <a:tcPr marL="54864" marR="54864" marT="18288" marB="18288">
+                    <a:solidFill>
+                      <a:srgbClr val="1F4E79"/>
+                    </a:solidFill>
+                  </a:tcPr>
+                </a:tc>
+              </a:tr>
+              <a:tr h="280035">
+                <a:tc>
+                  <a:txBody>
+                    <a:bodyPr wrap="square"/>
+                    <a:lstStyle/>
+                    <a:p>
+                      <a:r>
+                        <a:rPr sz="1100" b="0">
+                          <a:solidFill>
+                            <a:srgbClr val="282828"/>
+                          </a:solidFill>
+                          <a:latin typeface="Arial"/>
+                        </a:rPr>
+                        <a:t>flat</a:t>
+                      </a:r>
+                    </a:p>
+                  </a:txBody>
+                  <a:tcPr marL="54864" marR="54864" marT="18288" marB="18288">
+                    <a:solidFill>
+                      <a:srgbClr val="FFFFFF"/>
+                    </a:solidFill>
+                  </a:tcPr>
+                </a:tc>
+                <a:tc>
+                  <a:txBody>
+                    <a:bodyPr wrap="square"/>
+                    <a:lstStyle/>
+                    <a:p>
+                      <a:r>
+                        <a:rPr sz="1100" b="0">
+                          <a:solidFill>
+                            <a:srgbClr val="282828"/>
+                          </a:solidFill>
+                          <a:latin typeface="Arial"/>
+                        </a:rPr>
+                        <a:t>one actuator, 10 nm</a:t>
+                      </a:r>
+                    </a:p>
+                  </a:txBody>
+                  <a:tcPr marL="54864" marR="54864" marT="18288" marB="18288">
+                    <a:solidFill>
+                      <a:srgbClr val="FFFFFF"/>
+                    </a:solidFill>
+                  </a:tcPr>
+                </a:tc>
+                <a:tc>
+                  <a:txBody>
+                    <a:bodyPr wrap="square"/>
+                    <a:lstStyle/>
+                    <a:p>
+                      <a:r>
+                        <a:rPr sz="1100" b="0">
+                          <a:solidFill>
+                            <a:srgbClr val="282828"/>
+                          </a:solidFill>
+                          <a:latin typeface="Arial"/>
+                        </a:rPr>
+                        <a:t>0.965</a:t>
+                      </a:r>
+                    </a:p>
+                  </a:txBody>
+                  <a:tcPr marL="54864" marR="54864" marT="18288" marB="18288">
+                    <a:solidFill>
+                      <a:srgbClr val="FFFFFF"/>
+                    </a:solidFill>
+                  </a:tcPr>
+                </a:tc>
+                <a:tc>
+                  <a:txBody>
+                    <a:bodyPr wrap="square"/>
+                    <a:lstStyle/>
+                    <a:p>
+                      <a:r>
+                        <a:rPr sz="1100" b="0">
+                          <a:solidFill>
+                            <a:srgbClr val="282828"/>
+                          </a:solidFill>
+                          <a:latin typeface="Arial"/>
+                        </a:rPr>
+                        <a:t>0.021 nm rms</a:t>
+                      </a:r>
+                    </a:p>
+                  </a:txBody>
+                  <a:tcPr marL="54864" marR="54864" marT="18288" marB="18288">
+                    <a:solidFill>
+                      <a:srgbClr val="FFFFFF"/>
+                    </a:solidFill>
+                  </a:tcPr>
+                </a:tc>
+                <a:tc>
+                  <a:txBody>
+                    <a:bodyPr wrap="square"/>
+                    <a:lstStyle/>
+                    <a:p>
+                      <a:r>
+                        <a:rPr sz="1100" b="0">
+                          <a:solidFill>
+                            <a:srgbClr val="282828"/>
+                          </a:solidFill>
+                          <a:latin typeface="Arial"/>
+                        </a:rPr>
+                        <a:t>0.991</a:t>
+                      </a:r>
+                    </a:p>
+                  </a:txBody>
+                  <a:tcPr marL="54864" marR="54864" marT="18288" marB="18288">
+                    <a:solidFill>
+                      <a:srgbClr val="FFFFFF"/>
+                    </a:solidFill>
+                  </a:tcPr>
+                </a:tc>
+              </a:tr>
+              <a:tr h="280035">
+                <a:tc>
+                  <a:txBody>
+                    <a:bodyPr wrap="square"/>
+                    <a:lstStyle/>
+                    <a:p>
+                      <a:r>
+                        <a:rPr sz="1100" b="0">
+                          <a:solidFill>
+                            <a:srgbClr val="282828"/>
+                          </a:solidFill>
+                          <a:latin typeface="Arial"/>
+                        </a:rPr>
+                        <a:t>flat</a:t>
+                      </a:r>
+                    </a:p>
+                  </a:txBody>
+                  <a:tcPr marL="54864" marR="54864" marT="18288" marB="18288">
+                    <a:solidFill>
+                      <a:srgbClr val="ECF1F6"/>
+                    </a:solidFill>
+                  </a:tcPr>
+                </a:tc>
+                <a:tc>
+                  <a:txBody>
+                    <a:bodyPr wrap="square"/>
+                    <a:lstStyle/>
+                    <a:p>
+                      <a:r>
+                        <a:rPr sz="1100" b="0">
+                          <a:solidFill>
+                            <a:srgbClr val="282828"/>
+                          </a:solidFill>
+                          <a:latin typeface="Arial"/>
+                        </a:rPr>
+                        <a:t>random pattern, 10 nm rms</a:t>
+                      </a:r>
+                    </a:p>
+                  </a:txBody>
+                  <a:tcPr marL="54864" marR="54864" marT="18288" marB="18288">
+                    <a:solidFill>
+                      <a:srgbClr val="ECF1F6"/>
+                    </a:solidFill>
+                  </a:tcPr>
+                </a:tc>
+                <a:tc>
+                  <a:txBody>
+                    <a:bodyPr wrap="square"/>
+                    <a:lstStyle/>
+                    <a:p>
+                      <a:r>
+                        <a:rPr sz="1100" b="0">
+                          <a:solidFill>
+                            <a:srgbClr val="282828"/>
+                          </a:solidFill>
+                          <a:latin typeface="Arial"/>
+                        </a:rPr>
+                        <a:t>0.920</a:t>
+                      </a:r>
+                    </a:p>
+                  </a:txBody>
+                  <a:tcPr marL="54864" marR="54864" marT="18288" marB="18288">
+                    <a:solidFill>
+                      <a:srgbClr val="ECF1F6"/>
+                    </a:solidFill>
+                  </a:tcPr>
+                </a:tc>
+                <a:tc>
+                  <a:txBody>
+                    <a:bodyPr wrap="square"/>
+                    <a:lstStyle/>
+                    <a:p>
+                      <a:r>
+                        <a:rPr sz="1100" b="0">
+                          <a:solidFill>
+                            <a:srgbClr val="282828"/>
+                          </a:solidFill>
+                          <a:latin typeface="Arial"/>
+                        </a:rPr>
+                        <a:t>3.67 nm rms</a:t>
+                      </a:r>
+                    </a:p>
+                  </a:txBody>
+                  <a:tcPr marL="54864" marR="54864" marT="18288" marB="18288">
+                    <a:solidFill>
+                      <a:srgbClr val="ECF1F6"/>
+                    </a:solidFill>
+                  </a:tcPr>
+                </a:tc>
+                <a:tc>
+                  <a:txBody>
+                    <a:bodyPr wrap="square"/>
+                    <a:lstStyle/>
+                    <a:p>
+                      <a:r>
+                        <a:rPr sz="1100" b="0">
+                          <a:solidFill>
+                            <a:srgbClr val="282828"/>
+                          </a:solidFill>
+                          <a:latin typeface="Arial"/>
+                        </a:rPr>
+                        <a:t>0.926</a:t>
+                      </a:r>
+                    </a:p>
+                  </a:txBody>
+                  <a:tcPr marL="54864" marR="54864" marT="18288" marB="18288">
+                    <a:solidFill>
+                      <a:srgbClr val="ECF1F6"/>
+                    </a:solidFill>
+                  </a:tcPr>
+                </a:tc>
+              </a:tr>
+              <a:tr h="280035">
+                <a:tc>
+                  <a:txBody>
+                    <a:bodyPr wrap="square"/>
+                    <a:lstStyle/>
+                    <a:p>
+                      <a:r>
+                        <a:rPr sz="1100" b="0">
+                          <a:solidFill>
+                            <a:srgbClr val="282828"/>
+                          </a:solidFill>
+                          <a:latin typeface="Arial"/>
+                        </a:rPr>
+                        <a:t>working surface, 30 nm rms</a:t>
+                      </a:r>
+                    </a:p>
+                  </a:txBody>
+                  <a:tcPr marL="54864" marR="54864" marT="18288" marB="18288">
+                    <a:solidFill>
+                      <a:srgbClr val="FFFFFF"/>
+                    </a:solidFill>
+                  </a:tcPr>
+                </a:tc>
+                <a:tc>
+                  <a:txBody>
+                    <a:bodyPr wrap="square"/>
+                    <a:lstStyle/>
+                    <a:p>
+                      <a:r>
+                        <a:rPr sz="1100" b="0">
+                          <a:solidFill>
+                            <a:srgbClr val="282828"/>
+                          </a:solidFill>
+                          <a:latin typeface="Arial"/>
+                        </a:rPr>
+                        <a:t>one actuator, 10 nm</a:t>
+                      </a:r>
+                    </a:p>
+                  </a:txBody>
+                  <a:tcPr marL="54864" marR="54864" marT="18288" marB="18288">
+                    <a:solidFill>
+                      <a:srgbClr val="FFFFFF"/>
+                    </a:solidFill>
+                  </a:tcPr>
+                </a:tc>
+                <a:tc>
+                  <a:txBody>
+                    <a:bodyPr wrap="square"/>
+                    <a:lstStyle/>
+                    <a:p>
+                      <a:r>
+                        <a:rPr sz="1100" b="0">
+                          <a:solidFill>
+                            <a:srgbClr val="282828"/>
+                          </a:solidFill>
+                          <a:latin typeface="Arial"/>
+                        </a:rPr>
+                        <a:t>0.977</a:t>
+                      </a:r>
+                    </a:p>
+                  </a:txBody>
+                  <a:tcPr marL="54864" marR="54864" marT="18288" marB="18288">
+                    <a:solidFill>
+                      <a:srgbClr val="FFFFFF"/>
+                    </a:solidFill>
+                  </a:tcPr>
+                </a:tc>
+                <a:tc>
+                  <a:txBody>
+                    <a:bodyPr wrap="square"/>
+                    <a:lstStyle/>
+                    <a:p>
+                      <a:r>
+                        <a:rPr sz="1100" b="0">
+                          <a:solidFill>
+                            <a:srgbClr val="282828"/>
+                          </a:solidFill>
+                          <a:latin typeface="Arial"/>
+                        </a:rPr>
+                        <a:t>0.024 nm rms</a:t>
+                      </a:r>
+                    </a:p>
+                  </a:txBody>
+                  <a:tcPr marL="54864" marR="54864" marT="18288" marB="18288">
+                    <a:solidFill>
+                      <a:srgbClr val="FFFFFF"/>
+                    </a:solidFill>
+                  </a:tcPr>
+                </a:tc>
+                <a:tc>
+                  <a:txBody>
+                    <a:bodyPr wrap="square"/>
+                    <a:lstStyle/>
+                    <a:p>
+                      <a:r>
+                        <a:rPr sz="1100" b="0">
+                          <a:solidFill>
+                            <a:srgbClr val="282828"/>
+                          </a:solidFill>
+                          <a:latin typeface="Arial"/>
+                        </a:rPr>
+                        <a:t>0.989</a:t>
+                      </a:r>
+                    </a:p>
+                  </a:txBody>
+                  <a:tcPr marL="54864" marR="54864" marT="18288" marB="18288">
+                    <a:solidFill>
+                      <a:srgbClr val="FFFFFF"/>
+                    </a:solidFill>
+                  </a:tcPr>
+                </a:tc>
+              </a:tr>
+              <a:tr h="280035">
+                <a:tc>
+                  <a:txBody>
+                    <a:bodyPr wrap="square"/>
+                    <a:lstStyle/>
+                    <a:p>
+                      <a:r>
+                        <a:rPr sz="1100" b="0">
+                          <a:solidFill>
+                            <a:srgbClr val="282828"/>
+                          </a:solidFill>
+                          <a:latin typeface="Arial"/>
+                        </a:rPr>
+                        <a:t>working surface, 30 nm rms</a:t>
+                      </a:r>
+                    </a:p>
+                  </a:txBody>
+                  <a:tcPr marL="54864" marR="54864" marT="18288" marB="18288">
+                    <a:solidFill>
+                      <a:srgbClr val="ECF1F6"/>
+                    </a:solidFill>
+                  </a:tcPr>
+                </a:tc>
+                <a:tc>
+                  <a:txBody>
+                    <a:bodyPr wrap="square"/>
+                    <a:lstStyle/>
+                    <a:p>
+                      <a:r>
+                        <a:rPr sz="1100" b="0">
+                          <a:solidFill>
+                            <a:srgbClr val="282828"/>
+                          </a:solidFill>
+                          <a:latin typeface="Arial"/>
+                        </a:rPr>
+                        <a:t>random pattern, 10 nm rms</a:t>
+                      </a:r>
+                    </a:p>
+                  </a:txBody>
+                  <a:tcPr marL="54864" marR="54864" marT="18288" marB="18288">
+                    <a:solidFill>
+                      <a:srgbClr val="ECF1F6"/>
+                    </a:solidFill>
+                  </a:tcPr>
+                </a:tc>
+                <a:tc>
+                  <a:txBody>
+                    <a:bodyPr wrap="square"/>
+                    <a:lstStyle/>
+                    <a:p>
+                      <a:r>
+                        <a:rPr sz="1100" b="0">
+                          <a:solidFill>
+                            <a:srgbClr val="282828"/>
+                          </a:solidFill>
+                          <a:latin typeface="Arial"/>
+                        </a:rPr>
+                        <a:t>0.921</a:t>
+                      </a:r>
+                    </a:p>
+                  </a:txBody>
+                  <a:tcPr marL="54864" marR="54864" marT="18288" marB="18288">
+                    <a:solidFill>
+                      <a:srgbClr val="ECF1F6"/>
+                    </a:solidFill>
+                  </a:tcPr>
+                </a:tc>
+                <a:tc>
+                  <a:txBody>
+                    <a:bodyPr wrap="square"/>
+                    <a:lstStyle/>
+                    <a:p>
+                      <a:r>
+                        <a:rPr sz="1100" b="0">
+                          <a:solidFill>
+                            <a:srgbClr val="282828"/>
+                          </a:solidFill>
+                          <a:latin typeface="Arial"/>
+                        </a:rPr>
+                        <a:t>3.68 nm rms</a:t>
+                      </a:r>
+                    </a:p>
+                  </a:txBody>
+                  <a:tcPr marL="54864" marR="54864" marT="18288" marB="18288">
+                    <a:solidFill>
+                      <a:srgbClr val="ECF1F6"/>
+                    </a:solidFill>
+                  </a:tcPr>
+                </a:tc>
+                <a:tc>
+                  <a:txBody>
+                    <a:bodyPr wrap="square"/>
+                    <a:lstStyle/>
+                    <a:p>
+                      <a:r>
+                        <a:rPr sz="1100" b="0">
+                          <a:solidFill>
+                            <a:srgbClr val="282828"/>
+                          </a:solidFill>
+                          <a:latin typeface="Arial"/>
+                        </a:rPr>
+                        <a:t>0.926</a:t>
+                      </a:r>
+                    </a:p>
+                  </a:txBody>
+                  <a:tcPr marL="54864" marR="54864" marT="18288" marB="18288">
+                    <a:solidFill>
+                      <a:srgbClr val="ECF1F6"/>
+                    </a:solidFill>
+                  </a:tcPr>
+                </a:tc>
+              </a:tr>
+            </a:tbl>
+          </a:graphicData>
+        </a:graphic>
+      </p:graphicFrame>
+      <p:sp>
+        <p:nvSpPr>
+          <p:cNvPr id="6" name="TextBox 5"/>
+          <p:cNvSpPr txBox="1"/>
+          <p:nvPr/>
+        </p:nvSpPr>
+        <p:spPr>
+          <a:xfrm>
+            <a:off x="411480" y="3764661"/>
+            <a:ext cx="11368735" cy="274320"/>
+          </a:xfrm>
+          <a:prstGeom prst="rect">
+            <a:avLst/>
+          </a:prstGeom>
+          <a:noFill/>
+        </p:spPr>
+        <p:txBody>
+          <a:bodyPr wrap="square">
+            <a:spAutoFit/>
+          </a:bodyPr>
+          <a:lstStyle/>
+          <a:p>
+            <a:pPr>
+              <a:spcAft>
+                <a:spcPts val="600"/>
+              </a:spcAft>
+            </a:pPr>
+            <a:r>
+              <a:rPr sz="1500" b="0">
+                <a:solidFill>
+                  <a:srgbClr val="282828"/>
+                </a:solidFill>
+                <a:latin typeface="Arial"/>
+              </a:rPr>
+              <a:t>•  The common systematic cancels, as designed: the single-actuator rows agree to 0.003 nm across bases — the gauge measures a change the same way about a working surface as about a flat.</a:t>
+            </a:r>
+          </a:p>
+          <a:p>
+            <a:pPr>
+              <a:spcAft>
+                <a:spcPts val="600"/>
+              </a:spcAft>
+            </a:pPr>
+            <a:r>
+              <a:rPr sz="1500" b="0">
+                <a:solidFill>
+                  <a:srgbClr val="282828"/>
+                </a:solidFill>
+                <a:latin typeface="Arial"/>
+              </a:rPr>
+              <a:t>•  What remains is the response curve, not a hidden coupling: the random-pattern rows (all spatial frequencies at once) read 37% low identically about both bases.  The differential error is the instrument response of the previous slide — which calibrates — not a coupling to the working state.</a:t>
+            </a:r>
+          </a:p>
+          <a:p>
+            <a:pPr>
+              <a:spcAft>
+                <a:spcPts val="600"/>
+              </a:spcAft>
+            </a:pPr>
+            <a:r>
+              <a:rPr sz="1500" b="0">
+                <a:solidFill>
+                  <a:srgbClr val="282828"/>
+                </a:solidFill>
+                <a:latin typeface="Arial"/>
+              </a:rPr>
+              <a:t>•  This is the benchmark for what comes next: the same DM truth and the same differential score, measured by a Zernike wavefront sensor — the planned comparison.</a:t>
+            </a:r>
+          </a:p>
+        </p:txBody>
+      </p:sp>
+      <p:sp>
+        <p:nvSpPr>
+          <p:cNvPr id="7" name="TextBox 6"/>
+          <p:cNvSpPr txBox="1"/>
+          <p:nvPr/>
+        </p:nvSpPr>
+        <p:spPr>
+          <a:xfrm>
+            <a:off x="411480" y="5955411"/>
+            <a:ext cx="11368735" cy="274320"/>
+          </a:xfrm>
+          <a:prstGeom prst="rect">
+            <a:avLst/>
+          </a:prstGeom>
+          <a:noFill/>
+        </p:spPr>
+        <p:txBody>
+          <a:bodyPr wrap="square">
+            <a:spAutoFit/>
+          </a:bodyPr>
+          <a:lstStyle/>
+          <a:p>
+            <a:pPr>
+              <a:spcAft>
+                <a:spcPts val="600"/>
+              </a:spcAft>
+            </a:pPr>
+            <a:r>
+              <a:rPr sz="1050" b="0">
+                <a:solidFill>
+                  <a:srgbClr val="6E6E6E"/>
+                </a:solidFill>
+                <a:latin typeface="Arial"/>
+              </a:rPr>
+              <a:t>Each row: measure the base, apply the deviation, measure again, difference the two measurements, fit one gain against the true deviation; the residual is what is left.  Record: tg96_report.txt, differential section.</a:t>
+            </a:r>
+          </a:p>
+        </p:txBody>
+      </p:sp>
+    </p:spTree>
+  </p:cSld>
+  <p:clrMapOvr>
+    <a:masterClrMapping/>
+  </p:clrMapOvr>
+</p:sld>
+</file>
+
+<file path=ppt/slides/slide16.xml><?xml version="1.0" encoding="utf-8"?>
+<p:sld xmlns:a="http://schemas.openxmlformats.org/drawingml/2006/main" xmlns:p="http://schemas.openxmlformats.org/presentationml/2006/main" xmlns:r="http://schemas.openxmlformats.org/officeDocument/2006/relationships">
+  <p:cSld>
+    <p:spTree>
+      <p:nvGrpSpPr>
+        <p:cNvPr id="1" name=""/>
+        <p:cNvGrpSpPr/>
+        <p:nvPr/>
+      </p:nvGrpSpPr>
+      <p:grpSpPr/>
+      <p:sp>
+        <p:nvSpPr>
+          <p:cNvPr id="2" name="TextBox 1"/>
+          <p:cNvSpPr txBox="1"/>
+          <p:nvPr/>
+        </p:nvSpPr>
+        <p:spPr>
+          <a:xfrm>
+            <a:off x="411480" y="201168"/>
+            <a:ext cx="11368735" cy="914400"/>
+          </a:xfrm>
+          <a:prstGeom prst="rect">
+            <a:avLst/>
+          </a:prstGeom>
+          <a:noFill/>
+        </p:spPr>
+        <p:txBody>
+          <a:bodyPr wrap="square">
+            <a:spAutoFit/>
+          </a:bodyPr>
+          <a:lstStyle/>
+          <a:p>
+            <a:pPr>
+              <a:spcAft>
+                <a:spcPts val="400"/>
+              </a:spcAft>
+            </a:pPr>
+            <a:r>
+              <a:rPr sz="2400" b="1">
+                <a:solidFill>
+                  <a:srgbClr val="1F4E79"/>
+                </a:solidFill>
+                <a:latin typeface="Arial"/>
+              </a:rPr>
+              <a:t>What this offers a bench program</a:t>
+            </a:r>
+          </a:p>
+          <a:p>
+            <a:pPr>
+              <a:spcAft>
+                <a:spcPts val="0"/>
+              </a:spcAft>
+            </a:pPr>
+            <a:r>
+              <a:rPr sz="1250" b="0">
+                <a:solidFill>
+                  <a:srgbClr val="6E6E6E"/>
+                </a:solidFill>
+                <a:latin typeface="Arial"/>
+              </a:rPr>
+              <a:t>An instrument-error sandbox where truth is exact and every systematic prints</a:t>
+            </a:r>
+          </a:p>
+        </p:txBody>
+      </p:sp>
+      <p:sp>
+        <p:nvSpPr>
+          <p:cNvPr id="3" name="Rectangle 2"/>
+          <p:cNvSpPr/>
+          <p:nvPr/>
+        </p:nvSpPr>
+        <p:spPr>
+          <a:xfrm>
+            <a:off x="411480" y="1133856"/>
+            <a:ext cx="11368735" cy="20320"/>
+          </a:xfrm>
+          <a:prstGeom prst="rect">
+            <a:avLst/>
+          </a:prstGeom>
+          <a:solidFill>
+            <a:srgbClr val="B8C6D4"/>
+          </a:solidFill>
+          <a:ln>
+            <a:noFill/>
+          </a:ln>
+          <a:effectLst/>
+        </p:spPr>
+        <p:style>
+          <a:lnRef idx="1">
+            <a:schemeClr val="accent1"/>
+          </a:lnRef>
+          <a:fillRef idx="3">
+            <a:schemeClr val="accent1"/>
+          </a:fillRef>
+          <a:effectRef idx="2">
+            <a:schemeClr val="accent1"/>
+          </a:effectRef>
+          <a:fontRef idx="minor">
+            <a:schemeClr val="lt1"/>
+          </a:fontRef>
+        </p:style>
+        <p:txBody>
+          <a:bodyPr rtlCol="0" anchor="ctr"/>
+          <a:lstStyle/>
+          <a:p>
+            <a:pPr algn="ctr"/>
+          </a:p>
+        </p:txBody>
+      </p:sp>
+      <p:sp>
+        <p:nvSpPr>
+          <p:cNvPr id="4" name="TextBox 3"/>
+          <p:cNvSpPr txBox="1"/>
+          <p:nvPr/>
+        </p:nvSpPr>
+        <p:spPr>
+          <a:xfrm>
+            <a:off x="411480" y="1298448"/>
+            <a:ext cx="11368735" cy="274320"/>
+          </a:xfrm>
+          <a:prstGeom prst="rect">
+            <a:avLst/>
+          </a:prstGeom>
+          <a:noFill/>
+        </p:spPr>
+        <p:txBody>
+          <a:bodyPr wrap="square">
+            <a:spAutoFit/>
+          </a:bodyPr>
+          <a:lstStyle/>
+          <a:p>
+            <a:pPr>
+              <a:spcAft>
+                <a:spcPts val="600"/>
+              </a:spcAft>
+            </a:pPr>
+            <a:r>
+              <a:rPr sz="1500" b="0">
+                <a:solidFill>
+                  <a:srgbClr val="282828"/>
+                </a:solidFill>
+                <a:latin typeface="Arial"/>
+              </a:rPr>
+              <a:t>•  Catch the invisible class before hardware does: the plate rig's 11.7% scale error moved contrast 0.17% — found on first closure in the model, because the model has the truth panel a bench lacks.</a:t>
+            </a:r>
+          </a:p>
+          <a:p>
+            <a:pPr>
+              <a:spcAft>
+                <a:spcPts val="600"/>
+              </a:spcAft>
+            </a:pPr>
+            <a:r>
+              <a:rPr sz="1500" b="0">
+                <a:solidFill>
+                  <a:srgbClr val="282828"/>
+                </a:solidFill>
+                <a:latin typeface="Arial"/>
+              </a:rPr>
+              <a:t>•  Price hardware choices in instrument terms: the three-option table is the pattern — splitter angle, cube against plate, waveplate tolerances, coating terminations, analyzer options (rotating or pixelated) all price the same way.</a:t>
+            </a:r>
+          </a:p>
+          <a:p>
+            <a:pPr>
+              <a:spcAft>
+                <a:spcPts val="600"/>
+              </a:spcAft>
+            </a:pPr>
+            <a:r>
+              <a:rPr sz="1500" b="0">
+                <a:solidFill>
+                  <a:srgbClr val="282828"/>
+                </a:solidFill>
+                <a:latin typeface="Arial"/>
+              </a:rPr>
+              <a:t>•  Rehearse calibration protocols: the low-order and actuator-scale calibrations are scripts; a planned bench protocol can run against the model first, with injected errors of chosen size.</a:t>
+            </a:r>
+          </a:p>
+          <a:p>
+            <a:pPr>
+              <a:spcAft>
+                <a:spcPts val="600"/>
+              </a:spcAft>
+            </a:pPr>
+            <a:r>
+              <a:rPr sz="1500" b="0">
+                <a:solidFill>
+                  <a:srgbClr val="282828"/>
+                </a:solidFill>
+                <a:latin typeface="Arial"/>
+              </a:rPr>
+              <a:t>•  What the model does not yet carry: source noise, detector noise, vibration and drift — the idealized gauge is the systematic-error floor, not a bench prediction.  Adding measured-class realism is the natural next step, sized to a use case.</a:t>
+            </a:r>
+          </a:p>
+        </p:txBody>
+      </p:sp>
+      <p:sp>
+        <p:nvSpPr>
+          <p:cNvPr id="5" name="TextBox 4"/>
+          <p:cNvSpPr txBox="1"/>
+          <p:nvPr/>
+        </p:nvSpPr>
+        <p:spPr>
+          <a:xfrm>
+            <a:off x="411480" y="4124706"/>
+            <a:ext cx="11368735" cy="274320"/>
+          </a:xfrm>
+          <a:prstGeom prst="rect">
+            <a:avLst/>
+          </a:prstGeom>
+          <a:noFill/>
+        </p:spPr>
+        <p:txBody>
+          <a:bodyPr wrap="square">
+            <a:spAutoFit/>
+          </a:bodyPr>
+          <a:lstStyle/>
+          <a:p>
+            <a:pPr>
+              <a:spcAft>
+                <a:spcPts val="600"/>
+              </a:spcAft>
+            </a:pPr>
+            <a:r>
+              <a:rPr sz="1050" b="0">
+                <a:solidFill>
+                  <a:srgbClr val="6E6E6E"/>
+                </a:solidFill>
+                <a:latin typeface="Arial"/>
+              </a:rPr>
+              <a:t>All records, checks and figures are committed and re-runnable; the full demonstration runs in under a minute of compute.</a:t>
+            </a:r>
+          </a:p>
+        </p:txBody>
+      </p:sp>
+      <p:sp>
+        <p:nvSpPr>
+          <p:cNvPr id="6" name="TextBox 5"/>
+          <p:cNvSpPr txBox="1"/>
+          <p:nvPr/>
+        </p:nvSpPr>
+        <p:spPr>
+          <a:xfrm>
+            <a:off x="411480" y="4474845"/>
+            <a:ext cx="11368735" cy="274320"/>
+          </a:xfrm>
+          <a:prstGeom prst="rect">
+            <a:avLst/>
+          </a:prstGeom>
+          <a:noFill/>
+        </p:spPr>
+        <p:txBody>
+          <a:bodyPr wrap="square">
+            <a:spAutoFit/>
+          </a:bodyPr>
+          <a:lstStyle/>
+          <a:p>
+            <a:pPr>
+              <a:spcAft>
+                <a:spcPts val="600"/>
+              </a:spcAft>
+            </a:pPr>
+            <a:r>
+              <a:rPr sz="1500" b="0">
+                <a:solidFill>
+                  <a:srgbClr val="282828"/>
+                </a:solidFill>
+                <a:latin typeface="Arial"/>
+              </a:rPr>
+              <a:t># Backup</a:t>
+            </a:r>
+          </a:p>
+        </p:txBody>
+      </p:sp>
+    </p:spTree>
+  </p:cSld>
+  <p:clrMapOvr>
+    <a:masterClrMapping/>
+  </p:clrMapOvr>
+</p:sld>
+</file>
+
+<file path=ppt/slides/slide17.xml><?xml version="1.0" encoding="utf-8"?>
+<p:sld xmlns:a="http://schemas.openxmlformats.org/drawingml/2006/main" xmlns:p="http://schemas.openxmlformats.org/presentationml/2006/main" xmlns:r="http://schemas.openxmlformats.org/officeDocument/2006/relationships">
+  <p:cSld>
+    <p:spTree>
+      <p:nvGrpSpPr>
+        <p:cNvPr id="1" name=""/>
+        <p:cNvGrpSpPr/>
+        <p:nvPr/>
+      </p:nvGrpSpPr>
+      <p:grpSpPr/>
+      <p:sp>
+        <p:nvSpPr>
+          <p:cNvPr id="2" name="TextBox 1"/>
+          <p:cNvSpPr txBox="1"/>
+          <p:nvPr/>
+        </p:nvSpPr>
+        <p:spPr>
+          <a:xfrm>
+            <a:off x="411480" y="201168"/>
+            <a:ext cx="11368735" cy="914400"/>
+          </a:xfrm>
+          <a:prstGeom prst="rect">
+            <a:avLst/>
+          </a:prstGeom>
+          <a:noFill/>
+        </p:spPr>
+        <p:txBody>
+          <a:bodyPr wrap="square">
+            <a:spAutoFit/>
+          </a:bodyPr>
+          <a:lstStyle/>
+          <a:p>
+            <a:pPr>
+              <a:spcAft>
+                <a:spcPts val="400"/>
+              </a:spcAft>
+            </a:pPr>
+            <a:r>
+              <a:rPr sz="2400" b="1">
+                <a:solidFill>
+                  <a:srgbClr val="1F4E79"/>
+                </a:solidFill>
+                <a:latin typeface="Arial"/>
+              </a:rPr>
+              <a:t>Provenance and records</a:t>
+            </a:r>
+          </a:p>
+          <a:p>
+            <a:pPr>
+              <a:spcAft>
+                <a:spcPts val="0"/>
+              </a:spcAft>
+            </a:pPr>
+            <a:r>
+              <a:rPr sz="1250" b="0">
+                <a:solidFill>
+                  <a:srgbClr val="6E6E6E"/>
+                </a:solidFill>
+                <a:latin typeface="Arial"/>
+              </a:rPr>
+              <a:t>Every number re-derives from a committed script</a:t>
+            </a:r>
+          </a:p>
+        </p:txBody>
+      </p:sp>
+      <p:sp>
+        <p:nvSpPr>
+          <p:cNvPr id="3" name="Rectangle 2"/>
+          <p:cNvSpPr/>
+          <p:nvPr/>
+        </p:nvSpPr>
+        <p:spPr>
+          <a:xfrm>
+            <a:off x="411480" y="1133856"/>
+            <a:ext cx="11368735" cy="20320"/>
+          </a:xfrm>
+          <a:prstGeom prst="rect">
+            <a:avLst/>
+          </a:prstGeom>
+          <a:solidFill>
+            <a:srgbClr val="B8C6D4"/>
+          </a:solidFill>
+          <a:ln>
+            <a:noFill/>
+          </a:ln>
+          <a:effectLst/>
+        </p:spPr>
+        <p:style>
+          <a:lnRef idx="1">
+            <a:schemeClr val="accent1"/>
+          </a:lnRef>
+          <a:fillRef idx="3">
+            <a:schemeClr val="accent1"/>
+          </a:fillRef>
+          <a:effectRef idx="2">
+            <a:schemeClr val="accent1"/>
+          </a:effectRef>
+          <a:fontRef idx="minor">
+            <a:schemeClr val="lt1"/>
+          </a:fontRef>
+        </p:style>
+        <p:txBody>
+          <a:bodyPr rtlCol="0" anchor="ctr"/>
+          <a:lstStyle/>
+          <a:p>
+            <a:pPr algn="ctr"/>
+          </a:p>
+        </p:txBody>
+      </p:sp>
+      <p:sp>
+        <p:nvSpPr>
+          <p:cNvPr id="4" name="TextBox 3"/>
+          <p:cNvSpPr txBox="1"/>
+          <p:nvPr/>
+        </p:nvSpPr>
+        <p:spPr>
+          <a:xfrm>
+            <a:off x="411480" y="1298448"/>
+            <a:ext cx="11368735" cy="274320"/>
+          </a:xfrm>
+          <a:prstGeom prst="rect">
+            <a:avLst/>
+          </a:prstGeom>
+          <a:noFill/>
+        </p:spPr>
+        <p:txBody>
+          <a:bodyPr wrap="square">
+            <a:spAutoFit/>
+          </a:bodyPr>
+          <a:lstStyle/>
+          <a:p>
+            <a:pPr>
+              <a:spcAft>
+                <a:spcPts val="600"/>
+              </a:spcAft>
+            </a:pPr>
+            <a:r>
+              <a:rPr sz="1500" b="0">
+                <a:solidFill>
+                  <a:srgbClr val="282828"/>
+                </a:solidFill>
+                <a:latin typeface="Arial"/>
+              </a:rPr>
               <a:t>•  v1 rig, finding and fix: templates/90_polarization/tg_psi_dm — example_tg_psi_dm.m (5 gates + closure), demo_tg_psi.m, README with the topology trade; tg_aoi_ladder.m = the option-3 angle ladder (this deck).</a:t>
             </a:r>
           </a:p>
@@ -4681,6 +6096,22 @@
                 </a:solidFill>
                 <a:latin typeface="Arial"/>
               </a:rPr>
+              <a:t>•  96×96 realization: templates/90_polarization/tg_psi_dm96 — tg96.m (clearance solve, sampling budget, build, battery, response curve, differential test), tg96_tail.m (detector-leg re-optimization: null 9.11 → 0.134 nm, found at reduced resolution, verified at full), tg96_report.txt (all numbers on the 96×96 slides), plus the preserved registration failure series (six reports).</a:t>
+            </a:r>
+          </a:p>
+          <a:p>
+            <a:pPr>
+              <a:spcAft>
+                <a:spcPts val="600"/>
+              </a:spcAft>
+            </a:pPr>
+            <a:r>
+              <a:rPr sz="1500" b="0">
+                <a:solidFill>
+                  <a:srgbClr val="282828"/>
+                </a:solidFill>
+                <a:latin typeface="Arial"/>
+              </a:rPr>
               <a:t>•  Regression: tTgPol (9 checks) + tTgPol2 (9 checks) in the fast suite; the polarizing option's off-state is bit-identical to the plain Twyman–Green.</a:t>
             </a:r>
           </a:p>
@@ -4713,7 +6144,23 @@
                 </a:solidFill>
                 <a:latin typeface="Arial"/>
               </a:rPr>
-              <a:t>•  Option-3 open items: full 16×16 closure at 12°, decomposition of the sub-1% shallow-angle residuals (rig geometry against polarization), and a real splitter-coating design at shallow incidence.</a:t>
+              <a:t>•  Option-3 open items: joint detector-leg optimization (null + pupil-image sharpness + distortion together — the current leg tuned for null alone gave up finest-pattern gain 0.84 → 0.50), response-curve-corrected scoring of the differential residuals, decomposition of the sub-1% shallow-angle residuals (rig geometry against polarization), and a real splitter-coating design at shallow incidence.</a:t>
+            </a:r>
+          </a:p>
+          <a:p>
+            <a:pPr>
+              <a:spcAft>
+                <a:spcPts val="600"/>
+              </a:spcAft>
+            </a:pPr>
+            <a:r>
+              <a:rPr sz="1500" b="0">
+                <a:solidFill>
+                  <a:srgbClr val="282828"/>
+                </a:solidFill>
+                <a:latin typeface="Arial"/>
+              </a:rPr>
+              <a:t>•  Planned configurations on the same DM truth and battery: an all-reflective variant (off-axis paraboloids replace the lenses — removes the transmitted-glass and homogeneity cost rows entirely) and the Zernike wavefront sensor comparison against the differential benchmark.</a:t>
             </a:r>
           </a:p>
         </p:txBody>
@@ -6316,7 +7763,7 @@
                 </a:solidFill>
                 <a:latin typeface="Arial"/>
               </a:rPr>
-              <a:t>All entries from committed runs (v1 example, v2 example, tg_aoi_ladder); "plate-class" and the closure gap are marked where not yet measured.</a:t>
+              <a:t>All entries from committed runs (v1 example, v2 example, tg_aoi_ladder); "plate-class" and the closure gap are marked where not yet measured.  Option 3 has since been laid out and measured at full 96×96 scale — the closing slides.</a:t>
             </a:r>
           </a:p>
         </p:txBody>

--- a/demo_session/deck_tg_fang.pptx
+++ b/demo_session/deck_tg_fang.pptx
@@ -22,6 +22,7 @@
     <p:sldId id="270" r:id="rId21"/>
     <p:sldId id="271" r:id="rId22"/>
     <p:sldId id="272" r:id="rId23"/>
+    <p:sldId id="273" r:id="rId24"/>
   </p:sldIdLst>
   <p:sldSz cx="12191695" cy="6858000" type="screen4x3"/>
   <p:notesSz cx="6858000" cy="9144000"/>
@@ -5874,45 +5875,6 @@
           </a:p>
         </p:txBody>
       </p:sp>
-      <p:sp>
-        <p:nvSpPr>
-          <p:cNvPr id="6" name="TextBox 5"/>
-          <p:cNvSpPr txBox="1"/>
-          <p:nvPr/>
-        </p:nvSpPr>
-        <p:spPr>
-          <a:xfrm>
-            <a:off x="411480" y="4474845"/>
-            <a:ext cx="11368735" cy="274320"/>
-          </a:xfrm>
-          <a:prstGeom prst="rect">
-            <a:avLst/>
-          </a:prstGeom>
-          <a:noFill/>
-        </p:spPr>
-        <p:txBody>
-          <a:bodyPr wrap="square">
-            <a:spAutoFit/>
-          </a:bodyPr>
-          <a:lstStyle/>
-          <a:p>
-            <a:pPr>
-              <a:spcAft>
-                <a:spcPts val="600"/>
-              </a:spcAft>
-            </a:pPr>
-            <a:r>
-              <a:rPr sz="1500" b="0">
-                <a:solidFill>
-                  <a:srgbClr val="282828"/>
-                </a:solidFill>
-                <a:latin typeface="Arial"/>
-              </a:rPr>
-              <a:t># Backup</a:t>
-            </a:r>
-          </a:p>
-        </p:txBody>
-      </p:sp>
     </p:spTree>
   </p:cSld>
   <p:clrMapOvr>
@@ -5922,6 +5884,63 @@
 </file>
 
 <file path=ppt/slides/slide17.xml><?xml version="1.0" encoding="utf-8"?>
+<p:sld xmlns:a="http://schemas.openxmlformats.org/drawingml/2006/main" xmlns:p="http://schemas.openxmlformats.org/presentationml/2006/main" xmlns:r="http://schemas.openxmlformats.org/officeDocument/2006/relationships">
+  <p:cSld>
+    <p:spTree>
+      <p:nvGrpSpPr>
+        <p:cNvPr id="1" name=""/>
+        <p:cNvGrpSpPr/>
+        <p:nvPr/>
+      </p:nvGrpSpPr>
+      <p:grpSpPr/>
+      <p:sp>
+        <p:nvSpPr>
+          <p:cNvPr id="2" name="TextBox 1"/>
+          <p:cNvSpPr txBox="1"/>
+          <p:nvPr/>
+        </p:nvSpPr>
+        <p:spPr>
+          <a:xfrm>
+            <a:off x="822960" y="2743200"/>
+            <a:ext cx="10545775" cy="1280160"/>
+          </a:xfrm>
+          <a:prstGeom prst="rect">
+            <a:avLst/>
+          </a:prstGeom>
+          <a:noFill/>
+        </p:spPr>
+        <p:txBody>
+          <a:bodyPr wrap="square">
+            <a:spAutoFit/>
+          </a:bodyPr>
+          <a:lstStyle/>
+          <a:p>
+            <a:pPr algn="ctr">
+              <a:spcAft>
+                <a:spcPts val="400"/>
+              </a:spcAft>
+            </a:pPr>
+            <a:r>
+              <a:rPr sz="4000" b="1">
+                <a:solidFill>
+                  <a:srgbClr val="1F4E79"/>
+                </a:solidFill>
+                <a:latin typeface="Arial"/>
+              </a:rPr>
+              <a:t>Backup</a:t>
+            </a:r>
+          </a:p>
+        </p:txBody>
+      </p:sp>
+    </p:spTree>
+  </p:cSld>
+  <p:clrMapOvr>
+    <a:masterClrMapping/>
+  </p:clrMapOvr>
+</p:sld>
+</file>
+
+<file path=ppt/slides/slide18.xml><?xml version="1.0" encoding="utf-8"?>
 <p:sld xmlns:a="http://schemas.openxmlformats.org/drawingml/2006/main" xmlns:p="http://schemas.openxmlformats.org/presentationml/2006/main" xmlns:r="http://schemas.openxmlformats.org/officeDocument/2006/relationships">
   <p:cSld>
     <p:spTree>

--- a/demo_session/deck_tg_fang.pptx
+++ b/demo_session/deck_tg_fang.pptx
@@ -23,6 +23,7 @@
     <p:sldId id="271" r:id="rId22"/>
     <p:sldId id="272" r:id="rId23"/>
     <p:sldId id="273" r:id="rId24"/>
+    <p:sldId id="274" r:id="rId25"/>
   </p:sldIdLst>
   <p:sldSz cx="12191695" cy="6858000" type="screen4x3"/>
   <p:notesSz cx="6858000" cy="9144000"/>
@@ -4371,7 +4372,7 @@
       </p:sp>
       <p:pic>
         <p:nvPicPr>
-          <p:cNvPr id="5" name="Picture 4" descr="tg96_layout.png"/>
+          <p:cNvPr id="5" name="Picture 4" descr="tg96_render_rig.png"/>
           <p:cNvPicPr>
             <a:picLocks noChangeAspect="1"/>
           </p:cNvPicPr>
@@ -4385,8 +4386,8 @@
         </p:blipFill>
         <p:spPr>
           <a:xfrm>
-            <a:off x="7252582" y="1298448"/>
-            <a:ext cx="3691394" cy="2514092"/>
+            <a:off x="6503663" y="1298448"/>
+            <a:ext cx="5189233" cy="1708912"/>
           </a:xfrm>
           <a:prstGeom prst="rect">
             <a:avLst/>
@@ -4401,8 +4402,8 @@
         </p:nvSpPr>
         <p:spPr>
           <a:xfrm>
-            <a:off x="6400800" y="3830827"/>
-            <a:ext cx="5394960" cy="229107"/>
+            <a:off x="6400800" y="3025648"/>
+            <a:ext cx="5394960" cy="394208"/>
           </a:xfrm>
           <a:prstGeom prst="rect">
             <a:avLst/>
@@ -4427,7 +4428,7 @@
                 </a:solidFill>
                 <a:latin typeface="Arial"/>
               </a:rPr>
-              <a:t>The solved bench: plate at 7°, DM leg 700 mm, every beam-edge margin ≥ 25 mm.</a:t>
+              <a:t>The test arm as traced: plate at 7°, the 96 mm DM on its 700 mm leg, and the detector tail to the pupil-image camera.</a:t>
             </a:r>
           </a:p>
         </p:txBody>
@@ -4440,7 +4441,7 @@
         </p:nvSpPr>
         <p:spPr>
           <a:xfrm>
-            <a:off x="6400800" y="4096511"/>
+            <a:off x="6400800" y="3456432"/>
             <a:ext cx="5394960" cy="274320"/>
           </a:xfrm>
           <a:prstGeom prst="rect">
@@ -4466,7 +4467,7 @@
                 </a:solidFill>
                 <a:latin typeface="Arial"/>
               </a:rPr>
-              <a:t>Record: templates/90_polarization/tg_psi_dm96 (tg96.m; report, layout and figures committed).</a:t>
+              <a:t>Record: templates/40_benches/tg_psi_dm96 (tg96.m; report, clearance-margin layout figure, and all numbers committed).</a:t>
             </a:r>
           </a:p>
         </p:txBody>
@@ -4786,6 +4787,327 @@
 </file>
 
 <file path=ppt/slides/slide15.xml><?xml version="1.0" encoding="utf-8"?>
+<p:sld xmlns:a="http://schemas.openxmlformats.org/drawingml/2006/main" xmlns:p="http://schemas.openxmlformats.org/presentationml/2006/main" xmlns:r="http://schemas.openxmlformats.org/officeDocument/2006/relationships">
+  <p:cSld>
+    <p:spTree>
+      <p:nvGrpSpPr>
+        <p:cNvPr id="1" name=""/>
+        <p:cNvGrpSpPr/>
+        <p:nvPr/>
+      </p:nvGrpSpPr>
+      <p:grpSpPr/>
+      <p:sp>
+        <p:nvSpPr>
+          <p:cNvPr id="2" name="TextBox 1"/>
+          <p:cNvSpPr txBox="1"/>
+          <p:nvPr/>
+        </p:nvSpPr>
+        <p:spPr>
+          <a:xfrm>
+            <a:off x="411480" y="201168"/>
+            <a:ext cx="11368735" cy="914400"/>
+          </a:xfrm>
+          <a:prstGeom prst="rect">
+            <a:avLst/>
+          </a:prstGeom>
+          <a:noFill/>
+        </p:spPr>
+        <p:txBody>
+          <a:bodyPr wrap="square">
+            <a:spAutoFit/>
+          </a:bodyPr>
+          <a:lstStyle/>
+          <a:p>
+            <a:pPr>
+              <a:spcAft>
+                <a:spcPts val="400"/>
+              </a:spcAft>
+            </a:pPr>
+            <a:r>
+              <a:rPr sz="2400" b="1">
+                <a:solidFill>
+                  <a:srgbClr val="1F4E79"/>
+                </a:solidFill>
+                <a:latin typeface="Arial"/>
+              </a:rPr>
+              <a:t>Wavefront estimates through the gauge</a:t>
+            </a:r>
+          </a:p>
+          <a:p>
+            <a:pPr>
+              <a:spcAft>
+                <a:spcPts val="0"/>
+              </a:spcAft>
+            </a:pPr>
+            <a:r>
+              <a:rPr sz="1250" b="0">
+                <a:solidFill>
+                  <a:srgbClr val="6E6E6E"/>
+                </a:solidFill>
+                <a:latin typeface="Arial"/>
+              </a:rPr>
+              <a:t>One actuator pushed 20 nm recovers at gain 0.98 with 0.05 nm rms error; an 8 nm defocus at 1.02 with 0.09 nm — applied, sensed, and the estimate error</a:t>
+            </a:r>
+          </a:p>
+        </p:txBody>
+      </p:sp>
+      <p:sp>
+        <p:nvSpPr>
+          <p:cNvPr id="3" name="Rectangle 2"/>
+          <p:cNvSpPr/>
+          <p:nvPr/>
+        </p:nvSpPr>
+        <p:spPr>
+          <a:xfrm>
+            <a:off x="411480" y="1133856"/>
+            <a:ext cx="11368735" cy="20320"/>
+          </a:xfrm>
+          <a:prstGeom prst="rect">
+            <a:avLst/>
+          </a:prstGeom>
+          <a:solidFill>
+            <a:srgbClr val="B8C6D4"/>
+          </a:solidFill>
+          <a:ln>
+            <a:noFill/>
+          </a:ln>
+          <a:effectLst/>
+        </p:spPr>
+        <p:style>
+          <a:lnRef idx="1">
+            <a:schemeClr val="accent1"/>
+          </a:lnRef>
+          <a:fillRef idx="3">
+            <a:schemeClr val="accent1"/>
+          </a:fillRef>
+          <a:effectRef idx="2">
+            <a:schemeClr val="accent1"/>
+          </a:effectRef>
+          <a:fontRef idx="minor">
+            <a:schemeClr val="lt1"/>
+          </a:fontRef>
+        </p:style>
+        <p:txBody>
+          <a:bodyPr rtlCol="0" anchor="ctr"/>
+          <a:lstStyle/>
+          <a:p>
+            <a:pPr algn="ctr"/>
+          </a:p>
+        </p:txBody>
+      </p:sp>
+      <p:pic>
+        <p:nvPicPr>
+          <p:cNvPr id="4" name="Picture 3" descr="tg96_poke_triptych.png"/>
+          <p:cNvPicPr>
+            <a:picLocks noChangeAspect="1"/>
+          </p:cNvPicPr>
+          <p:nvPr/>
+        </p:nvPicPr>
+        <p:blipFill>
+          <a:blip r:embed="rId2"/>
+          <a:stretch>
+            <a:fillRect/>
+          </a:stretch>
+        </p:blipFill>
+        <p:spPr>
+          <a:xfrm>
+            <a:off x="3643334" y="1298448"/>
+            <a:ext cx="4905026" cy="1462532"/>
+          </a:xfrm>
+          <a:prstGeom prst="rect">
+            <a:avLst/>
+          </a:prstGeom>
+        </p:spPr>
+      </p:pic>
+      <p:sp>
+        <p:nvSpPr>
+          <p:cNvPr id="5" name="TextBox 4"/>
+          <p:cNvSpPr txBox="1"/>
+          <p:nvPr/>
+        </p:nvSpPr>
+        <p:spPr>
+          <a:xfrm>
+            <a:off x="411480" y="2779268"/>
+            <a:ext cx="11368735" cy="229107"/>
+          </a:xfrm>
+          <a:prstGeom prst="rect">
+            <a:avLst/>
+          </a:prstGeom>
+          <a:noFill/>
+        </p:spPr>
+        <p:txBody>
+          <a:bodyPr wrap="square">
+            <a:spAutoFit/>
+          </a:bodyPr>
+          <a:lstStyle/>
+          <a:p>
+            <a:pPr algn="ctr">
+              <a:spcAft>
+                <a:spcPts val="0"/>
+              </a:spcAft>
+            </a:pPr>
+            <a:r>
+              <a:rPr sz="1000" b="0">
+                <a:solidFill>
+                  <a:srgbClr val="6E6E6E"/>
+                </a:solidFill>
+                <a:latin typeface="Arial"/>
+              </a:rPr>
+              <a:t>One actuator pushed 20 nm: sensed matches applied; the error is a 0.05 nm rms sub-actuator dipole (residual registration, not gauge phase).</a:t>
+            </a:r>
+          </a:p>
+        </p:txBody>
+      </p:sp>
+      <p:pic>
+        <p:nvPicPr>
+          <p:cNvPr id="6" name="Picture 5" descr="tg96_defocus_triptych.png"/>
+          <p:cNvPicPr>
+            <a:picLocks noChangeAspect="1"/>
+          </p:cNvPicPr>
+          <p:nvPr/>
+        </p:nvPicPr>
+        <p:blipFill>
+          <a:blip r:embed="rId3"/>
+          <a:stretch>
+            <a:fillRect/>
+          </a:stretch>
+        </p:blipFill>
+        <p:spPr>
+          <a:xfrm>
+            <a:off x="3635414" y="3044952"/>
+            <a:ext cx="4920865" cy="1462532"/>
+          </a:xfrm>
+          <a:prstGeom prst="rect">
+            <a:avLst/>
+          </a:prstGeom>
+        </p:spPr>
+      </p:pic>
+      <p:sp>
+        <p:nvSpPr>
+          <p:cNvPr id="7" name="TextBox 6"/>
+          <p:cNvSpPr txBox="1"/>
+          <p:nvPr/>
+        </p:nvSpPr>
+        <p:spPr>
+          <a:xfrm>
+            <a:off x="411480" y="4525771"/>
+            <a:ext cx="11368735" cy="229107"/>
+          </a:xfrm>
+          <a:prstGeom prst="rect">
+            <a:avLst/>
+          </a:prstGeom>
+          <a:noFill/>
+        </p:spPr>
+        <p:txBody>
+          <a:bodyPr wrap="square">
+            <a:spAutoFit/>
+          </a:bodyPr>
+          <a:lstStyle/>
+          <a:p>
+            <a:pPr algn="ctr">
+              <a:spcAft>
+                <a:spcPts val="0"/>
+              </a:spcAft>
+            </a:pPr>
+            <a:r>
+              <a:rPr sz="1000" b="0">
+                <a:solidFill>
+                  <a:srgbClr val="6E6E6E"/>
+                </a:solidFill>
+                <a:latin typeface="Arial"/>
+              </a:rPr>
+              <a:t>Defocus at 8 nm amplitude: gain 1.024, error flat at 0.086 nm rms — the interferometer owns low order.</a:t>
+            </a:r>
+          </a:p>
+        </p:txBody>
+      </p:sp>
+      <p:sp>
+        <p:nvSpPr>
+          <p:cNvPr id="8" name="TextBox 7"/>
+          <p:cNvSpPr txBox="1"/>
+          <p:nvPr/>
+        </p:nvSpPr>
+        <p:spPr>
+          <a:xfrm>
+            <a:off x="411480" y="4791455"/>
+            <a:ext cx="11368735" cy="274320"/>
+          </a:xfrm>
+          <a:prstGeom prst="rect">
+            <a:avLst/>
+          </a:prstGeom>
+          <a:noFill/>
+        </p:spPr>
+        <p:txBody>
+          <a:bodyPr wrap="square">
+            <a:spAutoFit/>
+          </a:bodyPr>
+          <a:lstStyle/>
+          <a:p>
+            <a:pPr>
+              <a:spcAft>
+                <a:spcPts val="600"/>
+              </a:spcAft>
+            </a:pPr>
+            <a:r>
+              <a:rPr sz="1500" b="0">
+                <a:solidFill>
+                  <a:srgbClr val="282828"/>
+                </a:solidFill>
+                <a:latin typeface="Arial"/>
+              </a:rPr>
+              <a:t>•  Reading with the transfer curve in hand: the gauge is essentially perfect from low order through the single-actuator scale; its cost concentrates at the finest patterns (0.50 gain at the full 96×96 checkerboard).  The same two cases measured on the Zernike sensor (its own deck): poke 0.45 at its sampling-starved camera, defocus 0.99.</a:t>
+            </a:r>
+          </a:p>
+        </p:txBody>
+      </p:sp>
+      <p:sp>
+        <p:nvSpPr>
+          <p:cNvPr id="9" name="TextBox 8"/>
+          <p:cNvSpPr txBox="1"/>
+          <p:nvPr/>
+        </p:nvSpPr>
+        <p:spPr>
+          <a:xfrm>
+            <a:off x="411480" y="5711189"/>
+            <a:ext cx="11368735" cy="274320"/>
+          </a:xfrm>
+          <a:prstGeom prst="rect">
+            <a:avLst/>
+          </a:prstGeom>
+          <a:noFill/>
+        </p:spPr>
+        <p:txBody>
+          <a:bodyPr wrap="square">
+            <a:spAutoFit/>
+          </a:bodyPr>
+          <a:lstStyle/>
+          <a:p>
+            <a:pPr>
+              <a:spcAft>
+                <a:spcPts val="600"/>
+              </a:spcAft>
+            </a:pPr>
+            <a:r>
+              <a:rPr sz="1050" b="0">
+                <a:solidFill>
+                  <a:srgbClr val="6E6E6E"/>
+                </a:solidFill>
+                <a:latin typeface="Arial"/>
+              </a:rPr>
+              <a:t>Truth mapped to the camera by traced rays; measurement sign −1 and patterns on the illuminated 38 mm radius (the source fills 74% of the aperture — a display-frame lesson recorded in the campaign README).  Record: tg96_wf_figs.m.</a:t>
+            </a:r>
+          </a:p>
+        </p:txBody>
+      </p:sp>
+    </p:spTree>
+  </p:cSld>
+  <p:clrMapOvr>
+    <a:masterClrMapping/>
+  </p:clrMapOvr>
+</p:sld>
+</file>
+
+<file path=ppt/slides/slide16.xml><?xml version="1.0" encoding="utf-8"?>
 <p:sld xmlns:a="http://schemas.openxmlformats.org/drawingml/2006/main" xmlns:p="http://schemas.openxmlformats.org/presentationml/2006/main" xmlns:r="http://schemas.openxmlformats.org/officeDocument/2006/relationships">
   <p:cSld>
     <p:spTree>
@@ -5640,7 +5962,7 @@
 </p:sld>
 </file>
 
-<file path=ppt/slides/slide16.xml><?xml version="1.0" encoding="utf-8"?>
+<file path=ppt/slides/slide17.xml><?xml version="1.0" encoding="utf-8"?>
 <p:sld xmlns:a="http://schemas.openxmlformats.org/drawingml/2006/main" xmlns:p="http://schemas.openxmlformats.org/presentationml/2006/main" xmlns:r="http://schemas.openxmlformats.org/officeDocument/2006/relationships">
   <p:cSld>
     <p:spTree>
@@ -5871,63 +6193,6 @@
                 <a:latin typeface="Arial"/>
               </a:rPr>
               <a:t>All records, checks and figures are committed and re-runnable; the full demonstration runs in under a minute of compute.</a:t>
-            </a:r>
-          </a:p>
-        </p:txBody>
-      </p:sp>
-    </p:spTree>
-  </p:cSld>
-  <p:clrMapOvr>
-    <a:masterClrMapping/>
-  </p:clrMapOvr>
-</p:sld>
-</file>
-
-<file path=ppt/slides/slide17.xml><?xml version="1.0" encoding="utf-8"?>
-<p:sld xmlns:a="http://schemas.openxmlformats.org/drawingml/2006/main" xmlns:p="http://schemas.openxmlformats.org/presentationml/2006/main" xmlns:r="http://schemas.openxmlformats.org/officeDocument/2006/relationships">
-  <p:cSld>
-    <p:spTree>
-      <p:nvGrpSpPr>
-        <p:cNvPr id="1" name=""/>
-        <p:cNvGrpSpPr/>
-        <p:nvPr/>
-      </p:nvGrpSpPr>
-      <p:grpSpPr/>
-      <p:sp>
-        <p:nvSpPr>
-          <p:cNvPr id="2" name="TextBox 1"/>
-          <p:cNvSpPr txBox="1"/>
-          <p:nvPr/>
-        </p:nvSpPr>
-        <p:spPr>
-          <a:xfrm>
-            <a:off x="822960" y="2743200"/>
-            <a:ext cx="10545775" cy="1280160"/>
-          </a:xfrm>
-          <a:prstGeom prst="rect">
-            <a:avLst/>
-          </a:prstGeom>
-          <a:noFill/>
-        </p:spPr>
-        <p:txBody>
-          <a:bodyPr wrap="square">
-            <a:spAutoFit/>
-          </a:bodyPr>
-          <a:lstStyle/>
-          <a:p>
-            <a:pPr algn="ctr">
-              <a:spcAft>
-                <a:spcPts val="400"/>
-              </a:spcAft>
-            </a:pPr>
-            <a:r>
-              <a:rPr sz="4000" b="1">
-                <a:solidFill>
-                  <a:srgbClr val="1F4E79"/>
-                </a:solidFill>
-                <a:latin typeface="Arial"/>
-              </a:rPr>
-              <a:t>Backup</a:t>
             </a:r>
           </a:p>
         </p:txBody>
@@ -5958,6 +6223,63 @@
         </p:nvSpPr>
         <p:spPr>
           <a:xfrm>
+            <a:off x="822960" y="2743200"/>
+            <a:ext cx="10545775" cy="1280160"/>
+          </a:xfrm>
+          <a:prstGeom prst="rect">
+            <a:avLst/>
+          </a:prstGeom>
+          <a:noFill/>
+        </p:spPr>
+        <p:txBody>
+          <a:bodyPr wrap="square">
+            <a:spAutoFit/>
+          </a:bodyPr>
+          <a:lstStyle/>
+          <a:p>
+            <a:pPr algn="ctr">
+              <a:spcAft>
+                <a:spcPts val="400"/>
+              </a:spcAft>
+            </a:pPr>
+            <a:r>
+              <a:rPr sz="4000" b="1">
+                <a:solidFill>
+                  <a:srgbClr val="1F4E79"/>
+                </a:solidFill>
+                <a:latin typeface="Arial"/>
+              </a:rPr>
+              <a:t>Backup</a:t>
+            </a:r>
+          </a:p>
+        </p:txBody>
+      </p:sp>
+    </p:spTree>
+  </p:cSld>
+  <p:clrMapOvr>
+    <a:masterClrMapping/>
+  </p:clrMapOvr>
+</p:sld>
+</file>
+
+<file path=ppt/slides/slide19.xml><?xml version="1.0" encoding="utf-8"?>
+<p:sld xmlns:a="http://schemas.openxmlformats.org/drawingml/2006/main" xmlns:p="http://schemas.openxmlformats.org/presentationml/2006/main" xmlns:r="http://schemas.openxmlformats.org/officeDocument/2006/relationships">
+  <p:cSld>
+    <p:spTree>
+      <p:nvGrpSpPr>
+        <p:cNvPr id="1" name=""/>
+        <p:cNvGrpSpPr/>
+        <p:nvPr/>
+      </p:nvGrpSpPr>
+      <p:grpSpPr/>
+      <p:sp>
+        <p:nvSpPr>
+          <p:cNvPr id="2" name="TextBox 1"/>
+          <p:cNvSpPr txBox="1"/>
+          <p:nvPr/>
+        </p:nvSpPr>
+        <p:spPr>
+          <a:xfrm>
             <a:off x="411480" y="201168"/>
             <a:ext cx="11368735" cy="914400"/>
           </a:xfrm>
@@ -6115,7 +6437,7 @@
                 </a:solidFill>
                 <a:latin typeface="Arial"/>
               </a:rPr>
-              <a:t>•  96×96 realization: templates/90_polarization/tg_psi_dm96 — tg96.m (clearance solve, sampling budget, build, battery, response curve, differential test), tg96_tail.m (detector-leg re-optimization: null 9.11 → 0.134 nm, found at reduced resolution, verified at full), tg96_report.txt (all numbers on the 96×96 slides), plus the preserved registration failure series (six reports).</a:t>
+              <a:t>•  96×96 realization: templates/40_benches/tg_psi_dm96 — tg96.m (clearance solve, sampling budget, build, battery, response curve, differential test), tg96_tail.m (detector-leg re-optimization: null 9.11 → 0.134 nm, found at reduced resolution, verified at full), tg96_report.txt (all numbers on the 96×96 slides), plus the preserved registration failure series (six reports).</a:t>
             </a:r>
           </a:p>
           <a:p>

--- a/demo_session/deck_tg_fang.pptx
+++ b/demo_session/deck_tg_fang.pptx
@@ -24,6 +24,9 @@
     <p:sldId id="272" r:id="rId23"/>
     <p:sldId id="273" r:id="rId24"/>
     <p:sldId id="274" r:id="rId25"/>
+    <p:sldId id="275" r:id="rId26"/>
+    <p:sldId id="276" r:id="rId27"/>
+    <p:sldId id="277" r:id="rId28"/>
   </p:sldIdLst>
   <p:sldSz cx="12191695" cy="6858000" type="screen4x3"/>
   <p:notesSz cx="6858000" cy="9144000"/>
@@ -3156,7 +3159,7 @@
                 </a:solidFill>
                 <a:latin typeface="Arial"/>
               </a:rPr>
-              <a:t>A polarization phase-shifting Twyman–Green in MACOS: three splitter options priced, the idealized gauge closed at 0.18 nm, calibration taken to the actuator scale — and the shallow-plate option laid out and measured at full 96×96 scale</a:t>
+              <a:t>A polarization phase-shifting Twyman–Green in MACOS: three splitter options priced, the idealized gauge closed at 0.18 nm, calibration taken to the actuator scale, the shallow-plate option measured at full 96×96 scale — and a Zernike-sensor head-to-head on the same DM truth, priced to the 1 pm ambition</a:t>
             </a:r>
           </a:p>
           <a:p>
@@ -5055,7 +5058,7 @@
                 </a:solidFill>
                 <a:latin typeface="Arial"/>
               </a:rPr>
-              <a:t>•  Reading with the transfer curve in hand: the gauge is essentially perfect from low order through the single-actuator scale; its cost concentrates at the finest patterns (0.50 gain at the full 96×96 checkerboard).  The same two cases measured on the Zernike sensor (its own deck): poke 0.45 at its sampling-starved camera, defocus 0.99.</a:t>
+              <a:t>•  Reading with the transfer curve in hand: the gauge is essentially perfect from low order through the single-actuator scale; its cost concentrates at the finest patterns (0.50 gain at the full 96×96 checkerboard).  The same two cases measured on the Zernike sensor (its own deck): poke 0.45 raw — the mask spot selects the band; a sampling sweep refuted the camera as the cause, and kernel calibration recovers 0.90 — defocus 0.99.</a:t>
             </a:r>
           </a:p>
         </p:txBody>
@@ -5068,7 +5071,7 @@
         </p:nvSpPr>
         <p:spPr>
           <a:xfrm>
-            <a:off x="411480" y="5711189"/>
+            <a:off x="411480" y="5958839"/>
             <a:ext cx="11368735" cy="274320"/>
           </a:xfrm>
           <a:prstGeom prst="rect">
@@ -5910,7 +5913,7 @@
                 </a:solidFill>
                 <a:latin typeface="Arial"/>
               </a:rPr>
-              <a:t>•  This is the benchmark for what comes next: the same DM truth and the same differential score, measured by a Zernike wavefront sensor — the planned comparison.</a:t>
+              <a:t>•  This benchmark has since been run head-to-head against a Zernike wavefront sensor on the same DM truth, in actuator currency — the next three slides.</a:t>
             </a:r>
           </a:p>
         </p:txBody>
@@ -6006,7 +6009,7 @@
                 </a:solidFill>
                 <a:latin typeface="Arial"/>
               </a:rPr>
-              <a:t>What this offers a bench program</a:t>
+              <a:t>The head-to-head, in actuator currency</a:t>
             </a:r>
           </a:p>
           <a:p>
@@ -6022,7 +6025,7 @@
                 </a:solidFill>
                 <a:latin typeface="Arial"/>
               </a:rPr>
-              <a:t>An instrument-error sandbox where truth is exact and every systematic prints</a:t>
+              <a:t>A 10 nm actuator change reads to 46 pm through the calibrated interferometer, identically on a flat and a 30 nm working surface — and the interferometer does not break as the working state grows</a:t>
             </a:r>
           </a:p>
         </p:txBody>
@@ -6105,68 +6108,319 @@
                 </a:solidFill>
                 <a:latin typeface="Arial"/>
               </a:rPr>
-              <a:t>•  Catch the invisible class before hardware does: the plate rig's 11.7% scale error moved contrast 0.17% — found on first closure in the model, because the model has the truth panel a bench lacks.</a:t>
-            </a:r>
-          </a:p>
-          <a:p>
-            <a:pPr>
-              <a:spcAft>
-                <a:spcPts val="600"/>
-              </a:spcAft>
-            </a:pPr>
-            <a:r>
-              <a:rPr sz="1500" b="0">
-                <a:solidFill>
-                  <a:srgbClr val="282828"/>
-                </a:solidFill>
-                <a:latin typeface="Arial"/>
-              </a:rPr>
-              <a:t>•  Price hardware choices in instrument terms: the three-option table is the pattern — splitter angle, cube against plate, waveplate tolerances, coating terminations, analyzer options (rotating or pixelated) all price the same way.</a:t>
-            </a:r>
-          </a:p>
-          <a:p>
-            <a:pPr>
-              <a:spcAft>
-                <a:spcPts val="600"/>
-              </a:spcAft>
-            </a:pPr>
-            <a:r>
-              <a:rPr sz="1500" b="0">
-                <a:solidFill>
-                  <a:srgbClr val="282828"/>
-                </a:solidFill>
-                <a:latin typeface="Arial"/>
-              </a:rPr>
-              <a:t>•  Rehearse calibration protocols: the low-order and actuator-scale calibrations are scripts; a planned bench protocol can run against the model first, with injected errors of chosen size.</a:t>
-            </a:r>
-          </a:p>
-          <a:p>
-            <a:pPr>
-              <a:spcAft>
-                <a:spcPts val="600"/>
-              </a:spcAft>
-            </a:pPr>
-            <a:r>
-              <a:rPr sz="1500" b="0">
-                <a:solidFill>
-                  <a:srgbClr val="282828"/>
-                </a:solidFill>
-                <a:latin typeface="Arial"/>
-              </a:rPr>
-              <a:t>•  What the model does not yet carry: source noise, detector noise, vibration and drift — the idealized gauge is the systematic-error floor, not a bench prediction.  Adding measured-class realism is the natural next step, sized to a use case.</a:t>
-            </a:r>
-          </a:p>
-        </p:txBody>
-      </p:sp>
-      <p:sp>
-        <p:nvSpPr>
-          <p:cNvPr id="5" name="TextBox 4"/>
+              <a:t>•  Scoring moved to actuator space (the ruling): fit the DM's influence model to the measurement through the ray-traced registration, score recovered actuator commands — one currency for any sensor.  Both instruments carry calibrated estimators: a measured (ZWFS) or exact (IFO) response kernel, Tikhonov lattice deconvolution, and a measured modal transfer correction.</a:t>
+            </a:r>
+          </a:p>
+        </p:txBody>
+      </p:sp>
+      <p:graphicFrame>
+        <p:nvGraphicFramePr>
+          <p:cNvPr id="5" name="Table 4"/>
+          <p:cNvGraphicFramePr>
+            <a:graphicFrameLocks noGrp="1"/>
+          </p:cNvGraphicFramePr>
+          <p:nvPr/>
+        </p:nvGraphicFramePr>
+        <p:xfrm>
+          <a:off x="411480" y="2465831"/>
+          <a:ext cx="11368735" cy="1120140"/>
+        </p:xfrm>
+        <a:graphic>
+          <a:graphicData uri="http://schemas.openxmlformats.org/drawingml/2006/table">
+            <a:tbl>
+              <a:tblPr firstRow="1" bandRow="1">
+                <a:tableStyleId>{5C22544A-7EE6-4342-B048-85BDC9FD1C3A}</a:tableStyleId>
+              </a:tblPr>
+              <a:tblGrid>
+                <a:gridCol w="10349687"/>
+                <a:gridCol w="436880"/>
+                <a:gridCol w="582168"/>
+              </a:tblGrid>
+              <a:tr h="280035">
+                <a:tc>
+                  <a:txBody>
+                    <a:bodyPr wrap="square"/>
+                    <a:lstStyle/>
+                    <a:p>
+                      <a:r>
+                        <a:rPr sz="1100" b="1">
+                          <a:solidFill>
+                            <a:srgbClr val="FFFFFF"/>
+                          </a:solidFill>
+                          <a:latin typeface="Arial"/>
+                        </a:rPr>
+                        <a:t>single 10 nm actuator change, on a 30 nm working surface</a:t>
+                      </a:r>
+                    </a:p>
+                  </a:txBody>
+                  <a:tcPr marL="54864" marR="54864" marT="18288" marB="18288">
+                    <a:solidFill>
+                      <a:srgbClr val="1F4E79"/>
+                    </a:solidFill>
+                  </a:tcPr>
+                </a:tc>
+                <a:tc>
+                  <a:txBody>
+                    <a:bodyPr wrap="square"/>
+                    <a:lstStyle/>
+                    <a:p>
+                      <a:r>
+                        <a:rPr sz="1100" b="1">
+                          <a:solidFill>
+                            <a:srgbClr val="FFFFFF"/>
+                          </a:solidFill>
+                          <a:latin typeface="Arial"/>
+                        </a:rPr>
+                        <a:t>gain</a:t>
+                      </a:r>
+                    </a:p>
+                  </a:txBody>
+                  <a:tcPr marL="54864" marR="54864" marT="18288" marB="18288">
+                    <a:solidFill>
+                      <a:srgbClr val="1F4E79"/>
+                    </a:solidFill>
+                  </a:tcPr>
+                </a:tc>
+                <a:tc>
+                  <a:txBody>
+                    <a:bodyPr wrap="square"/>
+                    <a:lstStyle/>
+                    <a:p>
+                      <a:r>
+                        <a:rPr sz="1100" b="1">
+                          <a:solidFill>
+                            <a:srgbClr val="FFFFFF"/>
+                          </a:solidFill>
+                          <a:latin typeface="Arial"/>
+                        </a:rPr>
+                        <a:t>error</a:t>
+                      </a:r>
+                    </a:p>
+                  </a:txBody>
+                  <a:tcPr marL="54864" marR="54864" marT="18288" marB="18288">
+                    <a:solidFill>
+                      <a:srgbClr val="1F4E79"/>
+                    </a:solidFill>
+                  </a:tcPr>
+                </a:tc>
+              </a:tr>
+              <a:tr h="280035">
+                <a:tc>
+                  <a:txBody>
+                    <a:bodyPr wrap="square"/>
+                    <a:lstStyle/>
+                    <a:p>
+                      <a:r>
+                        <a:rPr sz="1100" b="0">
+                          <a:solidFill>
+                            <a:srgbClr val="282828"/>
+                          </a:solidFill>
+                          <a:latin typeface="Arial"/>
+                        </a:rPr>
+                        <a:t>interferometer, four-step differential</a:t>
+                      </a:r>
+                    </a:p>
+                  </a:txBody>
+                  <a:tcPr marL="54864" marR="54864" marT="18288" marB="18288">
+                    <a:solidFill>
+                      <a:srgbClr val="FFFFFF"/>
+                    </a:solidFill>
+                  </a:tcPr>
+                </a:tc>
+                <a:tc>
+                  <a:txBody>
+                    <a:bodyPr wrap="square"/>
+                    <a:lstStyle/>
+                    <a:p>
+                      <a:r>
+                        <a:rPr sz="1100" b="0">
+                          <a:solidFill>
+                            <a:srgbClr val="282828"/>
+                          </a:solidFill>
+                          <a:latin typeface="Arial"/>
+                        </a:rPr>
+                        <a:t>0.92</a:t>
+                      </a:r>
+                    </a:p>
+                  </a:txBody>
+                  <a:tcPr marL="54864" marR="54864" marT="18288" marB="18288">
+                    <a:solidFill>
+                      <a:srgbClr val="FFFFFF"/>
+                    </a:solidFill>
+                  </a:tcPr>
+                </a:tc>
+                <a:tc>
+                  <a:txBody>
+                    <a:bodyPr wrap="square"/>
+                    <a:lstStyle/>
+                    <a:p>
+                      <a:r>
+                        <a:rPr sz="1100" b="0">
+                          <a:solidFill>
+                            <a:srgbClr val="282828"/>
+                          </a:solidFill>
+                          <a:latin typeface="Arial"/>
+                        </a:rPr>
+                        <a:t>46 pm</a:t>
+                      </a:r>
+                    </a:p>
+                  </a:txBody>
+                  <a:tcPr marL="54864" marR="54864" marT="18288" marB="18288">
+                    <a:solidFill>
+                      <a:srgbClr val="FFFFFF"/>
+                    </a:solidFill>
+                  </a:tcPr>
+                </a:tc>
+              </a:tr>
+              <a:tr h="280035">
+                <a:tc>
+                  <a:txBody>
+                    <a:bodyPr wrap="square"/>
+                    <a:lstStyle/>
+                    <a:p>
+                      <a:r>
+                        <a:rPr sz="1100" b="0">
+                          <a:solidFill>
+                            <a:srgbClr val="282828"/>
+                          </a:solidFill>
+                          <a:latin typeface="Arial"/>
+                        </a:rPr>
+                        <a:t>Zernike sensor, frozen-reference linear reading</a:t>
+                      </a:r>
+                    </a:p>
+                  </a:txBody>
+                  <a:tcPr marL="54864" marR="54864" marT="18288" marB="18288">
+                    <a:solidFill>
+                      <a:srgbClr val="ECF1F6"/>
+                    </a:solidFill>
+                  </a:tcPr>
+                </a:tc>
+                <a:tc>
+                  <a:txBody>
+                    <a:bodyPr wrap="square"/>
+                    <a:lstStyle/>
+                    <a:p>
+                      <a:r>
+                        <a:rPr sz="1100" b="0">
+                          <a:solidFill>
+                            <a:srgbClr val="282828"/>
+                          </a:solidFill>
+                          <a:latin typeface="Arial"/>
+                        </a:rPr>
+                        <a:t>0.66</a:t>
+                      </a:r>
+                    </a:p>
+                  </a:txBody>
+                  <a:tcPr marL="54864" marR="54864" marT="18288" marB="18288">
+                    <a:solidFill>
+                      <a:srgbClr val="ECF1F6"/>
+                    </a:solidFill>
+                  </a:tcPr>
+                </a:tc>
+                <a:tc>
+                  <a:txBody>
+                    <a:bodyPr wrap="square"/>
+                    <a:lstStyle/>
+                    <a:p>
+                      <a:r>
+                        <a:rPr sz="1100" b="0">
+                          <a:solidFill>
+                            <a:srgbClr val="282828"/>
+                          </a:solidFill>
+                          <a:latin typeface="Arial"/>
+                        </a:rPr>
+                        <a:t>744 pm</a:t>
+                      </a:r>
+                    </a:p>
+                  </a:txBody>
+                  <a:tcPr marL="54864" marR="54864" marT="18288" marB="18288">
+                    <a:solidFill>
+                      <a:srgbClr val="ECF1F6"/>
+                    </a:solidFill>
+                  </a:tcPr>
+                </a:tc>
+              </a:tr>
+              <a:tr h="280035">
+                <a:tc>
+                  <a:txBody>
+                    <a:bodyPr wrap="square"/>
+                    <a:lstStyle/>
+                    <a:p>
+                      <a:r>
+                        <a:rPr sz="1100" b="0">
+                          <a:solidFill>
+                            <a:srgbClr val="282828"/>
+                          </a:solidFill>
+                          <a:latin typeface="Arial"/>
+                        </a:rPr>
+                        <a:t>Zernike sensor, multi-depth phase-stepped retrieval</a:t>
+                      </a:r>
+                    </a:p>
+                  </a:txBody>
+                  <a:tcPr marL="54864" marR="54864" marT="18288" marB="18288">
+                    <a:solidFill>
+                      <a:srgbClr val="FFFFFF"/>
+                    </a:solidFill>
+                  </a:tcPr>
+                </a:tc>
+                <a:tc>
+                  <a:txBody>
+                    <a:bodyPr wrap="square"/>
+                    <a:lstStyle/>
+                    <a:p>
+                      <a:r>
+                        <a:rPr sz="1100" b="0">
+                          <a:solidFill>
+                            <a:srgbClr val="282828"/>
+                          </a:solidFill>
+                          <a:latin typeface="Arial"/>
+                        </a:rPr>
+                        <a:t>1.13</a:t>
+                      </a:r>
+                    </a:p>
+                  </a:txBody>
+                  <a:tcPr marL="54864" marR="54864" marT="18288" marB="18288">
+                    <a:solidFill>
+                      <a:srgbClr val="FFFFFF"/>
+                    </a:solidFill>
+                  </a:tcPr>
+                </a:tc>
+                <a:tc>
+                  <a:txBody>
+                    <a:bodyPr wrap="square"/>
+                    <a:lstStyle/>
+                    <a:p>
+                      <a:r>
+                        <a:rPr sz="1100" b="0">
+                          <a:solidFill>
+                            <a:srgbClr val="282828"/>
+                          </a:solidFill>
+                          <a:latin typeface="Arial"/>
+                        </a:rPr>
+                        <a:t>773 pm</a:t>
+                      </a:r>
+                    </a:p>
+                  </a:txBody>
+                  <a:tcPr marL="54864" marR="54864" marT="18288" marB="18288">
+                    <a:solidFill>
+                      <a:srgbClr val="FFFFFF"/>
+                    </a:solidFill>
+                  </a:tcPr>
+                </a:tc>
+              </a:tr>
+            </a:tbl>
+          </a:graphicData>
+        </a:graphic>
+      </p:graphicFrame>
+      <p:sp>
+        <p:nvSpPr>
+          <p:cNvPr id="6" name="TextBox 5"/>
           <p:cNvSpPr txBox="1"/>
           <p:nvPr/>
         </p:nvSpPr>
         <p:spPr>
           <a:xfrm>
-            <a:off x="411480" y="4124706"/>
+            <a:off x="411480" y="3732275"/>
             <a:ext cx="11368735" cy="274320"/>
           </a:xfrm>
           <a:prstGeom prst="rect">
@@ -6186,13 +6440,68 @@
               </a:spcAft>
             </a:pPr>
             <a:r>
+              <a:rPr sz="1500" b="0">
+                <a:solidFill>
+                  <a:srgbClr val="282828"/>
+                </a:solidFill>
+                <a:latin typeface="Arial"/>
+              </a:rPr>
+              <a:t>•  The break scale separates them: growing the working surface 30 → 480 nm rms costs the interferometer ~5% of gain and 44 → 55 pm of floor — it does not fold.  The Zernike sensor's linear reading folds beyond a ~30 nm working state; the phase-stepped retrieval holds to ~60 nm; beyond ~120 nm its recoveries still clear a formal detection threshold but are no longer measurements.</a:t>
+            </a:r>
+          </a:p>
+          <a:p>
+            <a:pPr>
+              <a:spcAft>
+                <a:spcPts val="600"/>
+              </a:spcAft>
+            </a:pPr>
+            <a:r>
+              <a:rPr sz="1500" b="0">
+                <a:solidFill>
+                  <a:srgbClr val="282828"/>
+                </a:solidFill>
+                <a:latin typeface="Arial"/>
+              </a:rPr>
+              <a:t>•  Verdict as measured, not assumed: the working-state axis belongs to the interferometer; the Zernike sensor serves flat and small working states — and owns dynamic range on single frames (a 150 nm poke, 3 radians, retrieves within 9% via the depth ladder where the linear reading folds).</a:t>
+            </a:r>
+          </a:p>
+        </p:txBody>
+      </p:sp>
+      <p:sp>
+        <p:nvSpPr>
+          <p:cNvPr id="7" name="TextBox 6"/>
+          <p:cNvSpPr txBox="1"/>
+          <p:nvPr/>
+        </p:nvSpPr>
+        <p:spPr>
+          <a:xfrm>
+            <a:off x="411480" y="5782817"/>
+            <a:ext cx="11368735" cy="274320"/>
+          </a:xfrm>
+          <a:prstGeom prst="rect">
+            <a:avLst/>
+          </a:prstGeom>
+          <a:noFill/>
+        </p:spPr>
+        <p:txBody>
+          <a:bodyPr wrap="square">
+            <a:spAutoFit/>
+          </a:bodyPr>
+          <a:lstStyle/>
+          <a:p>
+            <a:pPr>
+              <a:spcAft>
+                <a:spcPts val="600"/>
+              </a:spcAft>
+            </a:pPr>
+            <a:r>
               <a:rPr sz="1050" b="0">
                 <a:solidFill>
                   <a:srgbClr val="6E6E6E"/>
                 </a:solidFill>
                 <a:latin typeface="Arial"/>
               </a:rPr>
-              <a:t>All records, checks and figures are committed and re-runnable; the full demonstration runs in under a minute of compute.</a:t>
+              <a:t>96×96 rig; 48×48 (DST-class pitch) measured alongside with the same conclusions at 33 pm.  Records: tg96_s4_report.txt, zwfs_s4_report.txt; machinery factored into one scoring library (dm_gauge_lib) so both instruments run the identical estimator code.</a:t>
             </a:r>
           </a:p>
         </p:txBody>
@@ -6223,8 +6532,8 @@
         </p:nvSpPr>
         <p:spPr>
           <a:xfrm>
-            <a:off x="822960" y="2743200"/>
-            <a:ext cx="10545775" cy="1280160"/>
+            <a:off x="411480" y="201168"/>
+            <a:ext cx="11368735" cy="914400"/>
           </a:xfrm>
           <a:prstGeom prst="rect">
             <a:avLst/>
@@ -6237,19 +6546,221 @@
           </a:bodyPr>
           <a:lstStyle/>
           <a:p>
-            <a:pPr algn="ctr">
+            <a:pPr>
               <a:spcAft>
                 <a:spcPts val="400"/>
               </a:spcAft>
             </a:pPr>
             <a:r>
-              <a:rPr sz="4000" b="1">
+              <a:rPr sz="2400" b="1">
                 <a:solidFill>
                   <a:srgbClr val="1F4E79"/>
                 </a:solidFill>
                 <a:latin typeface="Arial"/>
               </a:rPr>
-              <a:t>Backup</a:t>
+              <a:t>The Zernike sensor as we model it</a:t>
+            </a:r>
+          </a:p>
+          <a:p>
+            <a:pPr>
+              <a:spcAft>
+                <a:spcPts val="0"/>
+              </a:spcAft>
+            </a:pPr>
+            <a:r>
+              <a:rPr sz="1250" b="0">
+                <a:solidFill>
+                  <a:srgbClr val="6E6E6E"/>
+                </a:solidFill>
+                <a:latin typeface="Arial"/>
+              </a:rPr>
+              <a:t>Explicit choices, so a different modeling of the same sensor is discoverable in one conversation</a:t>
+            </a:r>
+          </a:p>
+        </p:txBody>
+      </p:sp>
+      <p:sp>
+        <p:nvSpPr>
+          <p:cNvPr id="3" name="Rectangle 2"/>
+          <p:cNvSpPr/>
+          <p:nvPr/>
+        </p:nvSpPr>
+        <p:spPr>
+          <a:xfrm>
+            <a:off x="411480" y="1133856"/>
+            <a:ext cx="11368735" cy="20320"/>
+          </a:xfrm>
+          <a:prstGeom prst="rect">
+            <a:avLst/>
+          </a:prstGeom>
+          <a:solidFill>
+            <a:srgbClr val="B8C6D4"/>
+          </a:solidFill>
+          <a:ln>
+            <a:noFill/>
+          </a:ln>
+          <a:effectLst/>
+        </p:spPr>
+        <p:style>
+          <a:lnRef idx="1">
+            <a:schemeClr val="accent1"/>
+          </a:lnRef>
+          <a:fillRef idx="3">
+            <a:schemeClr val="accent1"/>
+          </a:fillRef>
+          <a:effectRef idx="2">
+            <a:schemeClr val="accent1"/>
+          </a:effectRef>
+          <a:fontRef idx="minor">
+            <a:schemeClr val="lt1"/>
+          </a:fontRef>
+        </p:style>
+        <p:txBody>
+          <a:bodyPr rtlCol="0" anchor="ctr"/>
+          <a:lstStyle/>
+          <a:p>
+            <a:pPr algn="ctr"/>
+          </a:p>
+        </p:txBody>
+      </p:sp>
+      <p:sp>
+        <p:nvSpPr>
+          <p:cNvPr id="4" name="TextBox 3"/>
+          <p:cNvSpPr txBox="1"/>
+          <p:nvPr/>
+        </p:nvSpPr>
+        <p:spPr>
+          <a:xfrm>
+            <a:off x="411480" y="1298448"/>
+            <a:ext cx="11368735" cy="274320"/>
+          </a:xfrm>
+          <a:prstGeom prst="rect">
+            <a:avLst/>
+          </a:prstGeom>
+          <a:noFill/>
+        </p:spPr>
+        <p:txBody>
+          <a:bodyPr wrap="square">
+            <a:spAutoFit/>
+          </a:bodyPr>
+          <a:lstStyle/>
+          <a:p>
+            <a:pPr>
+              <a:spcAft>
+                <a:spcPts val="600"/>
+              </a:spcAft>
+            </a:pPr>
+            <a:r>
+              <a:rPr sz="1500" b="0">
+                <a:solidFill>
+                  <a:srgbClr val="282828"/>
+                </a:solidFill>
+                <a:latin typeface="Arial"/>
+              </a:rPr>
+              <a:t>•  Geometry: the gauge's own test arm, reference arm removed — same source, lenses and DM; the phase dimple sits at the internal focus of the detector leg, and the camera sees the re-imaged pupil.  One frame per measurement.</a:t>
+            </a:r>
+          </a:p>
+          <a:p>
+            <a:pPr>
+              <a:spcAft>
+                <a:spcPts val="600"/>
+              </a:spcAft>
+            </a:pPr>
+            <a:r>
+              <a:rPr sz="1500" b="0">
+                <a:solidFill>
+                  <a:srgbClr val="282828"/>
+                </a:solidFill>
+                <a:latin typeface="Arial"/>
+              </a:rPr>
+              <a:t>•  The mask is a complex transmission applied to the propagated field at focus — not a phase screen on rays: 346.2 nm etch in fused silica (π/2 at 632.8 nm, the VSG2 hardware value), gray-edge supersampled disk, diameter 2.0 λ/D as used (1.06 λ/D — the hardware spot — sign-inverts the fine-actuator band; the spot is a band-select lever we measured, not a free parameter).</a:t>
+            </a:r>
+          </a:p>
+          <a:p>
+            <a:pPr>
+              <a:spcAft>
+                <a:spcPts val="600"/>
+              </a:spcAft>
+            </a:pPr>
+            <a:r>
+              <a:rPr sz="1500" b="0">
+                <a:solidFill>
+                  <a:srgbClr val="282828"/>
+                </a:solidFill>
+                <a:latin typeface="Arial"/>
+              </a:rPr>
+              <a:t>•  Propagation to and from the focus is physical optics (near-field reference-sphere sandwich), with the focal-plane sampling asserted at ≥6 pixels across the dimple — an interface we found silently starved when the tail was traced geometrically.</a:t>
+            </a:r>
+          </a:p>
+          <a:p>
+            <a:pPr>
+              <a:spcAft>
+                <a:spcPts val="600"/>
+              </a:spcAft>
+            </a:pPr>
+            <a:r>
+              <a:rPr sz="1500" b="0">
+                <a:solidFill>
+                  <a:srgbClr val="282828"/>
+                </a:solidFill>
+                <a:latin typeface="Arial"/>
+              </a:rPr>
+              <a:t>•  Two reconstructions, used per their measured strengths: a frozen-reference linear reading (calibrated against model-measured E₀ and E_b fields on the flat DM), and a multi-depth phase-stepped retrieval (π/2, π, 3π/2 + clear).  A structural fact worth comparing notes on: for a phase-only dimple |c|² = −2 Re c identically, so depth stepping yields two observables per pixel, not three — |E_b|² must come from a one-time calibration, not the ladder.</a:t>
+            </a:r>
+          </a:p>
+          <a:p>
+            <a:pPr>
+              <a:spcAft>
+                <a:spcPts val="600"/>
+              </a:spcAft>
+            </a:pPr>
+            <a:r>
+              <a:rPr sz="1500" b="0">
+                <a:solidFill>
+                  <a:srgbClr val="282828"/>
+                </a:solidFill>
+                <a:latin typeface="Arial"/>
+              </a:rPr>
+              <a:t>•  Calibration is noiseless in the model (long-exposure assumption), and scoring is actuator-space through the same estimator code as the interferometer.</a:t>
+            </a:r>
+          </a:p>
+        </p:txBody>
+      </p:sp>
+      <p:sp>
+        <p:nvSpPr>
+          <p:cNvPr id="5" name="TextBox 4"/>
+          <p:cNvSpPr txBox="1"/>
+          <p:nvPr/>
+        </p:nvSpPr>
+        <p:spPr>
+          <a:xfrm>
+            <a:off x="411480" y="5750814"/>
+            <a:ext cx="11368735" cy="274320"/>
+          </a:xfrm>
+          <a:prstGeom prst="rect">
+            <a:avLst/>
+          </a:prstGeom>
+          <a:noFill/>
+        </p:spPr>
+        <p:txBody>
+          <a:bodyPr wrap="square">
+            <a:spAutoFit/>
+          </a:bodyPr>
+          <a:lstStyle/>
+          <a:p>
+            <a:pPr>
+              <a:spcAft>
+                <a:spcPts val="600"/>
+              </a:spcAft>
+            </a:pPr>
+            <a:r>
+              <a:rPr sz="1050" b="0">
+                <a:solidFill>
+                  <a:srgbClr val="6E6E6E"/>
+                </a:solidFill>
+                <a:latin typeface="Arial"/>
+              </a:rPr>
+              <a:t>Phase 2 in plan: a polarizing metasurface producing two phase images (vector Zernike sensor) once the scalar system is agreed.  If Fang's group models the sensor differently — mask representation, propagation, reference handling, reconstruction — this slide is the diff list.</a:t>
             </a:r>
           </a:p>
         </p:txBody>
@@ -6306,7 +6817,7 @@
                 </a:solidFill>
                 <a:latin typeface="Arial"/>
               </a:rPr>
-              <a:t>Provenance and records</a:t>
+              <a:t>Pricing the 1 pm ambition: photons are not the blocker</a:t>
             </a:r>
           </a:p>
           <a:p>
@@ -6322,7 +6833,7 @@
                 </a:solidFill>
                 <a:latin typeface="Arial"/>
               </a:rPr>
-              <a:t>Every number re-derives from a committed script</a:t>
+              <a:t>All three readings reach 1 pm near 10¹⁵ photons per DM state — within 2× of each other — so systematics, not light, decide</a:t>
             </a:r>
           </a:p>
         </p:txBody>
@@ -6405,9 +6916,331 @@
                 </a:solidFill>
                 <a:latin typeface="Arial"/>
               </a:rPr>
-              <a:t>•  v1 rig, finding and fix: templates/90_polarization/tg_psi_dm — example_tg_psi_dm.m (5 gates + closure), demo_tg_psi.m, README with the topology trade; tg_aoi_ladder.m = the option-3 angle ladder (this deck).</a:t>
-            </a:r>
-          </a:p>
+              <a:t>•  Method: the optical fields do not depend on noise, so noiseless frames are captured once per DM state and photon shot noise is Monte-Carloed numerically; the photon budget per state is split across each reading's frames (interferometer 4, linear 1, stepped 4) — equal light and equal time across modalities.</a:t>
+            </a:r>
+          </a:p>
+        </p:txBody>
+      </p:sp>
+      <p:graphicFrame>
+        <p:nvGraphicFramePr>
+          <p:cNvPr id="5" name="Table 4"/>
+          <p:cNvGraphicFramePr>
+            <a:graphicFrameLocks noGrp="1"/>
+          </p:cNvGraphicFramePr>
+          <p:nvPr/>
+        </p:nvGraphicFramePr>
+        <p:xfrm>
+          <a:off x="411480" y="2218182"/>
+          <a:ext cx="11368733" cy="1120140"/>
+        </p:xfrm>
+        <a:graphic>
+          <a:graphicData uri="http://schemas.openxmlformats.org/drawingml/2006/table">
+            <a:tbl>
+              <a:tblPr firstRow="1" bandRow="1">
+                <a:tableStyleId>{5C22544A-7EE6-4342-B048-85BDC9FD1C3A}</a:tableStyleId>
+              </a:tblPr>
+              <a:tblGrid>
+                <a:gridCol w="3842952"/>
+                <a:gridCol w="4003075"/>
+                <a:gridCol w="3522706"/>
+              </a:tblGrid>
+              <a:tr h="280035">
+                <a:tc>
+                  <a:txBody>
+                    <a:bodyPr wrap="square"/>
+                    <a:lstStyle/>
+                    <a:p>
+                      <a:r>
+                        <a:rPr sz="1100" b="1">
+                          <a:solidFill>
+                            <a:srgbClr val="FFFFFF"/>
+                          </a:solidFill>
+                          <a:latin typeface="Arial"/>
+                        </a:rPr>
+                        <a:t>reading</a:t>
+                      </a:r>
+                    </a:p>
+                  </a:txBody>
+                  <a:tcPr marL="54864" marR="54864" marT="18288" marB="18288">
+                    <a:solidFill>
+                      <a:srgbClr val="1F4E79"/>
+                    </a:solidFill>
+                  </a:tcPr>
+                </a:tc>
+                <a:tc>
+                  <a:txBody>
+                    <a:bodyPr wrap="square"/>
+                    <a:lstStyle/>
+                    <a:p>
+                      <a:r>
+                        <a:rPr sz="1100" b="1">
+                          <a:solidFill>
+                            <a:srgbClr val="FFFFFF"/>
+                          </a:solidFill>
+                          <a:latin typeface="Arial"/>
+                        </a:rPr>
+                        <a:t>noise on the 10 nm change</a:t>
+                      </a:r>
+                    </a:p>
+                  </a:txBody>
+                  <a:tcPr marL="54864" marR="54864" marT="18288" marB="18288">
+                    <a:solidFill>
+                      <a:srgbClr val="1F4E79"/>
+                    </a:solidFill>
+                  </a:tcPr>
+                </a:tc>
+                <a:tc>
+                  <a:txBody>
+                    <a:bodyPr wrap="square"/>
+                    <a:lstStyle/>
+                    <a:p>
+                      <a:r>
+                        <a:rPr sz="1100" b="1">
+                          <a:solidFill>
+                            <a:srgbClr val="FFFFFF"/>
+                          </a:solidFill>
+                          <a:latin typeface="Arial"/>
+                        </a:rPr>
+                        <a:t>photons/state for 1 pm</a:t>
+                      </a:r>
+                    </a:p>
+                  </a:txBody>
+                  <a:tcPr marL="54864" marR="54864" marT="18288" marB="18288">
+                    <a:solidFill>
+                      <a:srgbClr val="1F4E79"/>
+                    </a:solidFill>
+                  </a:tcPr>
+                </a:tc>
+              </a:tr>
+              <a:tr h="280035">
+                <a:tc>
+                  <a:txBody>
+                    <a:bodyPr wrap="square"/>
+                    <a:lstStyle/>
+                    <a:p>
+                      <a:r>
+                        <a:rPr sz="1100" b="0">
+                          <a:solidFill>
+                            <a:srgbClr val="282828"/>
+                          </a:solidFill>
+                          <a:latin typeface="Arial"/>
+                        </a:rPr>
+                        <a:t>interferometer four-step</a:t>
+                      </a:r>
+                    </a:p>
+                  </a:txBody>
+                  <a:tcPr marL="54864" marR="54864" marT="18288" marB="18288">
+                    <a:solidFill>
+                      <a:srgbClr val="FFFFFF"/>
+                    </a:solidFill>
+                  </a:tcPr>
+                </a:tc>
+                <a:tc>
+                  <a:txBody>
+                    <a:bodyPr wrap="square"/>
+                    <a:lstStyle/>
+                    <a:p>
+                      <a:r>
+                        <a:rPr sz="1100" b="0">
+                          <a:solidFill>
+                            <a:srgbClr val="282828"/>
+                          </a:solidFill>
+                          <a:latin typeface="Arial"/>
+                        </a:rPr>
+                        <a:t>2.8×10⁷/√N pm</a:t>
+                      </a:r>
+                    </a:p>
+                  </a:txBody>
+                  <a:tcPr marL="54864" marR="54864" marT="18288" marB="18288">
+                    <a:solidFill>
+                      <a:srgbClr val="FFFFFF"/>
+                    </a:solidFill>
+                  </a:tcPr>
+                </a:tc>
+                <a:tc>
+                  <a:txBody>
+                    <a:bodyPr wrap="square"/>
+                    <a:lstStyle/>
+                    <a:p>
+                      <a:r>
+                        <a:rPr sz="1100" b="0">
+                          <a:solidFill>
+                            <a:srgbClr val="282828"/>
+                          </a:solidFill>
+                          <a:latin typeface="Arial"/>
+                        </a:rPr>
+                        <a:t>8×10¹⁴</a:t>
+                      </a:r>
+                    </a:p>
+                  </a:txBody>
+                  <a:tcPr marL="54864" marR="54864" marT="18288" marB="18288">
+                    <a:solidFill>
+                      <a:srgbClr val="FFFFFF"/>
+                    </a:solidFill>
+                  </a:tcPr>
+                </a:tc>
+              </a:tr>
+              <a:tr h="280035">
+                <a:tc>
+                  <a:txBody>
+                    <a:bodyPr wrap="square"/>
+                    <a:lstStyle/>
+                    <a:p>
+                      <a:r>
+                        <a:rPr sz="1100" b="0">
+                          <a:solidFill>
+                            <a:srgbClr val="282828"/>
+                          </a:solidFill>
+                          <a:latin typeface="Arial"/>
+                        </a:rPr>
+                        <a:t>Zernike linear</a:t>
+                      </a:r>
+                    </a:p>
+                  </a:txBody>
+                  <a:tcPr marL="54864" marR="54864" marT="18288" marB="18288">
+                    <a:solidFill>
+                      <a:srgbClr val="ECF1F6"/>
+                    </a:solidFill>
+                  </a:tcPr>
+                </a:tc>
+                <a:tc>
+                  <a:txBody>
+                    <a:bodyPr wrap="square"/>
+                    <a:lstStyle/>
+                    <a:p>
+                      <a:r>
+                        <a:rPr sz="1100" b="0">
+                          <a:solidFill>
+                            <a:srgbClr val="282828"/>
+                          </a:solidFill>
+                          <a:latin typeface="Arial"/>
+                        </a:rPr>
+                        <a:t>3.7×10⁷/√N pm</a:t>
+                      </a:r>
+                    </a:p>
+                  </a:txBody>
+                  <a:tcPr marL="54864" marR="54864" marT="18288" marB="18288">
+                    <a:solidFill>
+                      <a:srgbClr val="ECF1F6"/>
+                    </a:solidFill>
+                  </a:tcPr>
+                </a:tc>
+                <a:tc>
+                  <a:txBody>
+                    <a:bodyPr wrap="square"/>
+                    <a:lstStyle/>
+                    <a:p>
+                      <a:r>
+                        <a:rPr sz="1100" b="0">
+                          <a:solidFill>
+                            <a:srgbClr val="282828"/>
+                          </a:solidFill>
+                          <a:latin typeface="Arial"/>
+                        </a:rPr>
+                        <a:t>1.4×10¹⁵</a:t>
+                      </a:r>
+                    </a:p>
+                  </a:txBody>
+                  <a:tcPr marL="54864" marR="54864" marT="18288" marB="18288">
+                    <a:solidFill>
+                      <a:srgbClr val="ECF1F6"/>
+                    </a:solidFill>
+                  </a:tcPr>
+                </a:tc>
+              </a:tr>
+              <a:tr h="280035">
+                <a:tc>
+                  <a:txBody>
+                    <a:bodyPr wrap="square"/>
+                    <a:lstStyle/>
+                    <a:p>
+                      <a:r>
+                        <a:rPr sz="1100" b="0">
+                          <a:solidFill>
+                            <a:srgbClr val="282828"/>
+                          </a:solidFill>
+                          <a:latin typeface="Arial"/>
+                        </a:rPr>
+                        <a:t>Zernike stepped</a:t>
+                      </a:r>
+                    </a:p>
+                  </a:txBody>
+                  <a:tcPr marL="54864" marR="54864" marT="18288" marB="18288">
+                    <a:solidFill>
+                      <a:srgbClr val="FFFFFF"/>
+                    </a:solidFill>
+                  </a:tcPr>
+                </a:tc>
+                <a:tc>
+                  <a:txBody>
+                    <a:bodyPr wrap="square"/>
+                    <a:lstStyle/>
+                    <a:p>
+                      <a:r>
+                        <a:rPr sz="1100" b="0">
+                          <a:solidFill>
+                            <a:srgbClr val="282828"/>
+                          </a:solidFill>
+                          <a:latin typeface="Arial"/>
+                        </a:rPr>
+                        <a:t>7.0×10⁷/√N pm</a:t>
+                      </a:r>
+                    </a:p>
+                  </a:txBody>
+                  <a:tcPr marL="54864" marR="54864" marT="18288" marB="18288">
+                    <a:solidFill>
+                      <a:srgbClr val="FFFFFF"/>
+                    </a:solidFill>
+                  </a:tcPr>
+                </a:tc>
+                <a:tc>
+                  <a:txBody>
+                    <a:bodyPr wrap="square"/>
+                    <a:lstStyle/>
+                    <a:p>
+                      <a:r>
+                        <a:rPr sz="1100" b="0">
+                          <a:solidFill>
+                            <a:srgbClr val="282828"/>
+                          </a:solidFill>
+                          <a:latin typeface="Arial"/>
+                        </a:rPr>
+                        <a:t>5×10¹⁵</a:t>
+                      </a:r>
+                    </a:p>
+                  </a:txBody>
+                  <a:tcPr marL="54864" marR="54864" marT="18288" marB="18288">
+                    <a:solidFill>
+                      <a:srgbClr val="FFFFFF"/>
+                    </a:solidFill>
+                  </a:tcPr>
+                </a:tc>
+              </a:tr>
+            </a:tbl>
+          </a:graphicData>
+        </a:graphic>
+      </p:graphicFrame>
+      <p:sp>
+        <p:nvSpPr>
+          <p:cNvPr id="6" name="TextBox 5"/>
+          <p:cNvSpPr txBox="1"/>
+          <p:nvPr/>
+        </p:nvSpPr>
+        <p:spPr>
+          <a:xfrm>
+            <a:off x="411480" y="3484626"/>
+            <a:ext cx="11368735" cy="274320"/>
+          </a:xfrm>
+          <a:prstGeom prst="rect">
+            <a:avLst/>
+          </a:prstGeom>
+          <a:noFill/>
+        </p:spPr>
+        <p:txBody>
+          <a:bodyPr wrap="square">
+            <a:spAutoFit/>
+          </a:bodyPr>
+          <a:lstStyle/>
           <a:p>
             <a:pPr>
               <a:spcAft>
@@ -6421,7 +7254,7 @@
                 </a:solidFill>
                 <a:latin typeface="Arial"/>
               </a:rPr>
-              <a:t>•  v2 cube: templates/90_polarization/tg_psi_dm_v2 — pbs_macneille.m + thinfilm_rt.m (textbook thin-film reference, general incident medium), example, demo_tg_psi_v2.m (8 beats), tg_widen.m (actuator-scale calibration).</a:t>
+              <a:t>•  The noise follows 1/√N over eight decades, and each instrument's high-photon floor converges to its measured systematic floor — the noiseless campaign and the noise model agree where they must.</a:t>
             </a:r>
           </a:p>
           <a:p>
@@ -6437,9 +7270,32 @@
                 </a:solidFill>
                 <a:latin typeface="Arial"/>
               </a:rPr>
-              <a:t>•  96×96 realization: templates/40_benches/tg_psi_dm96 — tg96.m (clearance solve, sampling budget, build, battery, response curve, differential test), tg96_tail.m (detector-leg re-optimization: null 9.11 → 0.134 nm, found at reduced resolution, verified at full), tg96_report.txt (all numbers on the 96×96 slides), plus the preserved registration failure series (six reports).</a:t>
-            </a:r>
-          </a:p>
+              <a:t>•  10¹⁵ photons at 633 nm is ~0.3 mJ — trivial for a bench source.  The 1 pm budget is therefore a systematics and gain-stability budget (gain jitter measured at the 0.1% class), not a photon budget — and the sensors' photon economies do not discriminate between them.</a:t>
+            </a:r>
+          </a:p>
+        </p:txBody>
+      </p:sp>
+      <p:sp>
+        <p:nvSpPr>
+          <p:cNvPr id="7" name="TextBox 6"/>
+          <p:cNvSpPr txBox="1"/>
+          <p:nvPr/>
+        </p:nvSpPr>
+        <p:spPr>
+          <a:xfrm>
+            <a:off x="411480" y="5039868"/>
+            <a:ext cx="11368735" cy="274320"/>
+          </a:xfrm>
+          <a:prstGeom prst="rect">
+            <a:avLst/>
+          </a:prstGeom>
+          <a:noFill/>
+        </p:spPr>
+        <p:txBody>
+          <a:bodyPr wrap="square">
+            <a:spAutoFit/>
+          </a:bodyPr>
+          <a:lstStyle/>
           <a:p>
             <a:pPr>
               <a:spcAft>
@@ -6447,61 +7303,13 @@
               </a:spcAft>
             </a:pPr>
             <a:r>
-              <a:rPr sz="1500" b="0">
-                <a:solidFill>
-                  <a:srgbClr val="282828"/>
-                </a:solidFill>
-                <a:latin typeface="Arial"/>
-              </a:rPr>
-              <a:t>•  Regression: tTgPol (9 checks) + tTgPol2 (9 checks) in the fast suite; the polarizing option's off-state is bit-identical to the plain Twyman–Green.</a:t>
-            </a:r>
-          </a:p>
-          <a:p>
-            <a:pPr>
-              <a:spcAft>
-                <a:spcPts val="600"/>
-              </a:spcAft>
-            </a:pPr>
-            <a:r>
-              <a:rPr sz="1500" b="0">
-                <a:solidFill>
-                  <a:srgbClr val="282828"/>
-                </a:solidFill>
-                <a:latin typeface="Arial"/>
-              </a:rPr>
-              <a:t>•  Traps recorded so they are not re-derived: a circular state is analyzer-invariant in power (single-arm tripwires pass vacuously on the aligned rig); the four-step protocol's 4θ term is real at the detector (8.9×10⁻⁴ of the fringe) and cancels in the differential protocol (1.7×10⁻¹⁴ nm); diffraction-array row/column parity is calibrated on one actuator and verified on a second, never hard-coded.</a:t>
-            </a:r>
-          </a:p>
-          <a:p>
-            <a:pPr>
-              <a:spcAft>
-                <a:spcPts val="600"/>
-              </a:spcAft>
-            </a:pPr>
-            <a:r>
-              <a:rPr sz="1500" b="0">
-                <a:solidFill>
-                  <a:srgbClr val="282828"/>
-                </a:solidFill>
-                <a:latin typeface="Arial"/>
-              </a:rPr>
-              <a:t>•  Option-3 open items: joint detector-leg optimization (null + pupil-image sharpness + distortion together — the current leg tuned for null alone gave up finest-pattern gain 0.84 → 0.50), response-curve-corrected scoring of the differential residuals, decomposition of the sub-1% shallow-angle residuals (rig geometry against polarization), and a real splitter-coating design at shallow incidence.</a:t>
-            </a:r>
-          </a:p>
-          <a:p>
-            <a:pPr>
-              <a:spcAft>
-                <a:spcPts val="600"/>
-              </a:spcAft>
-            </a:pPr>
-            <a:r>
-              <a:rPr sz="1500" b="0">
-                <a:solidFill>
-                  <a:srgbClr val="282828"/>
-                </a:solidFill>
-                <a:latin typeface="Arial"/>
-              </a:rPr>
-              <a:t>•  Planned configurations on the same DM truth and battery: an all-reflective variant (off-axis paraboloids replace the lenses — removes the transmitted-glass and homogeneity cost rows entirely) and the Zernike wavefront sensor comparison against the differential benchmark.</a:t>
+              <a:rPr sz="1050" b="0">
+                <a:solidFill>
+                  <a:srgbClr val="6E6E6E"/>
+                </a:solidFill>
+                <a:latin typeface="Arial"/>
+              </a:rPr>
+              <a:t>Scenario: the head-to-head row (single 10 nm change on the 30 nm working surface, 96×96).  Detector read noise, drift and calibration noise are the natural next terms once a use case fixes them.  Records: tg96_s5noise_report.txt, zwfs_s5noise_report.txt.</a:t>
             </a:r>
           </a:p>
         </p:txBody>
@@ -6792,6 +7600,574 @@
                 <a:latin typeface="Arial"/>
               </a:rPr>
               <a:t>Test optic: a 16×16-actuator deformable mirror, influence-function surface model, HeNe 632.8 nm.  In every option the polarizing elements sit in the arms; the splitter differs.</a:t>
+            </a:r>
+          </a:p>
+        </p:txBody>
+      </p:sp>
+    </p:spTree>
+  </p:cSld>
+  <p:clrMapOvr>
+    <a:masterClrMapping/>
+  </p:clrMapOvr>
+</p:sld>
+</file>
+
+<file path=ppt/slides/slide20.xml><?xml version="1.0" encoding="utf-8"?>
+<p:sld xmlns:a="http://schemas.openxmlformats.org/drawingml/2006/main" xmlns:p="http://schemas.openxmlformats.org/presentationml/2006/main" xmlns:r="http://schemas.openxmlformats.org/officeDocument/2006/relationships">
+  <p:cSld>
+    <p:spTree>
+      <p:nvGrpSpPr>
+        <p:cNvPr id="1" name=""/>
+        <p:cNvGrpSpPr/>
+        <p:nvPr/>
+      </p:nvGrpSpPr>
+      <p:grpSpPr/>
+      <p:sp>
+        <p:nvSpPr>
+          <p:cNvPr id="2" name="TextBox 1"/>
+          <p:cNvSpPr txBox="1"/>
+          <p:nvPr/>
+        </p:nvSpPr>
+        <p:spPr>
+          <a:xfrm>
+            <a:off x="411480" y="201168"/>
+            <a:ext cx="11368735" cy="914400"/>
+          </a:xfrm>
+          <a:prstGeom prst="rect">
+            <a:avLst/>
+          </a:prstGeom>
+          <a:noFill/>
+        </p:spPr>
+        <p:txBody>
+          <a:bodyPr wrap="square">
+            <a:spAutoFit/>
+          </a:bodyPr>
+          <a:lstStyle/>
+          <a:p>
+            <a:pPr>
+              <a:spcAft>
+                <a:spcPts val="400"/>
+              </a:spcAft>
+            </a:pPr>
+            <a:r>
+              <a:rPr sz="2400" b="1">
+                <a:solidFill>
+                  <a:srgbClr val="1F4E79"/>
+                </a:solidFill>
+                <a:latin typeface="Arial"/>
+              </a:rPr>
+              <a:t>What this offers a bench program</a:t>
+            </a:r>
+          </a:p>
+          <a:p>
+            <a:pPr>
+              <a:spcAft>
+                <a:spcPts val="0"/>
+              </a:spcAft>
+            </a:pPr>
+            <a:r>
+              <a:rPr sz="1250" b="0">
+                <a:solidFill>
+                  <a:srgbClr val="6E6E6E"/>
+                </a:solidFill>
+                <a:latin typeface="Arial"/>
+              </a:rPr>
+              <a:t>An instrument-error sandbox where truth is exact and every systematic prints</a:t>
+            </a:r>
+          </a:p>
+        </p:txBody>
+      </p:sp>
+      <p:sp>
+        <p:nvSpPr>
+          <p:cNvPr id="3" name="Rectangle 2"/>
+          <p:cNvSpPr/>
+          <p:nvPr/>
+        </p:nvSpPr>
+        <p:spPr>
+          <a:xfrm>
+            <a:off x="411480" y="1133856"/>
+            <a:ext cx="11368735" cy="20320"/>
+          </a:xfrm>
+          <a:prstGeom prst="rect">
+            <a:avLst/>
+          </a:prstGeom>
+          <a:solidFill>
+            <a:srgbClr val="B8C6D4"/>
+          </a:solidFill>
+          <a:ln>
+            <a:noFill/>
+          </a:ln>
+          <a:effectLst/>
+        </p:spPr>
+        <p:style>
+          <a:lnRef idx="1">
+            <a:schemeClr val="accent1"/>
+          </a:lnRef>
+          <a:fillRef idx="3">
+            <a:schemeClr val="accent1"/>
+          </a:fillRef>
+          <a:effectRef idx="2">
+            <a:schemeClr val="accent1"/>
+          </a:effectRef>
+          <a:fontRef idx="minor">
+            <a:schemeClr val="lt1"/>
+          </a:fontRef>
+        </p:style>
+        <p:txBody>
+          <a:bodyPr rtlCol="0" anchor="ctr"/>
+          <a:lstStyle/>
+          <a:p>
+            <a:pPr algn="ctr"/>
+          </a:p>
+        </p:txBody>
+      </p:sp>
+      <p:sp>
+        <p:nvSpPr>
+          <p:cNvPr id="4" name="TextBox 3"/>
+          <p:cNvSpPr txBox="1"/>
+          <p:nvPr/>
+        </p:nvSpPr>
+        <p:spPr>
+          <a:xfrm>
+            <a:off x="411480" y="1298448"/>
+            <a:ext cx="11368735" cy="274320"/>
+          </a:xfrm>
+          <a:prstGeom prst="rect">
+            <a:avLst/>
+          </a:prstGeom>
+          <a:noFill/>
+        </p:spPr>
+        <p:txBody>
+          <a:bodyPr wrap="square">
+            <a:spAutoFit/>
+          </a:bodyPr>
+          <a:lstStyle/>
+          <a:p>
+            <a:pPr>
+              <a:spcAft>
+                <a:spcPts val="600"/>
+              </a:spcAft>
+            </a:pPr>
+            <a:r>
+              <a:rPr sz="1500" b="0">
+                <a:solidFill>
+                  <a:srgbClr val="282828"/>
+                </a:solidFill>
+                <a:latin typeface="Arial"/>
+              </a:rPr>
+              <a:t>•  Catch the invisible class before hardware does: the plate rig's 11.7% scale error moved contrast 0.17% — found on first closure in the model, because the model has the truth panel a bench lacks.</a:t>
+            </a:r>
+          </a:p>
+          <a:p>
+            <a:pPr>
+              <a:spcAft>
+                <a:spcPts val="600"/>
+              </a:spcAft>
+            </a:pPr>
+            <a:r>
+              <a:rPr sz="1500" b="0">
+                <a:solidFill>
+                  <a:srgbClr val="282828"/>
+                </a:solidFill>
+                <a:latin typeface="Arial"/>
+              </a:rPr>
+              <a:t>•  Price hardware choices in instrument terms: the three-option table is the pattern — splitter angle, cube against plate, waveplate tolerances, coating terminations, analyzer options (rotating or pixelated) all price the same way.</a:t>
+            </a:r>
+          </a:p>
+          <a:p>
+            <a:pPr>
+              <a:spcAft>
+                <a:spcPts val="600"/>
+              </a:spcAft>
+            </a:pPr>
+            <a:r>
+              <a:rPr sz="1500" b="0">
+                <a:solidFill>
+                  <a:srgbClr val="282828"/>
+                </a:solidFill>
+                <a:latin typeface="Arial"/>
+              </a:rPr>
+              <a:t>•  Rehearse calibration protocols: the low-order and actuator-scale calibrations are scripts; a planned bench protocol can run against the model first, with injected errors of chosen size.</a:t>
+            </a:r>
+          </a:p>
+          <a:p>
+            <a:pPr>
+              <a:spcAft>
+                <a:spcPts val="600"/>
+              </a:spcAft>
+            </a:pPr>
+            <a:r>
+              <a:rPr sz="1500" b="0">
+                <a:solidFill>
+                  <a:srgbClr val="282828"/>
+                </a:solidFill>
+                <a:latin typeface="Arial"/>
+              </a:rPr>
+              <a:t>•  What the model does not yet carry: source noise, detector noise, vibration and drift — the idealized gauge is the systematic-error floor, not a bench prediction.  Adding measured-class realism is the natural next step, sized to a use case.</a:t>
+            </a:r>
+          </a:p>
+        </p:txBody>
+      </p:sp>
+      <p:sp>
+        <p:nvSpPr>
+          <p:cNvPr id="5" name="TextBox 4"/>
+          <p:cNvSpPr txBox="1"/>
+          <p:nvPr/>
+        </p:nvSpPr>
+        <p:spPr>
+          <a:xfrm>
+            <a:off x="411480" y="4124706"/>
+            <a:ext cx="11368735" cy="274320"/>
+          </a:xfrm>
+          <a:prstGeom prst="rect">
+            <a:avLst/>
+          </a:prstGeom>
+          <a:noFill/>
+        </p:spPr>
+        <p:txBody>
+          <a:bodyPr wrap="square">
+            <a:spAutoFit/>
+          </a:bodyPr>
+          <a:lstStyle/>
+          <a:p>
+            <a:pPr>
+              <a:spcAft>
+                <a:spcPts val="600"/>
+              </a:spcAft>
+            </a:pPr>
+            <a:r>
+              <a:rPr sz="1050" b="0">
+                <a:solidFill>
+                  <a:srgbClr val="6E6E6E"/>
+                </a:solidFill>
+                <a:latin typeface="Arial"/>
+              </a:rPr>
+              <a:t>All records, checks and figures are committed and re-runnable; the full demonstration runs in under a minute of compute.</a:t>
+            </a:r>
+          </a:p>
+        </p:txBody>
+      </p:sp>
+    </p:spTree>
+  </p:cSld>
+  <p:clrMapOvr>
+    <a:masterClrMapping/>
+  </p:clrMapOvr>
+</p:sld>
+</file>
+
+<file path=ppt/slides/slide21.xml><?xml version="1.0" encoding="utf-8"?>
+<p:sld xmlns:a="http://schemas.openxmlformats.org/drawingml/2006/main" xmlns:p="http://schemas.openxmlformats.org/presentationml/2006/main" xmlns:r="http://schemas.openxmlformats.org/officeDocument/2006/relationships">
+  <p:cSld>
+    <p:spTree>
+      <p:nvGrpSpPr>
+        <p:cNvPr id="1" name=""/>
+        <p:cNvGrpSpPr/>
+        <p:nvPr/>
+      </p:nvGrpSpPr>
+      <p:grpSpPr/>
+      <p:sp>
+        <p:nvSpPr>
+          <p:cNvPr id="2" name="TextBox 1"/>
+          <p:cNvSpPr txBox="1"/>
+          <p:nvPr/>
+        </p:nvSpPr>
+        <p:spPr>
+          <a:xfrm>
+            <a:off x="822960" y="2743200"/>
+            <a:ext cx="10545775" cy="1280160"/>
+          </a:xfrm>
+          <a:prstGeom prst="rect">
+            <a:avLst/>
+          </a:prstGeom>
+          <a:noFill/>
+        </p:spPr>
+        <p:txBody>
+          <a:bodyPr wrap="square">
+            <a:spAutoFit/>
+          </a:bodyPr>
+          <a:lstStyle/>
+          <a:p>
+            <a:pPr algn="ctr">
+              <a:spcAft>
+                <a:spcPts val="400"/>
+              </a:spcAft>
+            </a:pPr>
+            <a:r>
+              <a:rPr sz="4000" b="1">
+                <a:solidFill>
+                  <a:srgbClr val="1F4E79"/>
+                </a:solidFill>
+                <a:latin typeface="Arial"/>
+              </a:rPr>
+              <a:t>Backup</a:t>
+            </a:r>
+          </a:p>
+        </p:txBody>
+      </p:sp>
+    </p:spTree>
+  </p:cSld>
+  <p:clrMapOvr>
+    <a:masterClrMapping/>
+  </p:clrMapOvr>
+</p:sld>
+</file>
+
+<file path=ppt/slides/slide22.xml><?xml version="1.0" encoding="utf-8"?>
+<p:sld xmlns:a="http://schemas.openxmlformats.org/drawingml/2006/main" xmlns:p="http://schemas.openxmlformats.org/presentationml/2006/main" xmlns:r="http://schemas.openxmlformats.org/officeDocument/2006/relationships">
+  <p:cSld>
+    <p:spTree>
+      <p:nvGrpSpPr>
+        <p:cNvPr id="1" name=""/>
+        <p:cNvGrpSpPr/>
+        <p:nvPr/>
+      </p:nvGrpSpPr>
+      <p:grpSpPr/>
+      <p:sp>
+        <p:nvSpPr>
+          <p:cNvPr id="2" name="TextBox 1"/>
+          <p:cNvSpPr txBox="1"/>
+          <p:nvPr/>
+        </p:nvSpPr>
+        <p:spPr>
+          <a:xfrm>
+            <a:off x="411480" y="201168"/>
+            <a:ext cx="11368735" cy="914400"/>
+          </a:xfrm>
+          <a:prstGeom prst="rect">
+            <a:avLst/>
+          </a:prstGeom>
+          <a:noFill/>
+        </p:spPr>
+        <p:txBody>
+          <a:bodyPr wrap="square">
+            <a:spAutoFit/>
+          </a:bodyPr>
+          <a:lstStyle/>
+          <a:p>
+            <a:pPr>
+              <a:spcAft>
+                <a:spcPts val="400"/>
+              </a:spcAft>
+            </a:pPr>
+            <a:r>
+              <a:rPr sz="2400" b="1">
+                <a:solidFill>
+                  <a:srgbClr val="1F4E79"/>
+                </a:solidFill>
+                <a:latin typeface="Arial"/>
+              </a:rPr>
+              <a:t>Provenance and records</a:t>
+            </a:r>
+          </a:p>
+          <a:p>
+            <a:pPr>
+              <a:spcAft>
+                <a:spcPts val="0"/>
+              </a:spcAft>
+            </a:pPr>
+            <a:r>
+              <a:rPr sz="1250" b="0">
+                <a:solidFill>
+                  <a:srgbClr val="6E6E6E"/>
+                </a:solidFill>
+                <a:latin typeface="Arial"/>
+              </a:rPr>
+              <a:t>Every number re-derives from a committed script</a:t>
+            </a:r>
+          </a:p>
+        </p:txBody>
+      </p:sp>
+      <p:sp>
+        <p:nvSpPr>
+          <p:cNvPr id="3" name="Rectangle 2"/>
+          <p:cNvSpPr/>
+          <p:nvPr/>
+        </p:nvSpPr>
+        <p:spPr>
+          <a:xfrm>
+            <a:off x="411480" y="1133856"/>
+            <a:ext cx="11368735" cy="20320"/>
+          </a:xfrm>
+          <a:prstGeom prst="rect">
+            <a:avLst/>
+          </a:prstGeom>
+          <a:solidFill>
+            <a:srgbClr val="B8C6D4"/>
+          </a:solidFill>
+          <a:ln>
+            <a:noFill/>
+          </a:ln>
+          <a:effectLst/>
+        </p:spPr>
+        <p:style>
+          <a:lnRef idx="1">
+            <a:schemeClr val="accent1"/>
+          </a:lnRef>
+          <a:fillRef idx="3">
+            <a:schemeClr val="accent1"/>
+          </a:fillRef>
+          <a:effectRef idx="2">
+            <a:schemeClr val="accent1"/>
+          </a:effectRef>
+          <a:fontRef idx="minor">
+            <a:schemeClr val="lt1"/>
+          </a:fontRef>
+        </p:style>
+        <p:txBody>
+          <a:bodyPr rtlCol="0" anchor="ctr"/>
+          <a:lstStyle/>
+          <a:p>
+            <a:pPr algn="ctr"/>
+          </a:p>
+        </p:txBody>
+      </p:sp>
+      <p:sp>
+        <p:nvSpPr>
+          <p:cNvPr id="4" name="TextBox 3"/>
+          <p:cNvSpPr txBox="1"/>
+          <p:nvPr/>
+        </p:nvSpPr>
+        <p:spPr>
+          <a:xfrm>
+            <a:off x="411480" y="1298448"/>
+            <a:ext cx="11368735" cy="274320"/>
+          </a:xfrm>
+          <a:prstGeom prst="rect">
+            <a:avLst/>
+          </a:prstGeom>
+          <a:noFill/>
+        </p:spPr>
+        <p:txBody>
+          <a:bodyPr wrap="square">
+            <a:spAutoFit/>
+          </a:bodyPr>
+          <a:lstStyle/>
+          <a:p>
+            <a:pPr>
+              <a:spcAft>
+                <a:spcPts val="600"/>
+              </a:spcAft>
+            </a:pPr>
+            <a:r>
+              <a:rPr sz="1500" b="0">
+                <a:solidFill>
+                  <a:srgbClr val="282828"/>
+                </a:solidFill>
+                <a:latin typeface="Arial"/>
+              </a:rPr>
+              <a:t>•  v1 rig, finding and fix: templates/90_polarization/tg_psi_dm — example_tg_psi_dm.m (5 gates + closure), demo_tg_psi.m, README with the topology trade; tg_aoi_ladder.m = the option-3 angle ladder (this deck).</a:t>
+            </a:r>
+          </a:p>
+          <a:p>
+            <a:pPr>
+              <a:spcAft>
+                <a:spcPts val="600"/>
+              </a:spcAft>
+            </a:pPr>
+            <a:r>
+              <a:rPr sz="1500" b="0">
+                <a:solidFill>
+                  <a:srgbClr val="282828"/>
+                </a:solidFill>
+                <a:latin typeface="Arial"/>
+              </a:rPr>
+              <a:t>•  v2 cube: templates/90_polarization/tg_psi_dm_v2 — pbs_macneille.m + thinfilm_rt.m (textbook thin-film reference, general incident medium), example, demo_tg_psi_v2.m (8 beats), tg_widen.m (actuator-scale calibration).</a:t>
+            </a:r>
+          </a:p>
+          <a:p>
+            <a:pPr>
+              <a:spcAft>
+                <a:spcPts val="600"/>
+              </a:spcAft>
+            </a:pPr>
+            <a:r>
+              <a:rPr sz="1500" b="0">
+                <a:solidFill>
+                  <a:srgbClr val="282828"/>
+                </a:solidFill>
+                <a:latin typeface="Arial"/>
+              </a:rPr>
+              <a:t>•  96×96 realization: templates/40_benches/tg_psi_dm96 — tg96.m (clearance solve, sampling budget, build, battery, response curve, differential test), tg96_tail.m (detector-leg re-optimization: null 9.11 → 0.134 nm, found at reduced resolution, verified at full), tg96_report.txt (all numbers on the 96×96 slides), plus the preserved registration failure series (six reports).</a:t>
+            </a:r>
+          </a:p>
+          <a:p>
+            <a:pPr>
+              <a:spcAft>
+                <a:spcPts val="600"/>
+              </a:spcAft>
+            </a:pPr>
+            <a:r>
+              <a:rPr sz="1500" b="0">
+                <a:solidFill>
+                  <a:srgbClr val="282828"/>
+                </a:solidFill>
+                <a:latin typeface="Arial"/>
+              </a:rPr>
+              <a:t>•  Regression: tTgPol (9 checks) + tTgPol2 (9 checks) in the fast suite; the polarizing option's off-state is bit-identical to the plain Twyman–Green.</a:t>
+            </a:r>
+          </a:p>
+          <a:p>
+            <a:pPr>
+              <a:spcAft>
+                <a:spcPts val="600"/>
+              </a:spcAft>
+            </a:pPr>
+            <a:r>
+              <a:rPr sz="1500" b="0">
+                <a:solidFill>
+                  <a:srgbClr val="282828"/>
+                </a:solidFill>
+                <a:latin typeface="Arial"/>
+              </a:rPr>
+              <a:t>•  Traps recorded so they are not re-derived: a circular state is analyzer-invariant in power (single-arm tripwires pass vacuously on the aligned rig); the four-step protocol's 4θ term is real at the detector (8.9×10⁻⁴ of the fringe) and cancels in the differential protocol (1.7×10⁻¹⁴ nm); diffraction-array row/column parity is calibrated on one actuator and verified on a second, never hard-coded.</a:t>
+            </a:r>
+          </a:p>
+          <a:p>
+            <a:pPr>
+              <a:spcAft>
+                <a:spcPts val="600"/>
+              </a:spcAft>
+            </a:pPr>
+            <a:r>
+              <a:rPr sz="1500" b="0">
+                <a:solidFill>
+                  <a:srgbClr val="282828"/>
+                </a:solidFill>
+                <a:latin typeface="Arial"/>
+              </a:rPr>
+              <a:t>•  Option-3 open items: joint detector-leg optimization (null + pupil-image sharpness + distortion together — the current leg tuned for null alone gave up finest-pattern gain 0.84 → 0.50), response-curve-corrected scoring of the differential residuals, decomposition of the sub-1% shallow-angle residuals (rig geometry against polarization), and a real splitter-coating design at shallow incidence.</a:t>
+            </a:r>
+          </a:p>
+          <a:p>
+            <a:pPr>
+              <a:spcAft>
+                <a:spcPts val="600"/>
+              </a:spcAft>
+            </a:pPr>
+            <a:r>
+              <a:rPr sz="1500" b="0">
+                <a:solidFill>
+                  <a:srgbClr val="282828"/>
+                </a:solidFill>
+                <a:latin typeface="Arial"/>
+              </a:rPr>
+              <a:t>•  Head-to-head campaign records (both instruments, one scoring library): templates/40_benches/dm_gauge_lib (registration / actuator fit / modal correction / both measurement factories; the two S3 batteries re-run identically through it as the equivalence gate) + tg_psi_dm96 and zwfs_dm96 stage reports S2–S5 (registration and kernel calibration, modal battery, differential head-to-head with break scale, photon-noise pricing).  Campaign READMEs carry the findings ledgers, including the corrected attributions (pattern-radius frame bias; the refuted sampling-starvation hypothesis).</a:t>
+            </a:r>
+          </a:p>
+          <a:p>
+            <a:pPr>
+              <a:spcAft>
+                <a:spcPts val="600"/>
+              </a:spcAft>
+            </a:pPr>
+            <a:r>
+              <a:rPr sz="1500" b="0">
+                <a:solidFill>
+                  <a:srgbClr val="282828"/>
+                </a:solidFill>
+                <a:latin typeface="Arial"/>
+              </a:rPr>
+              <a:t>•  Planned configurations on the same DM truth and battery: an all-reflective variant (off-axis paraboloids replace the lenses — removes the transmitted-glass and homogeneity cost rows entirely) and the phase-2 vector Zernike sensor (polarizing metasurface, two phase images).</a:t>
             </a:r>
           </a:p>
         </p:txBody>

--- a/demo_session/deck_tg_fang.pptx
+++ b/demo_session/deck_tg_fang.pptx
@@ -27,6 +27,7 @@
     <p:sldId id="275" r:id="rId26"/>
     <p:sldId id="276" r:id="rId27"/>
     <p:sldId id="277" r:id="rId28"/>
+    <p:sldId id="278" r:id="rId29"/>
   </p:sldIdLst>
   <p:sldSz cx="12191695" cy="6858000" type="screen4x3"/>
   <p:notesSz cx="6858000" cy="9144000"/>
@@ -6673,7 +6674,7 @@
                 </a:solidFill>
                 <a:latin typeface="Arial"/>
               </a:rPr>
-              <a:t>•  The mask is a complex transmission applied to the propagated field at focus — not a phase screen on rays: 346.2 nm etch in fused silica (π/2 at 632.8 nm, the VSG2 hardware value), gray-edge supersampled disk, diameter 2.0 λ/D as used (1.06 λ/D — the hardware spot — sign-inverts the fine-actuator band; the spot is a band-select lever we measured, not a free parameter).</a:t>
+              <a:t>•  The mask is a complex transmission applied to the propagated field at focus — not a phase screen on rays: 346.2 nm etch in fused silica (π/2 at 632.8 nm, the VSG2 hardware value), gray-edge supersampled disk, diameter 2.0 λ/D as used (1.06 λ/D — the hardware spot — sign-inverts the fine-actuator band; the spot is a band-select lever we measured, not a free parameter); the mask is fixed glass, so its phase and λ/D diameter scale with wavelength — the multi-color slide.</a:t>
             </a:r>
           </a:p>
           <a:p>
@@ -7656,7 +7657,7 @@
                 </a:solidFill>
                 <a:latin typeface="Arial"/>
               </a:rPr>
-              <a:t>What this offers a bench program</a:t>
+              <a:t>Color moves the sensor's blind bands, not the interferometer's</a:t>
             </a:r>
           </a:p>
           <a:p>
@@ -7672,7 +7673,7 @@
                 </a:solidFill>
                 <a:latin typeface="Arial"/>
               </a:rPr>
-              <a:t>An instrument-error sandbox where truth is exact and every systematic prints</a:t>
+              <a:t>Five colors, 480–780 nm, lift the sensor's floors 3–4× and halve its dense-random error; every interferometer number holds to three digits</a:t>
             </a:r>
           </a:p>
         </p:txBody>
@@ -7721,16 +7722,40 @@
           </a:p>
         </p:txBody>
       </p:sp>
-      <p:sp>
-        <p:nvSpPr>
-          <p:cNvPr id="4" name="TextBox 3"/>
+      <p:pic>
+        <p:nvPicPr>
+          <p:cNvPr id="4" name="Picture 3" descr="crop_zwfs_s6color_zwfs.png"/>
+          <p:cNvPicPr>
+            <a:picLocks noChangeAspect="1"/>
+          </p:cNvPicPr>
+          <p:nvPr/>
+        </p:nvPicPr>
+        <p:blipFill>
+          <a:blip r:embed="rId2"/>
+          <a:stretch>
+            <a:fillRect/>
+          </a:stretch>
+        </p:blipFill>
+        <p:spPr>
+          <a:xfrm>
+            <a:off x="1826947" y="1298448"/>
+            <a:ext cx="2975504" cy="2531872"/>
+          </a:xfrm>
+          <a:prstGeom prst="rect">
+            <a:avLst/>
+          </a:prstGeom>
+        </p:spPr>
+      </p:pic>
+      <p:sp>
+        <p:nvSpPr>
+          <p:cNvPr id="5" name="TextBox 4"/>
           <p:cNvSpPr txBox="1"/>
           <p:nvPr/>
         </p:nvSpPr>
         <p:spPr>
           <a:xfrm>
-            <a:off x="411480" y="1298448"/>
-            <a:ext cx="11368735" cy="274320"/>
+            <a:off x="411480" y="3848608"/>
+            <a:ext cx="5806440" cy="394208"/>
           </a:xfrm>
           <a:prstGeom prst="rect">
             <a:avLst/>
@@ -7743,81 +7768,57 @@
           </a:bodyPr>
           <a:lstStyle/>
           <a:p>
-            <a:pPr>
-              <a:spcAft>
-                <a:spcPts val="600"/>
-              </a:spcAft>
-            </a:pPr>
-            <a:r>
-              <a:rPr sz="1500" b="0">
-                <a:solidFill>
-                  <a:srgbClr val="282828"/>
-                </a:solidFill>
-                <a:latin typeface="Arial"/>
-              </a:rPr>
-              <a:t>•  Catch the invisible class before hardware does: the plate rig's 11.7% scale error moved contrast 0.17% — found on first closure in the model, because the model has the truth panel a bench lacks.</a:t>
-            </a:r>
-          </a:p>
-          <a:p>
-            <a:pPr>
-              <a:spcAft>
-                <a:spcPts val="600"/>
-              </a:spcAft>
-            </a:pPr>
-            <a:r>
-              <a:rPr sz="1500" b="0">
-                <a:solidFill>
-                  <a:srgbClr val="282828"/>
-                </a:solidFill>
-                <a:latin typeface="Arial"/>
-              </a:rPr>
-              <a:t>•  Price hardware choices in instrument terms: the three-option table is the pattern — splitter angle, cube against plate, waveplate tolerances, coating terminations, analyzer options (rotating or pixelated) all price the same way.</a:t>
-            </a:r>
-          </a:p>
-          <a:p>
-            <a:pPr>
-              <a:spcAft>
-                <a:spcPts val="600"/>
-              </a:spcAft>
-            </a:pPr>
-            <a:r>
-              <a:rPr sz="1500" b="0">
-                <a:solidFill>
-                  <a:srgbClr val="282828"/>
-                </a:solidFill>
-                <a:latin typeface="Arial"/>
-              </a:rPr>
-              <a:t>•  Rehearse calibration protocols: the low-order and actuator-scale calibrations are scripts; a planned bench protocol can run against the model first, with injected errors of chosen size.</a:t>
-            </a:r>
-          </a:p>
-          <a:p>
-            <a:pPr>
-              <a:spcAft>
-                <a:spcPts val="600"/>
-              </a:spcAft>
-            </a:pPr>
-            <a:r>
-              <a:rPr sz="1500" b="0">
-                <a:solidFill>
-                  <a:srgbClr val="282828"/>
-                </a:solidFill>
-                <a:latin typeface="Arial"/>
-              </a:rPr>
-              <a:t>•  What the model does not yet carry: source noise, detector noise, vibration and drift — the idealized gauge is the systematic-error floor, not a bench prediction.  Adding measured-class realism is the natural next step, sized to a use case.</a:t>
-            </a:r>
-          </a:p>
-        </p:txBody>
-      </p:sp>
-      <p:sp>
-        <p:nvSpPr>
-          <p:cNvPr id="5" name="TextBox 4"/>
+            <a:pPr algn="ctr">
+              <a:spcAft>
+                <a:spcPts val="0"/>
+              </a:spcAft>
+            </a:pPr>
+            <a:r>
+              <a:rPr sz="1000" b="0">
+                <a:solidFill>
+                  <a:srgbClr val="6E6E6E"/>
+                </a:solidFill>
+                <a:latin typeface="Arial"/>
+              </a:rPr>
+              <a:t>Zernike sensor: the transfer null near 30 cycles/pupil at 632.8 nm sits at 40 cycles at 480 nm and at 20 at 780 nm; the five-color combination (black) stays above 0.99.</a:t>
+            </a:r>
+          </a:p>
+        </p:txBody>
+      </p:sp>
+      <p:pic>
+        <p:nvPicPr>
+          <p:cNvPr id="6" name="Picture 5" descr="crop_zwfs_s6color_ifo.png"/>
+          <p:cNvPicPr>
+            <a:picLocks noChangeAspect="1"/>
+          </p:cNvPicPr>
+          <p:nvPr/>
+        </p:nvPicPr>
+        <p:blipFill>
+          <a:blip r:embed="rId3"/>
+          <a:stretch>
+            <a:fillRect/>
+          </a:stretch>
+        </p:blipFill>
+        <p:spPr>
+          <a:xfrm>
+            <a:off x="7618449" y="1298448"/>
+            <a:ext cx="2959660" cy="2531872"/>
+          </a:xfrm>
+          <a:prstGeom prst="rect">
+            <a:avLst/>
+          </a:prstGeom>
+        </p:spPr>
+      </p:pic>
+      <p:sp>
+        <p:nvSpPr>
+          <p:cNvPr id="7" name="TextBox 6"/>
           <p:cNvSpPr txBox="1"/>
           <p:nvPr/>
         </p:nvSpPr>
         <p:spPr>
           <a:xfrm>
-            <a:off x="411480" y="4124706"/>
-            <a:ext cx="11368735" cy="274320"/>
+            <a:off x="6400800" y="3848608"/>
+            <a:ext cx="5394960" cy="394208"/>
           </a:xfrm>
           <a:prstGeom prst="rect">
             <a:avLst/>
@@ -7830,19 +7831,113 @@
           </a:bodyPr>
           <a:lstStyle/>
           <a:p>
+            <a:pPr algn="ctr">
+              <a:spcAft>
+                <a:spcPts val="0"/>
+              </a:spcAft>
+            </a:pPr>
+            <a:r>
+              <a:rPr sz="1000" b="0">
+                <a:solidFill>
+                  <a:srgbClr val="6E6E6E"/>
+                </a:solidFill>
+                <a:latin typeface="Arial"/>
+              </a:rPr>
+              <a:t>Interferometer: the five colors coincide (spread 0.004 in gain) — the roll-off is not diffraction.</a:t>
+            </a:r>
+          </a:p>
+        </p:txBody>
+      </p:sp>
+      <p:sp>
+        <p:nvSpPr>
+          <p:cNvPr id="8" name="TextBox 7"/>
+          <p:cNvSpPr txBox="1"/>
+          <p:nvPr/>
+        </p:nvSpPr>
+        <p:spPr>
+          <a:xfrm>
+            <a:off x="411480" y="4279392"/>
+            <a:ext cx="11368735" cy="274320"/>
+          </a:xfrm>
+          <a:prstGeom prst="rect">
+            <a:avLst/>
+          </a:prstGeom>
+          <a:noFill/>
+        </p:spPr>
+        <p:txBody>
+          <a:bodyPr wrap="square">
+            <a:spAutoFit/>
+          </a:bodyPr>
+          <a:lstStyle/>
+          <a:p>
             <a:pPr>
               <a:spcAft>
                 <a:spcPts val="600"/>
               </a:spcAft>
             </a:pPr>
             <a:r>
+              <a:rPr sz="1500" b="0">
+                <a:solidFill>
+                  <a:srgbClr val="282828"/>
+                </a:solidFill>
+                <a:latin typeface="Arial"/>
+              </a:rPr>
+              <a:t>•  Sensor: the dimple is fixed glass — its phase and λ/D size scale with wavelength, so no two colors are blind at the same frequency, and a multi-channel Wiener estimate on the actuator lattice carries each mode with the colors that see it.  On the 30 nm working surface: single-actuator floor 720 → 224 pm (SNR 9 → 35), dense random 16.4 → 7.2 nm; the undetected grid case (47 actuators at 1 nm) rises from SNR 1.5 to 3.4 — still short of 5.</a:t>
+            </a:r>
+          </a:p>
+          <a:p>
+            <a:pPr>
+              <a:spcAft>
+                <a:spcPts val="600"/>
+              </a:spcAft>
+            </a:pPr>
+            <a:r>
+              <a:rPr sz="1500" b="0">
+                <a:solidFill>
+                  <a:srgbClr val="282828"/>
+                </a:solidFill>
+                <a:latin typeface="Arial"/>
+              </a:rPr>
+              <a:t>•  Interferometer: 92 pm hold-out, 4.17 nm dense random, SNR 210 at every color and after combination.  A diffraction roll-off would have moved 1.6× across this band; it moved under 0.3%: the loss is geometric (the null-tuned detector leg's conjugate and 0.14 mm of warp), so the joint leg optimization is the lever, not the source.</a:t>
+            </a:r>
+          </a:p>
+        </p:txBody>
+      </p:sp>
+      <p:sp>
+        <p:nvSpPr>
+          <p:cNvPr id="9" name="TextBox 8"/>
+          <p:cNvSpPr txBox="1"/>
+          <p:nvPr/>
+        </p:nvSpPr>
+        <p:spPr>
+          <a:xfrm>
+            <a:off x="411480" y="6329933"/>
+            <a:ext cx="11368735" cy="274320"/>
+          </a:xfrm>
+          <a:prstGeom prst="rect">
+            <a:avLst/>
+          </a:prstGeom>
+          <a:noFill/>
+        </p:spPr>
+        <p:txBody>
+          <a:bodyPr wrap="square">
+            <a:spAutoFit/>
+          </a:bodyPr>
+          <a:lstStyle/>
+          <a:p>
+            <a:pPr>
+              <a:spcAft>
+                <a:spcPts val="600"/>
+              </a:spcAft>
+            </a:pPr>
+            <a:r>
               <a:rPr sz="1050" b="0">
                 <a:solidFill>
                   <a:srgbClr val="6E6E6E"/>
                 </a:solidFill>
                 <a:latin typeface="Arial"/>
               </a:rPr>
-              <a:t>All records, checks and figures are committed and re-runnable; the full demonstration runs in under a minute of compute.</a:t>
+              <a:t>One physical mask (346.2 nm etch, dispersion-corrected index), every calibration redone per color; achromatic quarter-wave plates and dispersionless lenses assumed; noiseless — K colors cost K× the frames.  Records: zwfs_s6color_report.txt, tg96_s6color_report.txt (96×96).</a:t>
             </a:r>
           </a:p>
         </p:txBody>
@@ -7873,8 +7968,8 @@
         </p:nvSpPr>
         <p:spPr>
           <a:xfrm>
-            <a:off x="822960" y="2743200"/>
-            <a:ext cx="10545775" cy="1280160"/>
+            <a:off x="411480" y="201168"/>
+            <a:ext cx="11368735" cy="914400"/>
           </a:xfrm>
           <a:prstGeom prst="rect">
             <a:avLst/>
@@ -7887,19 +7982,205 @@
           </a:bodyPr>
           <a:lstStyle/>
           <a:p>
-            <a:pPr algn="ctr">
+            <a:pPr>
               <a:spcAft>
                 <a:spcPts val="400"/>
               </a:spcAft>
             </a:pPr>
             <a:r>
-              <a:rPr sz="4000" b="1">
+              <a:rPr sz="2400" b="1">
                 <a:solidFill>
                   <a:srgbClr val="1F4E79"/>
                 </a:solidFill>
                 <a:latin typeface="Arial"/>
               </a:rPr>
-              <a:t>Backup</a:t>
+              <a:t>What this offers a bench program</a:t>
+            </a:r>
+          </a:p>
+          <a:p>
+            <a:pPr>
+              <a:spcAft>
+                <a:spcPts val="0"/>
+              </a:spcAft>
+            </a:pPr>
+            <a:r>
+              <a:rPr sz="1250" b="0">
+                <a:solidFill>
+                  <a:srgbClr val="6E6E6E"/>
+                </a:solidFill>
+                <a:latin typeface="Arial"/>
+              </a:rPr>
+              <a:t>An instrument-error sandbox where truth is exact and every systematic prints</a:t>
+            </a:r>
+          </a:p>
+        </p:txBody>
+      </p:sp>
+      <p:sp>
+        <p:nvSpPr>
+          <p:cNvPr id="3" name="Rectangle 2"/>
+          <p:cNvSpPr/>
+          <p:nvPr/>
+        </p:nvSpPr>
+        <p:spPr>
+          <a:xfrm>
+            <a:off x="411480" y="1133856"/>
+            <a:ext cx="11368735" cy="20320"/>
+          </a:xfrm>
+          <a:prstGeom prst="rect">
+            <a:avLst/>
+          </a:prstGeom>
+          <a:solidFill>
+            <a:srgbClr val="B8C6D4"/>
+          </a:solidFill>
+          <a:ln>
+            <a:noFill/>
+          </a:ln>
+          <a:effectLst/>
+        </p:spPr>
+        <p:style>
+          <a:lnRef idx="1">
+            <a:schemeClr val="accent1"/>
+          </a:lnRef>
+          <a:fillRef idx="3">
+            <a:schemeClr val="accent1"/>
+          </a:fillRef>
+          <a:effectRef idx="2">
+            <a:schemeClr val="accent1"/>
+          </a:effectRef>
+          <a:fontRef idx="minor">
+            <a:schemeClr val="lt1"/>
+          </a:fontRef>
+        </p:style>
+        <p:txBody>
+          <a:bodyPr rtlCol="0" anchor="ctr"/>
+          <a:lstStyle/>
+          <a:p>
+            <a:pPr algn="ctr"/>
+          </a:p>
+        </p:txBody>
+      </p:sp>
+      <p:sp>
+        <p:nvSpPr>
+          <p:cNvPr id="4" name="TextBox 3"/>
+          <p:cNvSpPr txBox="1"/>
+          <p:nvPr/>
+        </p:nvSpPr>
+        <p:spPr>
+          <a:xfrm>
+            <a:off x="411480" y="1298448"/>
+            <a:ext cx="11368735" cy="274320"/>
+          </a:xfrm>
+          <a:prstGeom prst="rect">
+            <a:avLst/>
+          </a:prstGeom>
+          <a:noFill/>
+        </p:spPr>
+        <p:txBody>
+          <a:bodyPr wrap="square">
+            <a:spAutoFit/>
+          </a:bodyPr>
+          <a:lstStyle/>
+          <a:p>
+            <a:pPr>
+              <a:spcAft>
+                <a:spcPts val="600"/>
+              </a:spcAft>
+            </a:pPr>
+            <a:r>
+              <a:rPr sz="1500" b="0">
+                <a:solidFill>
+                  <a:srgbClr val="282828"/>
+                </a:solidFill>
+                <a:latin typeface="Arial"/>
+              </a:rPr>
+              <a:t>•  Catch the invisible class before hardware does: the plate rig's 11.7% scale error moved contrast 0.17% — found on first closure in the model, because the model has the truth panel a bench lacks.</a:t>
+            </a:r>
+          </a:p>
+          <a:p>
+            <a:pPr>
+              <a:spcAft>
+                <a:spcPts val="600"/>
+              </a:spcAft>
+            </a:pPr>
+            <a:r>
+              <a:rPr sz="1500" b="0">
+                <a:solidFill>
+                  <a:srgbClr val="282828"/>
+                </a:solidFill>
+                <a:latin typeface="Arial"/>
+              </a:rPr>
+              <a:t>•  Price hardware choices in instrument terms: the three-option table is the pattern — splitter angle, cube against plate, waveplate tolerances, coating terminations, analyzer options (rotating or pixelated) all price the same way.</a:t>
+            </a:r>
+          </a:p>
+          <a:p>
+            <a:pPr>
+              <a:spcAft>
+                <a:spcPts val="600"/>
+              </a:spcAft>
+            </a:pPr>
+            <a:r>
+              <a:rPr sz="1500" b="0">
+                <a:solidFill>
+                  <a:srgbClr val="282828"/>
+                </a:solidFill>
+                <a:latin typeface="Arial"/>
+              </a:rPr>
+              <a:t>•  Rehearse calibration protocols: the low-order and actuator-scale calibrations are scripts; a planned bench protocol can run against the model first, with injected errors of chosen size.</a:t>
+            </a:r>
+          </a:p>
+          <a:p>
+            <a:pPr>
+              <a:spcAft>
+                <a:spcPts val="600"/>
+              </a:spcAft>
+            </a:pPr>
+            <a:r>
+              <a:rPr sz="1500" b="0">
+                <a:solidFill>
+                  <a:srgbClr val="282828"/>
+                </a:solidFill>
+                <a:latin typeface="Arial"/>
+              </a:rPr>
+              <a:t>•  What the model does not yet carry: source noise, detector noise, vibration and drift — the idealized gauge is the systematic-error floor, not a bench prediction.  Adding measured-class realism is the natural next step, sized to a use case.</a:t>
+            </a:r>
+          </a:p>
+        </p:txBody>
+      </p:sp>
+      <p:sp>
+        <p:nvSpPr>
+          <p:cNvPr id="5" name="TextBox 4"/>
+          <p:cNvSpPr txBox="1"/>
+          <p:nvPr/>
+        </p:nvSpPr>
+        <p:spPr>
+          <a:xfrm>
+            <a:off x="411480" y="4124706"/>
+            <a:ext cx="11368735" cy="274320"/>
+          </a:xfrm>
+          <a:prstGeom prst="rect">
+            <a:avLst/>
+          </a:prstGeom>
+          <a:noFill/>
+        </p:spPr>
+        <p:txBody>
+          <a:bodyPr wrap="square">
+            <a:spAutoFit/>
+          </a:bodyPr>
+          <a:lstStyle/>
+          <a:p>
+            <a:pPr>
+              <a:spcAft>
+                <a:spcPts val="600"/>
+              </a:spcAft>
+            </a:pPr>
+            <a:r>
+              <a:rPr sz="1050" b="0">
+                <a:solidFill>
+                  <a:srgbClr val="6E6E6E"/>
+                </a:solidFill>
+                <a:latin typeface="Arial"/>
+              </a:rPr>
+              <a:t>All records, checks and figures are committed and re-runnable; the full demonstration runs in under a minute of compute.</a:t>
             </a:r>
           </a:p>
         </p:txBody>
@@ -7930,6 +8211,63 @@
         </p:nvSpPr>
         <p:spPr>
           <a:xfrm>
+            <a:off x="822960" y="2743200"/>
+            <a:ext cx="10545775" cy="1280160"/>
+          </a:xfrm>
+          <a:prstGeom prst="rect">
+            <a:avLst/>
+          </a:prstGeom>
+          <a:noFill/>
+        </p:spPr>
+        <p:txBody>
+          <a:bodyPr wrap="square">
+            <a:spAutoFit/>
+          </a:bodyPr>
+          <a:lstStyle/>
+          <a:p>
+            <a:pPr algn="ctr">
+              <a:spcAft>
+                <a:spcPts val="400"/>
+              </a:spcAft>
+            </a:pPr>
+            <a:r>
+              <a:rPr sz="4000" b="1">
+                <a:solidFill>
+                  <a:srgbClr val="1F4E79"/>
+                </a:solidFill>
+                <a:latin typeface="Arial"/>
+              </a:rPr>
+              <a:t>Backup</a:t>
+            </a:r>
+          </a:p>
+        </p:txBody>
+      </p:sp>
+    </p:spTree>
+  </p:cSld>
+  <p:clrMapOvr>
+    <a:masterClrMapping/>
+  </p:clrMapOvr>
+</p:sld>
+</file>
+
+<file path=ppt/slides/slide23.xml><?xml version="1.0" encoding="utf-8"?>
+<p:sld xmlns:a="http://schemas.openxmlformats.org/drawingml/2006/main" xmlns:p="http://schemas.openxmlformats.org/presentationml/2006/main" xmlns:r="http://schemas.openxmlformats.org/officeDocument/2006/relationships">
+  <p:cSld>
+    <p:spTree>
+      <p:nvGrpSpPr>
+        <p:cNvPr id="1" name=""/>
+        <p:cNvGrpSpPr/>
+        <p:nvPr/>
+      </p:nvGrpSpPr>
+      <p:grpSpPr/>
+      <p:sp>
+        <p:nvSpPr>
+          <p:cNvPr id="2" name="TextBox 1"/>
+          <p:cNvSpPr txBox="1"/>
+          <p:nvPr/>
+        </p:nvSpPr>
+        <p:spPr>
+          <a:xfrm>
             <a:off x="411480" y="201168"/>
             <a:ext cx="11368735" cy="914400"/>
           </a:xfrm>
@@ -8135,7 +8473,7 @@
                 </a:solidFill>
                 <a:latin typeface="Arial"/>
               </a:rPr>
-              <a:t>•  Option-3 open items: joint detector-leg optimization (null + pupil-image sharpness + distortion together — the current leg tuned for null alone gave up finest-pattern gain 0.84 → 0.50), response-curve-corrected scoring of the differential residuals, decomposition of the sub-1% shallow-angle residuals (rig geometry against polarization), and a real splitter-coating design at shallow incidence.</a:t>
+              <a:t>•  Option-3 open items: joint detector-leg optimization (null + pupil-image sharpness + distortion together — the current leg tuned for null alone gave up finest-pattern gain 0.84 → 0.50; the multi-color run shows that loss is geometric, so the leg, not the source, is the lever), response-curve-corrected scoring of the differential residuals, decomposition of the sub-1% shallow-angle residuals (rig geometry against polarization), and a real splitter-coating design at shallow incidence.</a:t>
             </a:r>
           </a:p>
           <a:p>
@@ -8151,7 +8489,7 @@
                 </a:solidFill>
                 <a:latin typeface="Arial"/>
               </a:rPr>
-              <a:t>•  Head-to-head campaign records (both instruments, one scoring library): templates/40_benches/dm_gauge_lib (registration / actuator fit / modal correction / both measurement factories; the two S3 batteries re-run identically through it as the equivalence gate) + tg_psi_dm96 and zwfs_dm96 stage reports S2–S5 (registration and kernel calibration, modal battery, differential head-to-head with break scale, photon-noise pricing).  Campaign READMEs carry the findings ledgers, including the corrected attributions (pattern-radius frame bias; the refuted sampling-starvation hypothesis).</a:t>
+              <a:t>•  Head-to-head campaign records (both instruments, one scoring library): templates/40_benches/dm_gauge_lib (registration / actuator fit / modal correction / both measurement factories; the two S3 batteries re-run identically through it as the equivalence gate) + tg_psi_dm96 and zwfs_dm96 stage reports S2–S6 (registration and kernel calibration, modal battery, differential head-to-head with break scale, photon-noise pricing, multi-color combination — dmg_color_comb).  Campaign READMEs carry the findings ledgers, including the corrected attributions (pattern-radius frame bias; the refuted sampling-starvation hypothesis).</a:t>
             </a:r>
           </a:p>
           <a:p>

--- a/demo_session/deck_tg_fang.pptx
+++ b/demo_session/deck_tg_fang.pptx
@@ -6026,7 +6026,7 @@
                 </a:solidFill>
                 <a:latin typeface="Arial"/>
               </a:rPr>
-              <a:t>A 10 nm actuator change reads to 46 pm through the calibrated interferometer, identically on a flat and a 30 nm working surface — and the interferometer does not break as the working state grows</a:t>
+              <a:t>A 10 nm change on a 30 nm working surface reads to 46 pm through the interferometer and 40 pm from one sensor frame; only the interferometer never folds</a:t>
             </a:r>
           </a:p>
         </p:txBody>
@@ -6124,7 +6124,7 @@
         </p:nvGraphicFramePr>
         <p:xfrm>
           <a:off x="411480" y="2465831"/>
-          <a:ext cx="11368735" cy="1120140"/>
+          <a:ext cx="11368735" cy="1400175"/>
         </p:xfrm>
         <a:graphic>
           <a:graphicData uri="http://schemas.openxmlformats.org/drawingml/2006/table">
@@ -6133,9 +6133,9 @@
                 <a:tableStyleId>{5C22544A-7EE6-4342-B048-85BDC9FD1C3A}</a:tableStyleId>
               </a:tblPr>
               <a:tblGrid>
-                <a:gridCol w="10349687"/>
+                <a:gridCol w="10422331"/>
                 <a:gridCol w="436880"/>
-                <a:gridCol w="582168"/>
+                <a:gridCol w="509524"/>
               </a:tblGrid>
               <a:tr h="280035">
                 <a:tc>
@@ -6194,7 +6194,7 @@
                           </a:solidFill>
                           <a:latin typeface="Arial"/>
                         </a:rPr>
-                        <a:t>error</a:t>
+                        <a:t>floor</a:t>
                       </a:r>
                     </a:p>
                   </a:txBody>
@@ -6286,7 +6286,7 @@
                           </a:solidFill>
                           <a:latin typeface="Arial"/>
                         </a:rPr>
-                        <a:t>Zernike sensor, frozen-reference linear reading</a:t>
+                        <a:t>Zernike sensor, linear reading (one frame)</a:t>
                       </a:r>
                     </a:p>
                   </a:txBody>
@@ -6308,7 +6308,7 @@
                           </a:solidFill>
                           <a:latin typeface="Arial"/>
                         </a:rPr>
-                        <a:t>0.66</a:t>
+                        <a:t>0.40</a:t>
                       </a:r>
                     </a:p>
                   </a:txBody>
@@ -6330,7 +6330,7 @@
                           </a:solidFill>
                           <a:latin typeface="Arial"/>
                         </a:rPr>
-                        <a:t>744 pm</a:t>
+                        <a:t>57 pm</a:t>
                       </a:r>
                     </a:p>
                   </a:txBody>
@@ -6354,7 +6354,7 @@
                           </a:solidFill>
                           <a:latin typeface="Arial"/>
                         </a:rPr>
-                        <a:t>Zernike sensor, multi-depth phase-stepped retrieval</a:t>
+                        <a:t>Zernike sensor, exact reading with iterated reference and base prior (one frame)</a:t>
                       </a:r>
                     </a:p>
                   </a:txBody>
@@ -6376,7 +6376,7 @@
                           </a:solidFill>
                           <a:latin typeface="Arial"/>
                         </a:rPr>
-                        <a:t>1.13</a:t>
+                        <a:t>0.95</a:t>
                       </a:r>
                     </a:p>
                   </a:txBody>
@@ -6398,13 +6398,81 @@
                           </a:solidFill>
                           <a:latin typeface="Arial"/>
                         </a:rPr>
-                        <a:t>773 pm</a:t>
+                        <a:t>40 pm</a:t>
                       </a:r>
                     </a:p>
                   </a:txBody>
                   <a:tcPr marL="54864" marR="54864" marT="18288" marB="18288">
                     <a:solidFill>
                       <a:srgbClr val="FFFFFF"/>
+                    </a:solidFill>
+                  </a:tcPr>
+                </a:tc>
+              </a:tr>
+              <a:tr h="280035">
+                <a:tc>
+                  <a:txBody>
+                    <a:bodyPr wrap="square"/>
+                    <a:lstStyle/>
+                    <a:p>
+                      <a:r>
+                        <a:rPr sz="1100" b="0">
+                          <a:solidFill>
+                            <a:srgbClr val="282828"/>
+                          </a:solidFill>
+                          <a:latin typeface="Arial"/>
+                        </a:rPr>
+                        <a:t>Zernike sensor, phase-stepped retrieval (four frames)</a:t>
+                      </a:r>
+                    </a:p>
+                  </a:txBody>
+                  <a:tcPr marL="54864" marR="54864" marT="18288" marB="18288">
+                    <a:solidFill>
+                      <a:srgbClr val="ECF1F6"/>
+                    </a:solidFill>
+                  </a:tcPr>
+                </a:tc>
+                <a:tc>
+                  <a:txBody>
+                    <a:bodyPr wrap="square"/>
+                    <a:lstStyle/>
+                    <a:p>
+                      <a:r>
+                        <a:rPr sz="1100" b="0">
+                          <a:solidFill>
+                            <a:srgbClr val="282828"/>
+                          </a:solidFill>
+                          <a:latin typeface="Arial"/>
+                        </a:rPr>
+                        <a:t>0.89</a:t>
+                      </a:r>
+                    </a:p>
+                  </a:txBody>
+                  <a:tcPr marL="54864" marR="54864" marT="18288" marB="18288">
+                    <a:solidFill>
+                      <a:srgbClr val="ECF1F6"/>
+                    </a:solidFill>
+                  </a:tcPr>
+                </a:tc>
+                <a:tc>
+                  <a:txBody>
+                    <a:bodyPr wrap="square"/>
+                    <a:lstStyle/>
+                    <a:p>
+                      <a:r>
+                        <a:rPr sz="1100" b="0">
+                          <a:solidFill>
+                            <a:srgbClr val="282828"/>
+                          </a:solidFill>
+                          <a:latin typeface="Arial"/>
+                        </a:rPr>
+                        <a:t>42 pm</a:t>
+                      </a:r>
+                    </a:p>
+                  </a:txBody>
+                  <a:tcPr marL="54864" marR="54864" marT="18288" marB="18288">
+                    <a:solidFill>
+                      <a:srgbClr val="ECF1F6"/>
                     </a:solidFill>
                   </a:tcPr>
                 </a:tc>
@@ -6421,7 +6489,7 @@
         </p:nvSpPr>
         <p:spPr>
           <a:xfrm>
-            <a:off x="411480" y="3732275"/>
+            <a:off x="411480" y="4012311"/>
             <a:ext cx="11368735" cy="274320"/>
           </a:xfrm>
           <a:prstGeom prst="rect">
@@ -6447,7 +6515,7 @@
                 </a:solidFill>
                 <a:latin typeface="Arial"/>
               </a:rPr>
-              <a:t>•  The break scale separates them: growing the working surface 30 → 480 nm rms costs the interferometer ~5% of gain and 44 → 55 pm of floor — it does not fold.  The Zernike sensor's linear reading folds beyond a ~30 nm working state; the phase-stepped retrieval holds to ~60 nm; beyond ~120 nm its recoveries still clear a formal detection threshold but are no longer measurements.</a:t>
+              <a:t>•  The break scale separates them: growing the working surface 30 → 480 nm rms costs the interferometer ~5% of gain and 44 → 55 pm of floor — it does not fold.  The Zernike sensor's one-frame exact reading holds to 40 nm rms on 1 mm actuators (50 nm on 2 mm) and the four-frame retrieval to 50–60 nm, measured on 47 sites at once; beyond ~120 nm its recoveries alias.</a:t>
             </a:r>
           </a:p>
           <a:p>
@@ -6463,7 +6531,7 @@
                 </a:solidFill>
                 <a:latin typeface="Arial"/>
               </a:rPr>
-              <a:t>•  Verdict as measured, not assumed: the working-state axis belongs to the interferometer; the Zernike sensor serves flat and small working states — and owns dynamic range on single frames (a 150 nm poke, 3 radians, retrieves within 9% via the depth ladder where the linear reading folds).</a:t>
+              <a:t>•  Verdict as measured, not assumed: the working-state axis belongs to the interferometer; the Zernike sensor reads small changes on a small working surface from one frame at a floor on par with the interferometer's.</a:t>
             </a:r>
           </a:p>
         </p:txBody>
@@ -6476,7 +6544,7 @@
         </p:nvSpPr>
         <p:spPr>
           <a:xfrm>
-            <a:off x="411480" y="5782817"/>
+            <a:off x="411480" y="5815203"/>
             <a:ext cx="11368735" cy="274320"/>
           </a:xfrm>
           <a:prstGeom prst="rect">
@@ -6502,7 +6570,7 @@
                 </a:solidFill>
                 <a:latin typeface="Arial"/>
               </a:rPr>
-              <a:t>96×96 rig; 48×48 (DST-class pitch) measured alongside with the same conclusions at 33 pm.  Records: tg96_s4_report.txt, zwfs_s4_report.txt; machinery factored into one scoring library (dm_gauge_lib) so both instruments run the identical estimator code.</a:t>
+              <a:t>96×96 rig, both instruments in actuator space through one scoring library (dm_gauge_lib); sensor numbers on the corrected sensor model at its compliant sampling (385 rays across, 2048 grid; its deck), corrected for the measured modal transfer.  Records: tg96_s4_report.txt, zwfs_dm96/runs/m2048.</a:t>
             </a:r>
           </a:p>
         </p:txBody>
@@ -6674,7 +6742,7 @@
                 </a:solidFill>
                 <a:latin typeface="Arial"/>
               </a:rPr>
-              <a:t>•  The mask is a complex transmission applied to the propagated field at focus — not a phase screen on rays: 346.2 nm etch in fused silica (π/2 at 632.8 nm, the VSG2 hardware value), gray-edge supersampled disk, diameter 2.0 λ/D as used (1.06 λ/D — the hardware spot — sign-inverts the fine-actuator band; the spot is a band-select lever we measured, not a free parameter); the mask is fixed glass, so its phase and λ/D diameter scale with wavelength — the multi-color slide.</a:t>
+              <a:t>•  The mask is a complex transmission applied to the propagated field at focus — not a phase screen on rays: 346.2 nm etch in fused silica (π/2 at 632.8 nm, the VSG2 hardware value), gray-edge supersampled disk, diameter 2.0 λ/D as used (a 3.0 λ/D spot only deepens the sensor's own low-order dip below 2 cycles per aperture; 1.06 λ/D is the hardware default); the mask is fixed glass, so its phase and λ/D diameter scale with wavelength — the multi-color slide.</a:t>
             </a:r>
           </a:p>
           <a:p>
@@ -6690,7 +6758,7 @@
                 </a:solidFill>
                 <a:latin typeface="Arial"/>
               </a:rPr>
-              <a:t>•  Propagation to and from the focus is physical optics (near-field reference-sphere sandwich), with the focal-plane sampling asserted at ≥6 pixels across the dimple — an interface we found silently starved when the tail was traced geometrically.</a:t>
+              <a:t>•  Propagation to and from the focus is physical optics — two reference spheres bracketing the mask with one shared radius, so the unmasked round trip is the identity (an asymmetric pair defocused the pupil image by 4.9 m in the first six stages; corrected, checked every run).  Sampling asserted: ≥6 pixels across the dimple, ≥2 camera pixels per actuator — the two pull opposite ways in the ray count, so the compliant configuration uses a 2048 grid.</a:t>
             </a:r>
           </a:p>
           <a:p>
@@ -6706,7 +6774,7 @@
                 </a:solidFill>
                 <a:latin typeface="Arial"/>
               </a:rPr>
-              <a:t>•  Two reconstructions, used per their measured strengths: a frozen-reference linear reading (calibrated against model-measured E₀ and E_b fields on the flat DM), and a multi-depth phase-stepped retrieval (π/2, π, 3π/2 + clear).  A structural fact worth comparing notes on: for a phase-only dimple |c|² = −2 Re c identically, so depth stepping yields two observables per pixel, not three — |E_b|² must come from a one-time calibration, not the ladder.</a:t>
+              <a:t>•  Three reconstructions, used per their measured strengths: a frozen-reference linear reading (calibrated against model-measured E₀ and E_b on the flat DM); the exact per-pixel inversion with the reference wave re-propagated through the mask model, its branch resolved once per working surface by a phase-stepped retrieval; and the multi-depth phase-stepped retrieval itself (π/2, π, 3π/2 + clear).  Worth comparing notes on: for a phase-only dimple |c|² = −2 Re c, so depth stepping yields two observables per pixel, not three — |E_b|² needs a one-time calibration.</a:t>
             </a:r>
           </a:p>
           <a:p>
@@ -6735,7 +6803,7 @@
         </p:nvSpPr>
         <p:spPr>
           <a:xfrm>
-            <a:off x="411480" y="5750814"/>
+            <a:off x="411480" y="6246114"/>
             <a:ext cx="11368735" cy="274320"/>
           </a:xfrm>
           <a:prstGeom prst="rect">
@@ -6834,7 +6902,7 @@
                 </a:solidFill>
                 <a:latin typeface="Arial"/>
               </a:rPr>
-              <a:t>All three readings reach 1 pm near 10¹⁵ photons per DM state — within 2× of each other — so systematics, not light, decide</a:t>
+              <a:t>The interferometer reaches 1 pm at 10¹⁵ photons per DM state, the Zernike sensor's readings at 10¹⁴ — both trivial, so systematics decide</a:t>
             </a:r>
           </a:p>
         </p:txBody>
@@ -6932,7 +7000,7 @@
         </p:nvGraphicFramePr>
         <p:xfrm>
           <a:off x="411480" y="2218182"/>
-          <a:ext cx="11368733" cy="1120140"/>
+          <a:ext cx="11368735" cy="1400175"/>
         </p:xfrm>
         <a:graphic>
           <a:graphicData uri="http://schemas.openxmlformats.org/drawingml/2006/table">
@@ -6941,9 +7009,9 @@
                 <a:tableStyleId>{5C22544A-7EE6-4342-B048-85BDC9FD1C3A}</a:tableStyleId>
               </a:tblPr>
               <a:tblGrid>
-                <a:gridCol w="3842952"/>
-                <a:gridCol w="4003075"/>
-                <a:gridCol w="3522706"/>
+                <a:gridCol w="7661859"/>
+                <a:gridCol w="1962404"/>
+                <a:gridCol w="1744472"/>
               </a:tblGrid>
               <a:tr h="280035">
                 <a:tc>
@@ -7094,7 +7162,7 @@
                           </a:solidFill>
                           <a:latin typeface="Arial"/>
                         </a:rPr>
-                        <a:t>Zernike linear</a:t>
+                        <a:t>Zernike linear (one frame)</a:t>
                       </a:r>
                     </a:p>
                   </a:txBody>
@@ -7116,7 +7184,7 @@
                           </a:solidFill>
                           <a:latin typeface="Arial"/>
                         </a:rPr>
-                        <a:t>3.7×10⁷/√N pm</a:t>
+                        <a:t>7.3×10⁶/√N pm</a:t>
                       </a:r>
                     </a:p>
                   </a:txBody>
@@ -7138,7 +7206,7 @@
                           </a:solidFill>
                           <a:latin typeface="Arial"/>
                         </a:rPr>
-                        <a:t>1.4×10¹⁵</a:t>
+                        <a:t>5.4×10¹³</a:t>
                       </a:r>
                     </a:p>
                   </a:txBody>
@@ -7162,7 +7230,7 @@
                           </a:solidFill>
                           <a:latin typeface="Arial"/>
                         </a:rPr>
-                        <a:t>Zernike stepped</a:t>
+                        <a:t>Zernike exact, iterated reference + base prior (one frame)</a:t>
                       </a:r>
                     </a:p>
                   </a:txBody>
@@ -7184,7 +7252,7 @@
                           </a:solidFill>
                           <a:latin typeface="Arial"/>
                         </a:rPr>
-                        <a:t>7.0×10⁷/√N pm</a:t>
+                        <a:t>9.4×10⁶/√N pm</a:t>
                       </a:r>
                     </a:p>
                   </a:txBody>
@@ -7206,13 +7274,81 @@
                           </a:solidFill>
                           <a:latin typeface="Arial"/>
                         </a:rPr>
-                        <a:t>5×10¹⁵</a:t>
+                        <a:t>8.8×10¹³</a:t>
                       </a:r>
                     </a:p>
                   </a:txBody>
                   <a:tcPr marL="54864" marR="54864" marT="18288" marB="18288">
                     <a:solidFill>
                       <a:srgbClr val="FFFFFF"/>
+                    </a:solidFill>
+                  </a:tcPr>
+                </a:tc>
+              </a:tr>
+              <a:tr h="280035">
+                <a:tc>
+                  <a:txBody>
+                    <a:bodyPr wrap="square"/>
+                    <a:lstStyle/>
+                    <a:p>
+                      <a:r>
+                        <a:rPr sz="1100" b="0">
+                          <a:solidFill>
+                            <a:srgbClr val="282828"/>
+                          </a:solidFill>
+                          <a:latin typeface="Arial"/>
+                        </a:rPr>
+                        <a:t>Zernike phase-stepped (four frames)</a:t>
+                      </a:r>
+                    </a:p>
+                  </a:txBody>
+                  <a:tcPr marL="54864" marR="54864" marT="18288" marB="18288">
+                    <a:solidFill>
+                      <a:srgbClr val="ECF1F6"/>
+                    </a:solidFill>
+                  </a:tcPr>
+                </a:tc>
+                <a:tc>
+                  <a:txBody>
+                    <a:bodyPr wrap="square"/>
+                    <a:lstStyle/>
+                    <a:p>
+                      <a:r>
+                        <a:rPr sz="1100" b="0">
+                          <a:solidFill>
+                            <a:srgbClr val="282828"/>
+                          </a:solidFill>
+                          <a:latin typeface="Arial"/>
+                        </a:rPr>
+                        <a:t>1.0×10⁷/√N pm</a:t>
+                      </a:r>
+                    </a:p>
+                  </a:txBody>
+                  <a:tcPr marL="54864" marR="54864" marT="18288" marB="18288">
+                    <a:solidFill>
+                      <a:srgbClr val="ECF1F6"/>
+                    </a:solidFill>
+                  </a:tcPr>
+                </a:tc>
+                <a:tc>
+                  <a:txBody>
+                    <a:bodyPr wrap="square"/>
+                    <a:lstStyle/>
+                    <a:p>
+                      <a:r>
+                        <a:rPr sz="1100" b="0">
+                          <a:solidFill>
+                            <a:srgbClr val="282828"/>
+                          </a:solidFill>
+                          <a:latin typeface="Arial"/>
+                        </a:rPr>
+                        <a:t>1.0×10¹⁴</a:t>
+                      </a:r>
+                    </a:p>
+                  </a:txBody>
+                  <a:tcPr marL="54864" marR="54864" marT="18288" marB="18288">
+                    <a:solidFill>
+                      <a:srgbClr val="ECF1F6"/>
                     </a:solidFill>
                   </a:tcPr>
                 </a:tc>
@@ -7229,7 +7365,7 @@
         </p:nvSpPr>
         <p:spPr>
           <a:xfrm>
-            <a:off x="411480" y="3484626"/>
+            <a:off x="411480" y="3764661"/>
             <a:ext cx="11368735" cy="274320"/>
           </a:xfrm>
           <a:prstGeom prst="rect">
@@ -7271,7 +7407,7 @@
                 </a:solidFill>
                 <a:latin typeface="Arial"/>
               </a:rPr>
-              <a:t>•  10¹⁵ photons at 633 nm is ~0.3 mJ — trivial for a bench source.  The 1 pm budget is therefore a systematics and gain-stability budget (gain jitter measured at the 0.1% class), not a photon budget — and the sensors' photon economies do not discriminate between them.</a:t>
+              <a:t>•  10¹⁵ photons at 633 nm is ~0.3 mJ — trivial for a bench source.  The 1 pm budget is therefore a systematics and gain-stability budget (gain jitter measured at the 0.1% class), not a photon budget.  The sensor's tenfold photon advantage over the interferometer is real but does not decide anything at these levels.</a:t>
             </a:r>
           </a:p>
         </p:txBody>
@@ -7284,7 +7420,7 @@
         </p:nvSpPr>
         <p:spPr>
           <a:xfrm>
-            <a:off x="411480" y="5039868"/>
+            <a:off x="411480" y="5319903"/>
             <a:ext cx="11368735" cy="274320"/>
           </a:xfrm>
           <a:prstGeom prst="rect">
@@ -7310,7 +7446,7 @@
                 </a:solidFill>
                 <a:latin typeface="Arial"/>
               </a:rPr>
-              <a:t>Scenario: the head-to-head row (single 10 nm change on the 30 nm working surface, 96×96).  Detector read noise, drift and calibration noise are the natural next terms once a use case fixes them.  Records: tg96_s5noise_report.txt, zwfs_s5noise_report.txt.</a:t>
+              <a:t>Scenario: the head-to-head row (single 10 nm change on the 30 nm working surface, 96×96).  Detector read noise, drift and calibration noise are the natural next terms once a use case fixes them.  Records: tg96_s5noise_report.txt; zwfs_dm96/runs/rec193full (corrected sensor model).</a:t>
             </a:r>
           </a:p>
         </p:txBody>
@@ -7657,7 +7793,7 @@
                 </a:solidFill>
                 <a:latin typeface="Arial"/>
               </a:rPr>
-              <a:t>Color moves the sensor's blind bands, not the interferometer's</a:t>
+              <a:t>Colour is a lever for neither instrument</a:t>
             </a:r>
           </a:p>
           <a:p>
@@ -7673,7 +7809,7 @@
                 </a:solidFill>
                 <a:latin typeface="Arial"/>
               </a:rPr>
-              <a:t>Five colors, 480–780 nm, lift the sensor's floors 3–4× and halve its dense-random error; every interferometer number holds to three digits</a:t>
+              <a:t>On the corrected sensor model five colours lift the sensor's transfer by 3% and its rows not at all; every interferometer number holds to three digits</a:t>
             </a:r>
           </a:p>
         </p:txBody>
@@ -7724,7 +7860,7 @@
       </p:sp>
       <p:pic>
         <p:nvPicPr>
-          <p:cNvPr id="4" name="Picture 3" descr="crop_zwfs_s6color_zwfs.png"/>
+          <p:cNvPr id="4" name="Picture 3" descr="crop_zwfs_rec193full_color_L.png"/>
           <p:cNvPicPr>
             <a:picLocks noChangeAspect="1"/>
           </p:cNvPicPr>
@@ -7738,8 +7874,8 @@
         </p:blipFill>
         <p:spPr>
           <a:xfrm>
-            <a:off x="1826947" y="1298448"/>
-            <a:ext cx="2975504" cy="2531872"/>
+            <a:off x="2023695" y="1298448"/>
+            <a:ext cx="2582008" cy="2531872"/>
           </a:xfrm>
           <a:prstGeom prst="rect">
             <a:avLst/>
@@ -7754,7 +7890,7 @@
         </p:nvSpPr>
         <p:spPr>
           <a:xfrm>
-            <a:off x="411480" y="3848608"/>
+            <a:off x="411480" y="3848607"/>
             <a:ext cx="5806440" cy="394208"/>
           </a:xfrm>
           <a:prstGeom prst="rect">
@@ -7780,7 +7916,7 @@
                 </a:solidFill>
                 <a:latin typeface="Arial"/>
               </a:rPr>
-              <a:t>Zernike sensor: the transfer null near 30 cycles/pupil at 632.8 nm sits at 40 cycles at 480 nm and at 20 at 780 nm; the five-color combination (black) stays above 0.99.</a:t>
+              <a:t>Zernike sensor, linear reading, corrected model: five colours share one smooth transfer with only the dimple's own low-order dip; the five-colour combination (orange) sits at 0.99–1.</a:t>
             </a:r>
           </a:p>
         </p:txBody>
@@ -7882,7 +8018,7 @@
                 </a:solidFill>
                 <a:latin typeface="Arial"/>
               </a:rPr>
-              <a:t>•  Sensor: the dimple is fixed glass — its phase and λ/D size scale with wavelength, so no two colors are blind at the same frequency, and a multi-channel Wiener estimate on the actuator lattice carries each mode with the colors that see it.  On the 30 nm working surface: single-actuator floor 720 → 224 pm (SNR 9 → 35), dense random 16.4 → 7.2 nm; the undetected grid case (47 actuators at 1 nm) rises from SNR 1.5 to 3.4 — still short of 5.</a:t>
+              <a:t>•  Sensor: the blind band that first seemed to migrate with wavelength was the defocused sensor model's Talbot null.  On the corrected model the five single-colour transfers bottom at 0.92–0.97 after the Wiener step and their combination at 0.991; on the 30 nm working surface the one-frame exact reading's SNR is 269 at 632.8 nm, 183 combined, 255 for the best pair (700 + 780 nm).  What stays chromatic is range: the reddest colour is the best single colour (smaller phase per nanometre, a 1.6 λ/D dimple).</a:t>
             </a:r>
           </a:p>
           <a:p>
@@ -7911,7 +8047,7 @@
         </p:nvSpPr>
         <p:spPr>
           <a:xfrm>
-            <a:off x="411480" y="6329933"/>
+            <a:off x="411480" y="6577584"/>
             <a:ext cx="11368735" cy="274320"/>
           </a:xfrm>
           <a:prstGeom prst="rect">
@@ -7937,7 +8073,7 @@
                 </a:solidFill>
                 <a:latin typeface="Arial"/>
               </a:rPr>
-              <a:t>One physical mask (346.2 nm etch, dispersion-corrected index), every calibration redone per color; achromatic quarter-wave plates and dispersionless lenses assumed; noiseless — K colors cost K× the frames.  Records: zwfs_s6color_report.txt, tg96_s6color_report.txt (96×96).</a:t>
+              <a:t>One physical mask (346.2 nm etch, dispersion-corrected index), every calibration redone per color; achromatic quarter-wave plates and dispersionless lenses assumed; noiseless — K colors cost K× the frames.  Records: zwfs_dm96/runs/rec193full (corrected sensor model), tg96_s6color_report.txt (96×96).</a:t>
             </a:r>
           </a:p>
         </p:txBody>
@@ -8489,7 +8625,7 @@
                 </a:solidFill>
                 <a:latin typeface="Arial"/>
               </a:rPr>
-              <a:t>•  Head-to-head campaign records (both instruments, one scoring library): templates/40_benches/dm_gauge_lib (registration / actuator fit / modal correction / both measurement factories; the two S3 batteries re-run identically through it as the equivalence gate) + tg_psi_dm96 and zwfs_dm96 stage reports S2–S6 (registration and kernel calibration, modal battery, differential head-to-head with break scale, photon-noise pricing, multi-color combination — dmg_color_comb).  Campaign READMEs carry the findings ledgers, including the corrected attributions (pattern-radius frame bias; the refuted sampling-starvation hypothesis).</a:t>
+              <a:t>•  Head-to-head campaign records (both instruments, one scoring library): templates/40_benches/dm_gauge_lib (registration / actuator fit / modal correction / both measurement factories; the two S3 batteries re-run identically through it as the equivalence gate) + tg_psi_dm96 stage reports S2–S6 and, for the sensor, the parameterized runner's runs (zwfs_dm96/runs: rec193, ng385, ng385s3, m2048, rec193full) on the corrected sensor model.  Campaign READMEs carry the findings ledgers, including the corrected attributions (pattern-radius frame bias; the refuted sampling-starvation hypothesis; the defocused mask bracket behind every S1–S6 sensor number).</a:t>
             </a:r>
           </a:p>
           <a:p>

--- a/demo_session/deck_tg_fang.pptx
+++ b/demo_session/deck_tg_fang.pptx
@@ -6026,7 +6026,7 @@
                 </a:solidFill>
                 <a:latin typeface="Arial"/>
               </a:rPr>
-              <a:t>A 10 nm change on a 30 nm working surface reads to 46 pm through the interferometer and 40 pm from one sensor frame; only the interferometer never folds</a:t>
+              <a:t>A 10 nm change on a 30 nm working surface reads to 46 pm through the interferometer and 34 pm from one sensor frame; only the interferometer never folds</a:t>
             </a:r>
           </a:p>
         </p:txBody>
@@ -6308,7 +6308,7 @@
                           </a:solidFill>
                           <a:latin typeface="Arial"/>
                         </a:rPr>
-                        <a:t>0.40</a:t>
+                        <a:t>0.35</a:t>
                       </a:r>
                     </a:p>
                   </a:txBody>
@@ -6330,7 +6330,7 @@
                           </a:solidFill>
                           <a:latin typeface="Arial"/>
                         </a:rPr>
-                        <a:t>57 pm</a:t>
+                        <a:t>63 pm</a:t>
                       </a:r>
                     </a:p>
                   </a:txBody>
@@ -6376,7 +6376,7 @@
                           </a:solidFill>
                           <a:latin typeface="Arial"/>
                         </a:rPr>
-                        <a:t>0.95</a:t>
+                        <a:t>0.93</a:t>
                       </a:r>
                     </a:p>
                   </a:txBody>
@@ -6398,7 +6398,7 @@
                           </a:solidFill>
                           <a:latin typeface="Arial"/>
                         </a:rPr>
-                        <a:t>40 pm</a:t>
+                        <a:t>34 pm</a:t>
                       </a:r>
                     </a:p>
                   </a:txBody>
@@ -6444,7 +6444,7 @@
                           </a:solidFill>
                           <a:latin typeface="Arial"/>
                         </a:rPr>
-                        <a:t>0.89</a:t>
+                        <a:t>0.87</a:t>
                       </a:r>
                     </a:p>
                   </a:txBody>
@@ -6466,7 +6466,7 @@
                           </a:solidFill>
                           <a:latin typeface="Arial"/>
                         </a:rPr>
-                        <a:t>42 pm</a:t>
+                        <a:t>36 pm</a:t>
                       </a:r>
                     </a:p>
                   </a:txBody>
@@ -6570,7 +6570,7 @@
                 </a:solidFill>
                 <a:latin typeface="Arial"/>
               </a:rPr>
-              <a:t>96×96 rig, both instruments in actuator space through one scoring library (dm_gauge_lib); sensor numbers on the corrected sensor model at its compliant sampling (385 rays across, 2048 grid; its deck), corrected for the measured modal transfer.  Records: tg96_s4_report.txt, zwfs_dm96/runs/m2048.</a:t>
+              <a:t>96×96 rig, both instruments in actuator space through one scoring library (dm_gauge_lib); sensor numbers on the corrected sensor model at its compliant sampling (385 rays across, 2048 grid; its deck), corrected for the measured modal transfer.  Records: tg96_s4_report.txt, zwfs_dm96/runs/m2048_lat.  The sensor's actuator fit samples its response pattern at the actuator centre (a 0.14 mm sampling bias found 2026-09-10); the interferometer's S3/S4 fit shares the bias and is to be re-run the same way in its reflective build.</a:t>
             </a:r>
           </a:p>
         </p:txBody>

--- a/demo_session/deck_tg_fang.pptx
+++ b/demo_session/deck_tg_fang.pptx
@@ -6026,7 +6026,7 @@
                 </a:solidFill>
                 <a:latin typeface="Arial"/>
               </a:rPr>
-              <a:t>A 10 nm change on a 30 nm working surface reads to 46 pm through the interferometer and 34 pm from one sensor frame; only the interferometer never folds</a:t>
+              <a:t>A 10 nm change on a 30 nm working surface reads to 46 pm through the interferometer and 5 pm through the sensor calibrated on that surface; only the interferometer never folds</a:t>
             </a:r>
           </a:p>
         </p:txBody>
@@ -6286,7 +6286,7 @@
                           </a:solidFill>
                           <a:latin typeface="Arial"/>
                         </a:rPr>
-                        <a:t>Zernike sensor, linear reading (one frame)</a:t>
+                        <a:t>Zernike sensor, exact reading with iterated reference and base prior (one frame; calibrated on the flat)</a:t>
                       </a:r>
                     </a:p>
                   </a:txBody>
@@ -6308,7 +6308,7 @@
                           </a:solidFill>
                           <a:latin typeface="Arial"/>
                         </a:rPr>
-                        <a:t>0.35</a:t>
+                        <a:t>0.93</a:t>
                       </a:r>
                     </a:p>
                   </a:txBody>
@@ -6330,7 +6330,7 @@
                           </a:solidFill>
                           <a:latin typeface="Arial"/>
                         </a:rPr>
-                        <a:t>63 pm</a:t>
+                        <a:t>34 pm</a:t>
                       </a:r>
                     </a:p>
                   </a:txBody>
@@ -6354,7 +6354,7 @@
                           </a:solidFill>
                           <a:latin typeface="Arial"/>
                         </a:rPr>
-                        <a:t>Zernike sensor, exact reading with iterated reference and base prior (one frame)</a:t>
+                        <a:t>Zernike sensor, phase-stepped retrieval (four frames; response matrix measured on the working surface)</a:t>
                       </a:r>
                     </a:p>
                   </a:txBody>
@@ -6376,7 +6376,7 @@
                           </a:solidFill>
                           <a:latin typeface="Arial"/>
                         </a:rPr>
-                        <a:t>0.93</a:t>
+                        <a:t>0.99</a:t>
                       </a:r>
                     </a:p>
                   </a:txBody>
@@ -6398,7 +6398,7 @@
                           </a:solidFill>
                           <a:latin typeface="Arial"/>
                         </a:rPr>
-                        <a:t>34 pm</a:t>
+                        <a:t>5 pm</a:t>
                       </a:r>
                     </a:p>
                   </a:txBody>
@@ -6422,7 +6422,7 @@
                           </a:solidFill>
                           <a:latin typeface="Arial"/>
                         </a:rPr>
-                        <a:t>Zernike sensor, phase-stepped retrieval (four frames)</a:t>
+                        <a:t>Zernike sensor, linear reading (one frame; response matrix measured on the working surface)</a:t>
                       </a:r>
                     </a:p>
                   </a:txBody>
@@ -6444,7 +6444,7 @@
                           </a:solidFill>
                           <a:latin typeface="Arial"/>
                         </a:rPr>
-                        <a:t>0.87</a:t>
+                        <a:t>1.05</a:t>
                       </a:r>
                     </a:p>
                   </a:txBody>
@@ -6466,7 +6466,7 @@
                           </a:solidFill>
                           <a:latin typeface="Arial"/>
                         </a:rPr>
-                        <a:t>36 pm</a:t>
+                        <a:t>23 pm</a:t>
                       </a:r>
                     </a:p>
                   </a:txBody>
@@ -6531,7 +6531,7 @@
                 </a:solidFill>
                 <a:latin typeface="Arial"/>
               </a:rPr>
-              <a:t>•  Verdict as measured, not assumed: the working-state axis belongs to the interferometer; the Zernike sensor reads small changes on a small working surface from one frame at a floor on par with the interferometer's.</a:t>
+              <a:t>•  Verdict as measured, not assumed: the working-state axis belongs to the interferometer; the Zernike sensor, with its response matrix measured on the working surface (64 sparse-grid states, 256 frames once), reads small changes there at a floor ten times below the interferometer's — the calibration a real DM needs anyway, and the same measurement the interferometer's own calibration should adopt.</a:t>
             </a:r>
           </a:p>
         </p:txBody>
@@ -6544,7 +6544,7 @@
         </p:nvSpPr>
         <p:spPr>
           <a:xfrm>
-            <a:off x="411480" y="5815203"/>
+            <a:off x="411480" y="6310502"/>
             <a:ext cx="11368735" cy="274320"/>
           </a:xfrm>
           <a:prstGeom prst="rect">
@@ -6570,7 +6570,7 @@
                 </a:solidFill>
                 <a:latin typeface="Arial"/>
               </a:rPr>
-              <a:t>96×96 rig, both instruments in actuator space through one scoring library (dm_gauge_lib); sensor numbers on the corrected sensor model at its compliant sampling (385 rays across, 2048 grid; its deck), corrected for the measured modal transfer.  Records: tg96_s4_report.txt, zwfs_dm96/runs/m2048_lat.  The sensor's actuator fit samples its response pattern at the actuator centre (a 0.14 mm sampling bias found 2026-09-10); the interferometer's S3/S4 fit shares the bias and is to be re-run the same way in its reflective build.</a:t>
+              <a:t>96×96 rig, both instruments in actuator space through one scoring library (dm_gauge_lib); sensor numbers on the corrected sensor model at its compliant sampling (385 rays across, 2048 grid; its deck), corrected for the measured modal transfer.  Records: tg96_s4_report.txt, zwfs_dm96/runs/m2048_lat.  Sensor rows: 385 rays; the matrix calibration = every actuator's response measured once from sparse multiplexed grids (the sensor's piston null carried as a rank-one term).  The interferometer's S3/S4 fit still uses a single-site response pattern (with a 0.14 mm stencil bias found 2026-09-10); both are to be re-run with the measured matrix in its reflective build.</a:t>
             </a:r>
           </a:p>
         </p:txBody>

--- a/demo_session/deck_tg_fang.pptx
+++ b/demo_session/deck_tg_fang.pptx
@@ -7793,7 +7793,7 @@
                 </a:solidFill>
                 <a:latin typeface="Arial"/>
               </a:rPr>
-              <a:t>Colour is a lever for neither instrument</a:t>
+              <a:t>Color is a lever for neither instrument</a:t>
             </a:r>
           </a:p>
           <a:p>
@@ -7809,7 +7809,7 @@
                 </a:solidFill>
                 <a:latin typeface="Arial"/>
               </a:rPr>
-              <a:t>On the corrected sensor model five colours lift the sensor's transfer by 3% and its rows not at all; every interferometer number holds to three digits</a:t>
+              <a:t>On the corrected sensor model five colors lift the sensor's transfer by 3% and its rows not at all; every interferometer number holds to three digits</a:t>
             </a:r>
           </a:p>
         </p:txBody>
@@ -7916,7 +7916,7 @@
                 </a:solidFill>
                 <a:latin typeface="Arial"/>
               </a:rPr>
-              <a:t>Zernike sensor, linear reading, corrected model: five colours share one smooth transfer with only the dimple's own low-order dip; the five-colour combination (orange) sits at 0.99–1.</a:t>
+              <a:t>Zernike sensor, linear reading, corrected model: five colors share one smooth transfer with only the dimple's own low-order dip; the five-color combination (orange) sits at 0.99–1.</a:t>
             </a:r>
           </a:p>
         </p:txBody>
@@ -8018,7 +8018,7 @@
                 </a:solidFill>
                 <a:latin typeface="Arial"/>
               </a:rPr>
-              <a:t>•  Sensor: the blind band that first seemed to migrate with wavelength was the defocused sensor model's Talbot null.  On the corrected model the five single-colour transfers bottom at 0.92–0.97 after the Wiener step and their combination at 0.991; on the 30 nm working surface the one-frame exact reading's SNR is 269 at 632.8 nm, 183 combined, 255 for the best pair (700 + 780 nm).  What stays chromatic is range: the reddest colour is the best single colour (smaller phase per nanometre, a 1.6 λ/D dimple).</a:t>
+              <a:t>•  Sensor: the blind band that first seemed to migrate with wavelength was the defocused sensor model's Talbot null.  On the corrected model the five single-color transfers bottom at 0.92–0.97 after the Wiener step and their combination at 0.991; on the 30 nm working surface the one-frame exact reading's SNR is 269 at 632.8 nm, 183 combined, 255 for the best pair (700 + 780 nm).  What stays chromatic is range: the reddest color is the best single color (smaller phase per nanometer, a 1.6 λ/D dimple).</a:t>
             </a:r>
           </a:p>
           <a:p>

--- a/demo_session/deck_tg_fang.pptx
+++ b/demo_session/deck_tg_fang.pptx
@@ -6902,7 +6902,7 @@
                 </a:solidFill>
                 <a:latin typeface="Arial"/>
               </a:rPr>
-              <a:t>The interferometer reaches 1 pm at 10¹⁵ photons per DM state, the Zernike sensor's readings at 10¹⁴ — both trivial, so systematics decide</a:t>
+              <a:t>The interferometer reaches 1 pm at 10¹⁵ photons per measurement, the Zernike sensor's readings at 10¹⁴ — both trivial, so systematics decide</a:t>
             </a:r>
           </a:p>
         </p:txBody>
@@ -6985,7 +6985,7 @@
                 </a:solidFill>
                 <a:latin typeface="Arial"/>
               </a:rPr>
-              <a:t>•  Method: the optical fields do not depend on noise, so noiseless frames are captured once per DM state and photon shot noise is Monte-Carloed numerically; the photon budget per state is split across each reading's frames (interferometer 4, linear 1, stepped 4) — equal light and equal time across modalities.</a:t>
+              <a:t>•  Method: the optical fields do not depend on noise, so noiseless frames are captured once per measurement (one DM shape measured once) and photon shot noise is Monte-Carloed numerically; the photon budget per measurement is split across each reading's frames (interferometer 4, linear 1, stepped 4) — equal light and equal time across modalities.</a:t>
             </a:r>
           </a:p>
         </p:txBody>
@@ -7009,9 +7009,9 @@
                 <a:tableStyleId>{5C22544A-7EE6-4342-B048-85BDC9FD1C3A}</a:tableStyleId>
               </a:tblPr>
               <a:tblGrid>
-                <a:gridCol w="7661859"/>
+                <a:gridCol w="6935419"/>
                 <a:gridCol w="1962404"/>
-                <a:gridCol w="1744472"/>
+                <a:gridCol w="2470912"/>
               </a:tblGrid>
               <a:tr h="280035">
                 <a:tc>
@@ -7070,7 +7070,7 @@
                           </a:solidFill>
                           <a:latin typeface="Arial"/>
                         </a:rPr>
-                        <a:t>photons/state for 1 pm</a:t>
+                        <a:t>photons per measurement for 1 pm</a:t>
                       </a:r>
                     </a:p>
                   </a:txBody>
